--- a/教学-智能体知识库录入.pptx
+++ b/教学-智能体知识库录入.pptx
@@ -16,6 +16,7 @@
     <p:sldId id="264" r:id="rId15"/>
     <p:sldId id="265" r:id="rId16"/>
     <p:sldId id="266" r:id="rId17"/>
+    <p:sldId id="267" r:id="rId18"/>
   </p:sldIdLst>
   <p:sldSz cx="12191695" cy="6858000" type="screen4x3"/>
   <p:notesSz cx="6858000" cy="9144000"/>
@@ -3202,7 +3203,7 @@
         </p:nvSpPr>
         <p:spPr>
           <a:xfrm>
-            <a:off x="1005840" y="1371600"/>
+            <a:off x="1005840" y="1280160"/>
             <a:ext cx="10058400" cy="457200"/>
           </a:xfrm>
           <a:prstGeom prst="rect">
@@ -3244,7 +3245,7 @@
         </p:nvSpPr>
         <p:spPr>
           <a:xfrm>
-            <a:off x="1005840" y="2103120"/>
+            <a:off x="1005840" y="2011680"/>
             <a:ext cx="10241280" cy="2011680"/>
           </a:xfrm>
           <a:prstGeom prst="rect">
@@ -3267,7 +3268,7 @@
               </a:spcAft>
             </a:pPr>
             <a:r>
-              <a:rPr sz="5400" b="1">
+              <a:rPr sz="5200" b="1">
                 <a:solidFill>
                   <a:srgbClr val="241D14"/>
                 </a:solidFill>
@@ -3286,7 +3287,7 @@
               </a:spcAft>
             </a:pPr>
             <a:r>
-              <a:rPr sz="4000" b="1">
+              <a:rPr sz="3800" b="1">
                 <a:solidFill>
                   <a:srgbClr val="A5813A"/>
                 </a:solidFill>
@@ -3305,7 +3306,7 @@
         </p:nvSpPr>
         <p:spPr>
           <a:xfrm>
-            <a:off x="1005840" y="4480560"/>
+            <a:off x="1005840" y="4389120"/>
             <a:ext cx="10058400" cy="1097280"/>
           </a:xfrm>
           <a:prstGeom prst="rect">
@@ -3328,7 +3329,7 @@
               </a:spcAft>
             </a:pPr>
             <a:r>
-              <a:rPr sz="2000" b="0">
+              <a:rPr sz="1900" b="0">
                 <a:solidFill>
                   <a:srgbClr val="6B6459"/>
                 </a:solidFill>
@@ -3347,7 +3348,7 @@
               </a:spcAft>
             </a:pPr>
             <a:r>
-              <a:rPr sz="2000" b="0">
+              <a:rPr sz="1900" b="0">
                 <a:solidFill>
                   <a:srgbClr val="6B6459"/>
                 </a:solidFill>
@@ -3436,8 +3437,8 @@
         </p:nvSpPr>
         <p:spPr>
           <a:xfrm>
-            <a:off x="822960" y="502920"/>
-            <a:ext cx="1280160" cy="1280160"/>
+            <a:off x="640080" y="457200"/>
+            <a:ext cx="1143000" cy="1143000"/>
           </a:xfrm>
           <a:prstGeom prst="roundRect">
             <a:avLst/>
@@ -3480,8 +3481,8 @@
         </p:nvSpPr>
         <p:spPr>
           <a:xfrm>
-            <a:off x="822960" y="502920"/>
-            <a:ext cx="1280160" cy="1280160"/>
+            <a:off x="640080" y="457200"/>
+            <a:ext cx="1143000" cy="1143000"/>
           </a:xfrm>
           <a:prstGeom prst="rect">
             <a:avLst/>
@@ -3503,7 +3504,7 @@
               </a:spcAft>
             </a:pPr>
             <a:r>
-              <a:rPr sz="1200" b="1">
+              <a:rPr sz="1100" b="1">
                 <a:solidFill>
                   <a:srgbClr val="E6CF8E"/>
                 </a:solidFill>
@@ -3522,13 +3523,13 @@
               </a:spcAft>
             </a:pPr>
             <a:r>
-              <a:rPr sz="4000" b="1">
+              <a:rPr sz="3400" b="1">
                 <a:solidFill>
                   <a:srgbClr val="FFFFFF"/>
                 </a:solidFill>
                 <a:latin typeface="Microsoft YaHei"/>
               </a:rPr>
-              <a:t>7</a:t>
+              <a:t>6</a:t>
             </a:r>
           </a:p>
         </p:txBody>
@@ -3541,8 +3542,8 @@
         </p:nvSpPr>
         <p:spPr>
           <a:xfrm>
-            <a:off x="2286000" y="548640"/>
-            <a:ext cx="9144000" cy="411480"/>
+            <a:off x="1920240" y="502920"/>
+            <a:ext cx="9144000" cy="365760"/>
           </a:xfrm>
           <a:prstGeom prst="rect">
             <a:avLst/>
@@ -3564,13 +3565,13 @@
               </a:spcAft>
             </a:pPr>
             <a:r>
-              <a:rPr sz="1400" b="1">
+              <a:rPr sz="1300" b="1">
                 <a:solidFill>
                   <a:srgbClr val="7A5C1E"/>
                 </a:solidFill>
                 <a:latin typeface="Microsoft YaHei"/>
               </a:rPr>
-              <a:t>STEP 7-8 · 保存 &amp; 验证</a:t>
+              <a:t>STEP 6 · 蒸馏技能（可选）</a:t>
             </a:r>
           </a:p>
         </p:txBody>
@@ -3583,8 +3584,8 @@
         </p:nvSpPr>
         <p:spPr>
           <a:xfrm>
-            <a:off x="2286000" y="932688"/>
-            <a:ext cx="9326880" cy="822960"/>
+            <a:off x="1920240" y="868680"/>
+            <a:ext cx="9875520" cy="731520"/>
           </a:xfrm>
           <a:prstGeom prst="rect">
             <a:avLst/>
@@ -3606,13 +3607,13 @@
               </a:spcAft>
             </a:pPr>
             <a:r>
-              <a:rPr sz="3000" b="1">
+              <a:rPr sz="2600" b="1">
                 <a:solidFill>
                   <a:srgbClr val="241D14"/>
                 </a:solidFill>
                 <a:latin typeface="Microsoft YaHei"/>
               </a:rPr>
-              <a:t>保存生效，再去流水线验证</a:t>
+              <a:t>把方法论蒸馏成可复用技能</a:t>
             </a:r>
           </a:p>
         </p:txBody>
@@ -3625,8 +3626,349 @@
         </p:nvSpPr>
         <p:spPr>
           <a:xfrm>
-            <a:off x="822960" y="2103120"/>
-            <a:ext cx="10515600" cy="777240"/>
+            <a:off x="640080" y="1920240"/>
+            <a:ext cx="4297680" cy="658368"/>
+          </a:xfrm>
+          <a:prstGeom prst="roundRect">
+            <a:avLst/>
+          </a:prstGeom>
+          <a:solidFill>
+            <a:srgbClr val="FFFFFF"/>
+          </a:solidFill>
+          <a:ln w="13970">
+            <a:solidFill>
+              <a:srgbClr val="EADFC6"/>
+            </a:solidFill>
+          </a:ln>
+          <a:effectLst/>
+        </p:spPr>
+        <p:style>
+          <a:lnRef idx="1">
+            <a:schemeClr val="accent1"/>
+          </a:lnRef>
+          <a:fillRef idx="3">
+            <a:schemeClr val="accent1"/>
+          </a:fillRef>
+          <a:effectRef idx="2">
+            <a:schemeClr val="accent1"/>
+          </a:effectRef>
+          <a:fontRef idx="minor">
+            <a:schemeClr val="lt1"/>
+          </a:fontRef>
+        </p:style>
+        <p:txBody>
+          <a:bodyPr rtlCol="0" anchor="ctr"/>
+          <a:lstStyle/>
+          <a:p>
+            <a:pPr algn="ctr"/>
+          </a:p>
+        </p:txBody>
+      </p:sp>
+      <p:sp>
+        <p:nvSpPr>
+          <p:cNvPr id="8" name="TextBox 7"/>
+          <p:cNvSpPr txBox="1"/>
+          <p:nvPr/>
+        </p:nvSpPr>
+        <p:spPr>
+          <a:xfrm>
+            <a:off x="841248" y="2011680"/>
+            <a:ext cx="3931920" cy="475488"/>
+          </a:xfrm>
+          <a:prstGeom prst="rect">
+            <a:avLst/>
+          </a:prstGeom>
+          <a:noFill/>
+        </p:spPr>
+        <p:txBody>
+          <a:bodyPr wrap="square" anchor="ctr" lIns="0" rIns="0" tIns="0" bIns="0">
+            <a:spAutoFit/>
+          </a:bodyPr>
+          <a:lstStyle/>
+          <a:p>
+            <a:pPr algn="l">
+              <a:spcBef>
+                <a:spcPts val="0"/>
+              </a:spcBef>
+              <a:spcAft>
+                <a:spcPts val="600"/>
+              </a:spcAft>
+            </a:pPr>
+            <a:r>
+              <a:rPr sz="1300" b="1">
+                <a:solidFill>
+                  <a:srgbClr val="7A5C1E"/>
+                </a:solidFill>
+                <a:latin typeface="Microsoft YaHei"/>
+              </a:rPr>
+              <a:t>📍 位置：</a:t>
+            </a:r>
+            <a:r>
+              <a:rPr sz="1250" b="0">
+                <a:solidFill>
+                  <a:srgbClr val="241D14"/>
+                </a:solidFill>
+                <a:latin typeface="Microsoft YaHei"/>
+              </a:rPr>
+              <a:t>左栏「自定义 Skills」卡</a:t>
+            </a:r>
+          </a:p>
+        </p:txBody>
+      </p:sp>
+      <p:sp>
+        <p:nvSpPr>
+          <p:cNvPr id="9" name="TextBox 8"/>
+          <p:cNvSpPr txBox="1"/>
+          <p:nvPr/>
+        </p:nvSpPr>
+        <p:spPr>
+          <a:xfrm>
+            <a:off x="685800" y="2788920"/>
+            <a:ext cx="4297680" cy="365760"/>
+          </a:xfrm>
+          <a:prstGeom prst="rect">
+            <a:avLst/>
+          </a:prstGeom>
+          <a:noFill/>
+        </p:spPr>
+        <p:txBody>
+          <a:bodyPr wrap="square" anchor="t" lIns="0" rIns="0" tIns="0" bIns="0">
+            <a:spAutoFit/>
+          </a:bodyPr>
+          <a:lstStyle/>
+          <a:p>
+            <a:pPr algn="l">
+              <a:spcBef>
+                <a:spcPts val="0"/>
+              </a:spcBef>
+              <a:spcAft>
+                <a:spcPts val="600"/>
+              </a:spcAft>
+            </a:pPr>
+            <a:r>
+              <a:rPr sz="1600" b="1">
+                <a:solidFill>
+                  <a:srgbClr val="7A5C1E"/>
+                </a:solidFill>
+                <a:latin typeface="Microsoft YaHei"/>
+              </a:rPr>
+              <a:t>操作步骤</a:t>
+            </a:r>
+          </a:p>
+        </p:txBody>
+      </p:sp>
+      <p:sp>
+        <p:nvSpPr>
+          <p:cNvPr id="10" name="TextBox 9"/>
+          <p:cNvSpPr txBox="1"/>
+          <p:nvPr/>
+        </p:nvSpPr>
+        <p:spPr>
+          <a:xfrm>
+            <a:off x="777240" y="3200400"/>
+            <a:ext cx="4114800" cy="2377440"/>
+          </a:xfrm>
+          <a:prstGeom prst="rect">
+            <a:avLst/>
+          </a:prstGeom>
+          <a:noFill/>
+        </p:spPr>
+        <p:txBody>
+          <a:bodyPr wrap="square" anchor="t" lIns="0" rIns="0" tIns="0" bIns="0">
+            <a:spAutoFit/>
+          </a:bodyPr>
+          <a:lstStyle/>
+          <a:p>
+            <a:pPr algn="l">
+              <a:spcBef>
+                <a:spcPts val="0"/>
+              </a:spcBef>
+              <a:spcAft>
+                <a:spcPts val="800"/>
+              </a:spcAft>
+            </a:pPr>
+            <a:r>
+              <a:rPr sz="1600" b="1">
+                <a:solidFill>
+                  <a:srgbClr val="A5813A"/>
+                </a:solidFill>
+                <a:latin typeface="Microsoft YaHei"/>
+              </a:rPr>
+              <a:t>• </a:t>
+            </a:r>
+            <a:r>
+              <a:rPr sz="1550" b="0">
+                <a:solidFill>
+                  <a:srgbClr val="241D14"/>
+                </a:solidFill>
+                <a:latin typeface="Microsoft YaHei"/>
+              </a:rPr>
+              <a:t>点「✨蒸馏技能」</a:t>
+            </a:r>
+          </a:p>
+          <a:p>
+            <a:pPr algn="l">
+              <a:spcBef>
+                <a:spcPts val="0"/>
+              </a:spcBef>
+              <a:spcAft>
+                <a:spcPts val="800"/>
+              </a:spcAft>
+            </a:pPr>
+            <a:r>
+              <a:rPr sz="1600" b="1">
+                <a:solidFill>
+                  <a:srgbClr val="A5813A"/>
+                </a:solidFill>
+                <a:latin typeface="Microsoft YaHei"/>
+              </a:rPr>
+              <a:t>• </a:t>
+            </a:r>
+            <a:r>
+              <a:rPr sz="1550" b="0">
+                <a:solidFill>
+                  <a:srgbClr val="241D14"/>
+                </a:solidFill>
+                <a:latin typeface="Microsoft YaHei"/>
+              </a:rPr>
+              <a:t>把你的方法论/SOP/文档蒸馏成一个技能</a:t>
+            </a:r>
+          </a:p>
+          <a:p>
+            <a:pPr algn="l">
+              <a:spcBef>
+                <a:spcPts val="0"/>
+              </a:spcBef>
+              <a:spcAft>
+                <a:spcPts val="800"/>
+              </a:spcAft>
+            </a:pPr>
+            <a:r>
+              <a:rPr sz="1600" b="1">
+                <a:solidFill>
+                  <a:srgbClr val="A5813A"/>
+                </a:solidFill>
+                <a:latin typeface="Microsoft YaHei"/>
+              </a:rPr>
+              <a:t>• </a:t>
+            </a:r>
+            <a:r>
+              <a:rPr sz="1550" b="0">
+                <a:solidFill>
+                  <a:srgbClr val="241D14"/>
+                </a:solidFill>
+                <a:latin typeface="Microsoft YaHei"/>
+              </a:rPr>
+              <a:t>之后在流水线一键调用</a:t>
+            </a:r>
+          </a:p>
+        </p:txBody>
+      </p:sp>
+      <p:sp>
+        <p:nvSpPr>
+          <p:cNvPr id="11" name="Rounded Rectangle 10"/>
+          <p:cNvSpPr/>
+          <p:nvPr/>
+        </p:nvSpPr>
+        <p:spPr>
+          <a:xfrm>
+            <a:off x="640080" y="5806440"/>
+            <a:ext cx="4297680" cy="731520"/>
+          </a:xfrm>
+          <a:prstGeom prst="roundRect">
+            <a:avLst/>
+          </a:prstGeom>
+          <a:solidFill>
+            <a:srgbClr val="F6EEDA"/>
+          </a:solidFill>
+          <a:ln>
+            <a:noFill/>
+          </a:ln>
+          <a:effectLst/>
+        </p:spPr>
+        <p:style>
+          <a:lnRef idx="1">
+            <a:schemeClr val="accent1"/>
+          </a:lnRef>
+          <a:fillRef idx="3">
+            <a:schemeClr val="accent1"/>
+          </a:fillRef>
+          <a:effectRef idx="2">
+            <a:schemeClr val="accent1"/>
+          </a:effectRef>
+          <a:fontRef idx="minor">
+            <a:schemeClr val="lt1"/>
+          </a:fontRef>
+        </p:style>
+        <p:txBody>
+          <a:bodyPr rtlCol="0" anchor="ctr"/>
+          <a:lstStyle/>
+          <a:p>
+            <a:pPr algn="ctr"/>
+          </a:p>
+        </p:txBody>
+      </p:sp>
+      <p:sp>
+        <p:nvSpPr>
+          <p:cNvPr id="12" name="TextBox 11"/>
+          <p:cNvSpPr txBox="1"/>
+          <p:nvPr/>
+        </p:nvSpPr>
+        <p:spPr>
+          <a:xfrm>
+            <a:off x="841248" y="5897880"/>
+            <a:ext cx="3931920" cy="548640"/>
+          </a:xfrm>
+          <a:prstGeom prst="rect">
+            <a:avLst/>
+          </a:prstGeom>
+          <a:noFill/>
+        </p:spPr>
+        <p:txBody>
+          <a:bodyPr wrap="square" anchor="ctr" lIns="0" rIns="0" tIns="0" bIns="0">
+            <a:spAutoFit/>
+          </a:bodyPr>
+          <a:lstStyle/>
+          <a:p>
+            <a:pPr algn="l">
+              <a:spcBef>
+                <a:spcPts val="0"/>
+              </a:spcBef>
+              <a:spcAft>
+                <a:spcPts val="600"/>
+              </a:spcAft>
+            </a:pPr>
+            <a:r>
+              <a:rPr sz="1300" b="1">
+                <a:solidFill>
+                  <a:srgbClr val="7A5C1E"/>
+                </a:solidFill>
+                <a:latin typeface="Microsoft YaHei"/>
+              </a:rPr>
+              <a:t>⚠ </a:t>
+            </a:r>
+            <a:r>
+              <a:rPr sz="1250" b="0">
+                <a:solidFill>
+                  <a:srgbClr val="6B6459"/>
+                </a:solidFill>
+                <a:latin typeface="Microsoft YaHei"/>
+              </a:rPr>
+              <a:t>该智能体专属，可直接运行；也可「＋添加 skill」手动建。</a:t>
+            </a:r>
+          </a:p>
+        </p:txBody>
+      </p:sp>
+      <p:sp>
+        <p:nvSpPr>
+          <p:cNvPr id="13" name="Rounded Rectangle 12"/>
+          <p:cNvSpPr/>
+          <p:nvPr/>
+        </p:nvSpPr>
+        <p:spPr>
+          <a:xfrm>
+            <a:off x="5111640" y="3724751"/>
+            <a:ext cx="6510240" cy="1008698"/>
           </a:xfrm>
           <a:prstGeom prst="roundRect">
             <a:avLst/>
@@ -3663,301 +4005,30 @@
           </a:p>
         </p:txBody>
       </p:sp>
-      <p:sp>
-        <p:nvSpPr>
-          <p:cNvPr id="8" name="TextBox 7"/>
-          <p:cNvSpPr txBox="1"/>
-          <p:nvPr/>
-        </p:nvSpPr>
-        <p:spPr>
-          <a:xfrm>
-            <a:off x="1097280" y="2212848"/>
-            <a:ext cx="10058400" cy="548640"/>
+      <p:pic>
+        <p:nvPicPr>
+          <p:cNvPr id="14" name="Picture 13" descr="sc_skills_distill.png"/>
+          <p:cNvPicPr>
+            <a:picLocks noChangeAspect="1"/>
+          </p:cNvPicPr>
+          <p:nvPr/>
+        </p:nvPicPr>
+        <p:blipFill>
+          <a:blip r:embed="rId2"/>
+          <a:stretch>
+            <a:fillRect/>
+          </a:stretch>
+        </p:blipFill>
+        <p:spPr>
+          <a:xfrm>
+            <a:off x="5120640" y="3733751"/>
+            <a:ext cx="6492240" cy="990699"/>
           </a:xfrm>
           <a:prstGeom prst="rect">
             <a:avLst/>
           </a:prstGeom>
-          <a:noFill/>
-        </p:spPr>
-        <p:txBody>
-          <a:bodyPr wrap="square" anchor="ctr" lIns="0" rIns="0" tIns="0" bIns="0">
-            <a:spAutoFit/>
-          </a:bodyPr>
-          <a:lstStyle/>
-          <a:p>
-            <a:pPr algn="l">
-              <a:spcBef>
-                <a:spcPts val="0"/>
-              </a:spcBef>
-              <a:spcAft>
-                <a:spcPts val="600"/>
-              </a:spcAft>
-            </a:pPr>
-            <a:r>
-              <a:rPr sz="1700" b="1">
-                <a:solidFill>
-                  <a:srgbClr val="7A5C1E"/>
-                </a:solidFill>
-                <a:latin typeface="Microsoft YaHei"/>
-              </a:rPr>
-              <a:t>📍 界面位置：</a:t>
-            </a:r>
-            <a:r>
-              <a:rPr sz="1700" b="0">
-                <a:solidFill>
-                  <a:srgbClr val="241D14"/>
-                </a:solidFill>
-                <a:latin typeface="Microsoft YaHei"/>
-              </a:rPr>
-              <a:t>底部「保存到该智能体」→ 创作流水线</a:t>
-            </a:r>
-          </a:p>
-        </p:txBody>
-      </p:sp>
-      <p:sp>
-        <p:nvSpPr>
-          <p:cNvPr id="9" name="TextBox 8"/>
-          <p:cNvSpPr txBox="1"/>
-          <p:nvPr/>
-        </p:nvSpPr>
-        <p:spPr>
-          <a:xfrm>
-            <a:off x="914400" y="3063240"/>
-            <a:ext cx="10332720" cy="457200"/>
-          </a:xfrm>
-          <a:prstGeom prst="rect">
-            <a:avLst/>
-          </a:prstGeom>
-          <a:noFill/>
-        </p:spPr>
-        <p:txBody>
-          <a:bodyPr wrap="square" anchor="t" lIns="0" rIns="0" tIns="0" bIns="0">
-            <a:spAutoFit/>
-          </a:bodyPr>
-          <a:lstStyle/>
-          <a:p>
-            <a:pPr algn="l">
-              <a:spcBef>
-                <a:spcPts val="0"/>
-              </a:spcBef>
-              <a:spcAft>
-                <a:spcPts val="600"/>
-              </a:spcAft>
-            </a:pPr>
-            <a:r>
-              <a:rPr sz="1800" b="1">
-                <a:solidFill>
-                  <a:srgbClr val="7A5C1E"/>
-                </a:solidFill>
-                <a:latin typeface="Microsoft YaHei"/>
-              </a:rPr>
-              <a:t>操作步骤</a:t>
-            </a:r>
-          </a:p>
-        </p:txBody>
-      </p:sp>
-      <p:sp>
-        <p:nvSpPr>
-          <p:cNvPr id="10" name="TextBox 9"/>
-          <p:cNvSpPr txBox="1"/>
-          <p:nvPr/>
-        </p:nvSpPr>
-        <p:spPr>
-          <a:xfrm>
-            <a:off x="1051560" y="3520440"/>
-            <a:ext cx="10149840" cy="2194560"/>
-          </a:xfrm>
-          <a:prstGeom prst="rect">
-            <a:avLst/>
-          </a:prstGeom>
-          <a:noFill/>
-        </p:spPr>
-        <p:txBody>
-          <a:bodyPr wrap="square" anchor="t" lIns="0" rIns="0" tIns="0" bIns="0">
-            <a:spAutoFit/>
-          </a:bodyPr>
-          <a:lstStyle/>
-          <a:p>
-            <a:pPr algn="l">
-              <a:spcBef>
-                <a:spcPts val="0"/>
-              </a:spcBef>
-              <a:spcAft>
-                <a:spcPts val="900"/>
-              </a:spcAft>
-            </a:pPr>
-            <a:r>
-              <a:rPr sz="1900" b="1">
-                <a:solidFill>
-                  <a:srgbClr val="A5813A"/>
-                </a:solidFill>
-                <a:latin typeface="Microsoft YaHei"/>
-              </a:rPr>
-              <a:t>• </a:t>
-            </a:r>
-            <a:r>
-              <a:rPr sz="1900" b="0">
-                <a:solidFill>
-                  <a:srgbClr val="241D14"/>
-                </a:solidFill>
-                <a:latin typeface="Microsoft YaHei"/>
-              </a:rPr>
-              <a:t>点「保存到该智能体」</a:t>
-            </a:r>
-          </a:p>
-          <a:p>
-            <a:pPr algn="l">
-              <a:spcBef>
-                <a:spcPts val="0"/>
-              </a:spcBef>
-              <a:spcAft>
-                <a:spcPts val="900"/>
-              </a:spcAft>
-            </a:pPr>
-            <a:r>
-              <a:rPr sz="1900" b="1">
-                <a:solidFill>
-                  <a:srgbClr val="A5813A"/>
-                </a:solidFill>
-                <a:latin typeface="Microsoft YaHei"/>
-              </a:rPr>
-              <a:t>• </a:t>
-            </a:r>
-            <a:r>
-              <a:rPr sz="1900" b="0">
-                <a:solidFill>
-                  <a:srgbClr val="241D14"/>
-                </a:solidFill>
-                <a:latin typeface="Microsoft YaHei"/>
-              </a:rPr>
-              <a:t>看到「✓ 已保存并生效（X文件·约X字）」即成功</a:t>
-            </a:r>
-          </a:p>
-          <a:p>
-            <a:pPr algn="l">
-              <a:spcBef>
-                <a:spcPts val="0"/>
-              </a:spcBef>
-              <a:spcAft>
-                <a:spcPts val="900"/>
-              </a:spcAft>
-            </a:pPr>
-            <a:r>
-              <a:rPr sz="1900" b="1">
-                <a:solidFill>
-                  <a:srgbClr val="A5813A"/>
-                </a:solidFill>
-                <a:latin typeface="Microsoft YaHei"/>
-              </a:rPr>
-              <a:t>• </a:t>
-            </a:r>
-            <a:r>
-              <a:rPr sz="1900" b="0">
-                <a:solidFill>
-                  <a:srgbClr val="241D14"/>
-                </a:solidFill>
-                <a:latin typeface="Microsoft YaHei"/>
-              </a:rPr>
-              <a:t>进「创作流水线」用该赛道生成一篇，验证语气/事实/红线</a:t>
-            </a:r>
-          </a:p>
-        </p:txBody>
-      </p:sp>
-      <p:sp>
-        <p:nvSpPr>
-          <p:cNvPr id="11" name="Rounded Rectangle 10"/>
-          <p:cNvSpPr/>
-          <p:nvPr/>
-        </p:nvSpPr>
-        <p:spPr>
-          <a:xfrm>
-            <a:off x="822960" y="5806440"/>
-            <a:ext cx="10515600" cy="685800"/>
-          </a:xfrm>
-          <a:prstGeom prst="roundRect">
-            <a:avLst/>
-          </a:prstGeom>
-          <a:solidFill>
-            <a:srgbClr val="F6EEDA"/>
-          </a:solidFill>
-          <a:ln>
-            <a:noFill/>
-          </a:ln>
-          <a:effectLst/>
-        </p:spPr>
-        <p:style>
-          <a:lnRef idx="1">
-            <a:schemeClr val="accent1"/>
-          </a:lnRef>
-          <a:fillRef idx="3">
-            <a:schemeClr val="accent1"/>
-          </a:fillRef>
-          <a:effectRef idx="2">
-            <a:schemeClr val="accent1"/>
-          </a:effectRef>
-          <a:fontRef idx="minor">
-            <a:schemeClr val="lt1"/>
-          </a:fontRef>
-        </p:style>
-        <p:txBody>
-          <a:bodyPr rtlCol="0" anchor="ctr"/>
-          <a:lstStyle/>
-          <a:p>
-            <a:pPr algn="ctr"/>
-          </a:p>
-        </p:txBody>
-      </p:sp>
-      <p:sp>
-        <p:nvSpPr>
-          <p:cNvPr id="12" name="TextBox 11"/>
-          <p:cNvSpPr txBox="1"/>
-          <p:nvPr/>
-        </p:nvSpPr>
-        <p:spPr>
-          <a:xfrm>
-            <a:off x="1097280" y="5897880"/>
-            <a:ext cx="10058400" cy="502920"/>
-          </a:xfrm>
-          <a:prstGeom prst="rect">
-            <a:avLst/>
-          </a:prstGeom>
-          <a:noFill/>
-        </p:spPr>
-        <p:txBody>
-          <a:bodyPr wrap="square" anchor="ctr" lIns="0" rIns="0" tIns="0" bIns="0">
-            <a:spAutoFit/>
-          </a:bodyPr>
-          <a:lstStyle/>
-          <a:p>
-            <a:pPr algn="l">
-              <a:spcBef>
-                <a:spcPts val="0"/>
-              </a:spcBef>
-              <a:spcAft>
-                <a:spcPts val="600"/>
-              </a:spcAft>
-            </a:pPr>
-            <a:r>
-              <a:rPr sz="1500" b="1">
-                <a:solidFill>
-                  <a:srgbClr val="7A5C1E"/>
-                </a:solidFill>
-                <a:latin typeface="Microsoft YaHei"/>
-              </a:rPr>
-              <a:t>⚠ 避坑：</a:t>
-            </a:r>
-            <a:r>
-              <a:rPr sz="1500" b="0">
-                <a:solidFill>
-                  <a:srgbClr val="6B6459"/>
-                </a:solidFill>
-                <a:latin typeface="Microsoft YaHei"/>
-              </a:rPr>
-              <a:t>配置按赛道独立保存；自定义赛道连定义一起存云端，换设备可恢复。</a:t>
-            </a:r>
-          </a:p>
-        </p:txBody>
-      </p:sp>
+        </p:spPr>
+      </p:pic>
     </p:spTree>
   </p:cSld>
   <p:clrMapOvr>
@@ -3967,6 +4038,676 @@
 </file>
 
 <file path=ppt/slides/slide11.xml><?xml version="1.0" encoding="utf-8"?>
+<p:sld xmlns:a="http://schemas.openxmlformats.org/drawingml/2006/main" xmlns:p="http://schemas.openxmlformats.org/presentationml/2006/main" xmlns:r="http://schemas.openxmlformats.org/officeDocument/2006/relationships">
+  <p:cSld>
+    <p:bg>
+      <p:bgPr>
+        <a:solidFill>
+          <a:srgbClr val="FAF6EC"/>
+        </a:solidFill>
+        <a:effectLst/>
+      </p:bgPr>
+    </p:bg>
+    <p:spTree>
+      <p:nvGrpSpPr>
+        <p:cNvPr id="1" name=""/>
+        <p:cNvGrpSpPr/>
+        <p:nvPr/>
+      </p:nvGrpSpPr>
+      <p:grpSpPr/>
+      <p:sp>
+        <p:nvSpPr>
+          <p:cNvPr id="2" name="Rounded Rectangle 1"/>
+          <p:cNvSpPr/>
+          <p:nvPr/>
+        </p:nvSpPr>
+        <p:spPr>
+          <a:xfrm>
+            <a:off x="0" y="0"/>
+            <a:ext cx="12191695" cy="128016"/>
+          </a:xfrm>
+          <a:prstGeom prst="roundRect">
+            <a:avLst/>
+          </a:prstGeom>
+          <a:solidFill>
+            <a:srgbClr val="A5813A"/>
+          </a:solidFill>
+          <a:ln>
+            <a:noFill/>
+          </a:ln>
+          <a:effectLst/>
+        </p:spPr>
+        <p:style>
+          <a:lnRef idx="1">
+            <a:schemeClr val="accent1"/>
+          </a:lnRef>
+          <a:fillRef idx="3">
+            <a:schemeClr val="accent1"/>
+          </a:fillRef>
+          <a:effectRef idx="2">
+            <a:schemeClr val="accent1"/>
+          </a:effectRef>
+          <a:fontRef idx="minor">
+            <a:schemeClr val="lt1"/>
+          </a:fontRef>
+        </p:style>
+        <p:txBody>
+          <a:bodyPr rtlCol="0" anchor="ctr"/>
+          <a:lstStyle/>
+          <a:p>
+            <a:pPr algn="ctr"/>
+          </a:p>
+        </p:txBody>
+      </p:sp>
+      <p:sp>
+        <p:nvSpPr>
+          <p:cNvPr id="3" name="Rounded Rectangle 2"/>
+          <p:cNvSpPr/>
+          <p:nvPr/>
+        </p:nvSpPr>
+        <p:spPr>
+          <a:xfrm>
+            <a:off x="640080" y="457200"/>
+            <a:ext cx="1143000" cy="1143000"/>
+          </a:xfrm>
+          <a:prstGeom prst="roundRect">
+            <a:avLst/>
+          </a:prstGeom>
+          <a:solidFill>
+            <a:srgbClr val="A5813A"/>
+          </a:solidFill>
+          <a:ln>
+            <a:noFill/>
+          </a:ln>
+          <a:effectLst/>
+        </p:spPr>
+        <p:style>
+          <a:lnRef idx="1">
+            <a:schemeClr val="accent1"/>
+          </a:lnRef>
+          <a:fillRef idx="3">
+            <a:schemeClr val="accent1"/>
+          </a:fillRef>
+          <a:effectRef idx="2">
+            <a:schemeClr val="accent1"/>
+          </a:effectRef>
+          <a:fontRef idx="minor">
+            <a:schemeClr val="lt1"/>
+          </a:fontRef>
+        </p:style>
+        <p:txBody>
+          <a:bodyPr rtlCol="0" anchor="ctr"/>
+          <a:lstStyle/>
+          <a:p>
+            <a:pPr algn="ctr"/>
+          </a:p>
+        </p:txBody>
+      </p:sp>
+      <p:sp>
+        <p:nvSpPr>
+          <p:cNvPr id="4" name="TextBox 3"/>
+          <p:cNvSpPr txBox="1"/>
+          <p:nvPr/>
+        </p:nvSpPr>
+        <p:spPr>
+          <a:xfrm>
+            <a:off x="640080" y="457200"/>
+            <a:ext cx="1143000" cy="1143000"/>
+          </a:xfrm>
+          <a:prstGeom prst="rect">
+            <a:avLst/>
+          </a:prstGeom>
+          <a:noFill/>
+        </p:spPr>
+        <p:txBody>
+          <a:bodyPr wrap="square" anchor="ctr" lIns="0" rIns="0" tIns="0" bIns="0">
+            <a:spAutoFit/>
+          </a:bodyPr>
+          <a:lstStyle/>
+          <a:p>
+            <a:pPr algn="ctr">
+              <a:spcBef>
+                <a:spcPts val="0"/>
+              </a:spcBef>
+              <a:spcAft>
+                <a:spcPts val="0"/>
+              </a:spcAft>
+            </a:pPr>
+            <a:r>
+              <a:rPr sz="1100" b="1">
+                <a:solidFill>
+                  <a:srgbClr val="E6CF8E"/>
+                </a:solidFill>
+                <a:latin typeface="Microsoft YaHei"/>
+              </a:rPr>
+              <a:t>STEP</a:t>
+            </a:r>
+          </a:p>
+          <a:p>
+            <a:pPr algn="ctr">
+              <a:spcBef>
+                <a:spcPts val="0"/>
+              </a:spcBef>
+              <a:spcAft>
+                <a:spcPts val="0"/>
+              </a:spcAft>
+            </a:pPr>
+            <a:r>
+              <a:rPr sz="3400" b="1">
+                <a:solidFill>
+                  <a:srgbClr val="FFFFFF"/>
+                </a:solidFill>
+                <a:latin typeface="Microsoft YaHei"/>
+              </a:rPr>
+              <a:t>7</a:t>
+            </a:r>
+          </a:p>
+        </p:txBody>
+      </p:sp>
+      <p:sp>
+        <p:nvSpPr>
+          <p:cNvPr id="5" name="TextBox 4"/>
+          <p:cNvSpPr txBox="1"/>
+          <p:nvPr/>
+        </p:nvSpPr>
+        <p:spPr>
+          <a:xfrm>
+            <a:off x="1920240" y="502920"/>
+            <a:ext cx="9144000" cy="365760"/>
+          </a:xfrm>
+          <a:prstGeom prst="rect">
+            <a:avLst/>
+          </a:prstGeom>
+          <a:noFill/>
+        </p:spPr>
+        <p:txBody>
+          <a:bodyPr wrap="square" anchor="t" lIns="0" rIns="0" tIns="0" bIns="0">
+            <a:spAutoFit/>
+          </a:bodyPr>
+          <a:lstStyle/>
+          <a:p>
+            <a:pPr algn="l">
+              <a:spcBef>
+                <a:spcPts val="0"/>
+              </a:spcBef>
+              <a:spcAft>
+                <a:spcPts val="600"/>
+              </a:spcAft>
+            </a:pPr>
+            <a:r>
+              <a:rPr sz="1300" b="1">
+                <a:solidFill>
+                  <a:srgbClr val="7A5C1E"/>
+                </a:solidFill>
+                <a:latin typeface="Microsoft YaHei"/>
+              </a:rPr>
+              <a:t>STEP 7-8 · 保存 &amp; 验证</a:t>
+            </a:r>
+          </a:p>
+        </p:txBody>
+      </p:sp>
+      <p:sp>
+        <p:nvSpPr>
+          <p:cNvPr id="6" name="TextBox 5"/>
+          <p:cNvSpPr txBox="1"/>
+          <p:nvPr/>
+        </p:nvSpPr>
+        <p:spPr>
+          <a:xfrm>
+            <a:off x="1920240" y="868680"/>
+            <a:ext cx="9875520" cy="731520"/>
+          </a:xfrm>
+          <a:prstGeom prst="rect">
+            <a:avLst/>
+          </a:prstGeom>
+          <a:noFill/>
+        </p:spPr>
+        <p:txBody>
+          <a:bodyPr wrap="square" anchor="t" lIns="0" rIns="0" tIns="0" bIns="0">
+            <a:spAutoFit/>
+          </a:bodyPr>
+          <a:lstStyle/>
+          <a:p>
+            <a:pPr algn="l">
+              <a:spcBef>
+                <a:spcPts val="0"/>
+              </a:spcBef>
+              <a:spcAft>
+                <a:spcPts val="600"/>
+              </a:spcAft>
+            </a:pPr>
+            <a:r>
+              <a:rPr sz="2600" b="1">
+                <a:solidFill>
+                  <a:srgbClr val="241D14"/>
+                </a:solidFill>
+                <a:latin typeface="Microsoft YaHei"/>
+              </a:rPr>
+              <a:t>保存生效，再去流水线验证</a:t>
+            </a:r>
+          </a:p>
+        </p:txBody>
+      </p:sp>
+      <p:sp>
+        <p:nvSpPr>
+          <p:cNvPr id="7" name="Rounded Rectangle 6"/>
+          <p:cNvSpPr/>
+          <p:nvPr/>
+        </p:nvSpPr>
+        <p:spPr>
+          <a:xfrm>
+            <a:off x="640080" y="1920240"/>
+            <a:ext cx="4297680" cy="658368"/>
+          </a:xfrm>
+          <a:prstGeom prst="roundRect">
+            <a:avLst/>
+          </a:prstGeom>
+          <a:solidFill>
+            <a:srgbClr val="FFFFFF"/>
+          </a:solidFill>
+          <a:ln w="13970">
+            <a:solidFill>
+              <a:srgbClr val="EADFC6"/>
+            </a:solidFill>
+          </a:ln>
+          <a:effectLst/>
+        </p:spPr>
+        <p:style>
+          <a:lnRef idx="1">
+            <a:schemeClr val="accent1"/>
+          </a:lnRef>
+          <a:fillRef idx="3">
+            <a:schemeClr val="accent1"/>
+          </a:fillRef>
+          <a:effectRef idx="2">
+            <a:schemeClr val="accent1"/>
+          </a:effectRef>
+          <a:fontRef idx="minor">
+            <a:schemeClr val="lt1"/>
+          </a:fontRef>
+        </p:style>
+        <p:txBody>
+          <a:bodyPr rtlCol="0" anchor="ctr"/>
+          <a:lstStyle/>
+          <a:p>
+            <a:pPr algn="ctr"/>
+          </a:p>
+        </p:txBody>
+      </p:sp>
+      <p:sp>
+        <p:nvSpPr>
+          <p:cNvPr id="8" name="TextBox 7"/>
+          <p:cNvSpPr txBox="1"/>
+          <p:nvPr/>
+        </p:nvSpPr>
+        <p:spPr>
+          <a:xfrm>
+            <a:off x="841248" y="2011680"/>
+            <a:ext cx="3931920" cy="475488"/>
+          </a:xfrm>
+          <a:prstGeom prst="rect">
+            <a:avLst/>
+          </a:prstGeom>
+          <a:noFill/>
+        </p:spPr>
+        <p:txBody>
+          <a:bodyPr wrap="square" anchor="ctr" lIns="0" rIns="0" tIns="0" bIns="0">
+            <a:spAutoFit/>
+          </a:bodyPr>
+          <a:lstStyle/>
+          <a:p>
+            <a:pPr algn="l">
+              <a:spcBef>
+                <a:spcPts val="0"/>
+              </a:spcBef>
+              <a:spcAft>
+                <a:spcPts val="600"/>
+              </a:spcAft>
+            </a:pPr>
+            <a:r>
+              <a:rPr sz="1300" b="1">
+                <a:solidFill>
+                  <a:srgbClr val="7A5C1E"/>
+                </a:solidFill>
+                <a:latin typeface="Microsoft YaHei"/>
+              </a:rPr>
+              <a:t>📍 位置：</a:t>
+            </a:r>
+            <a:r>
+              <a:rPr sz="1250" b="0">
+                <a:solidFill>
+                  <a:srgbClr val="241D14"/>
+                </a:solidFill>
+                <a:latin typeface="Microsoft YaHei"/>
+              </a:rPr>
+              <a:t>底部「保存到该智能体」→ 创作流水线</a:t>
+            </a:r>
+          </a:p>
+        </p:txBody>
+      </p:sp>
+      <p:sp>
+        <p:nvSpPr>
+          <p:cNvPr id="9" name="TextBox 8"/>
+          <p:cNvSpPr txBox="1"/>
+          <p:nvPr/>
+        </p:nvSpPr>
+        <p:spPr>
+          <a:xfrm>
+            <a:off x="685800" y="2788920"/>
+            <a:ext cx="4297680" cy="365760"/>
+          </a:xfrm>
+          <a:prstGeom prst="rect">
+            <a:avLst/>
+          </a:prstGeom>
+          <a:noFill/>
+        </p:spPr>
+        <p:txBody>
+          <a:bodyPr wrap="square" anchor="t" lIns="0" rIns="0" tIns="0" bIns="0">
+            <a:spAutoFit/>
+          </a:bodyPr>
+          <a:lstStyle/>
+          <a:p>
+            <a:pPr algn="l">
+              <a:spcBef>
+                <a:spcPts val="0"/>
+              </a:spcBef>
+              <a:spcAft>
+                <a:spcPts val="600"/>
+              </a:spcAft>
+            </a:pPr>
+            <a:r>
+              <a:rPr sz="1600" b="1">
+                <a:solidFill>
+                  <a:srgbClr val="7A5C1E"/>
+                </a:solidFill>
+                <a:latin typeface="Microsoft YaHei"/>
+              </a:rPr>
+              <a:t>操作步骤</a:t>
+            </a:r>
+          </a:p>
+        </p:txBody>
+      </p:sp>
+      <p:sp>
+        <p:nvSpPr>
+          <p:cNvPr id="10" name="TextBox 9"/>
+          <p:cNvSpPr txBox="1"/>
+          <p:nvPr/>
+        </p:nvSpPr>
+        <p:spPr>
+          <a:xfrm>
+            <a:off x="777240" y="3200400"/>
+            <a:ext cx="4114800" cy="2377440"/>
+          </a:xfrm>
+          <a:prstGeom prst="rect">
+            <a:avLst/>
+          </a:prstGeom>
+          <a:noFill/>
+        </p:spPr>
+        <p:txBody>
+          <a:bodyPr wrap="square" anchor="t" lIns="0" rIns="0" tIns="0" bIns="0">
+            <a:spAutoFit/>
+          </a:bodyPr>
+          <a:lstStyle/>
+          <a:p>
+            <a:pPr algn="l">
+              <a:spcBef>
+                <a:spcPts val="0"/>
+              </a:spcBef>
+              <a:spcAft>
+                <a:spcPts val="800"/>
+              </a:spcAft>
+            </a:pPr>
+            <a:r>
+              <a:rPr sz="1600" b="1">
+                <a:solidFill>
+                  <a:srgbClr val="A5813A"/>
+                </a:solidFill>
+                <a:latin typeface="Microsoft YaHei"/>
+              </a:rPr>
+              <a:t>• </a:t>
+            </a:r>
+            <a:r>
+              <a:rPr sz="1550" b="0">
+                <a:solidFill>
+                  <a:srgbClr val="241D14"/>
+                </a:solidFill>
+                <a:latin typeface="Microsoft YaHei"/>
+              </a:rPr>
+              <a:t>点「保存到该智能体」</a:t>
+            </a:r>
+          </a:p>
+          <a:p>
+            <a:pPr algn="l">
+              <a:spcBef>
+                <a:spcPts val="0"/>
+              </a:spcBef>
+              <a:spcAft>
+                <a:spcPts val="800"/>
+              </a:spcAft>
+            </a:pPr>
+            <a:r>
+              <a:rPr sz="1600" b="1">
+                <a:solidFill>
+                  <a:srgbClr val="A5813A"/>
+                </a:solidFill>
+                <a:latin typeface="Microsoft YaHei"/>
+              </a:rPr>
+              <a:t>• </a:t>
+            </a:r>
+            <a:r>
+              <a:rPr sz="1550" b="0">
+                <a:solidFill>
+                  <a:srgbClr val="241D14"/>
+                </a:solidFill>
+                <a:latin typeface="Microsoft YaHei"/>
+              </a:rPr>
+              <a:t>看到「✓ 已保存并生效（X文件·约X字）」即成功</a:t>
+            </a:r>
+          </a:p>
+          <a:p>
+            <a:pPr algn="l">
+              <a:spcBef>
+                <a:spcPts val="0"/>
+              </a:spcBef>
+              <a:spcAft>
+                <a:spcPts val="800"/>
+              </a:spcAft>
+            </a:pPr>
+            <a:r>
+              <a:rPr sz="1600" b="1">
+                <a:solidFill>
+                  <a:srgbClr val="A5813A"/>
+                </a:solidFill>
+                <a:latin typeface="Microsoft YaHei"/>
+              </a:rPr>
+              <a:t>• </a:t>
+            </a:r>
+            <a:r>
+              <a:rPr sz="1550" b="0">
+                <a:solidFill>
+                  <a:srgbClr val="241D14"/>
+                </a:solidFill>
+                <a:latin typeface="Microsoft YaHei"/>
+              </a:rPr>
+              <a:t>进流水线用该赛道生成一篇验证语气/事实/红线</a:t>
+            </a:r>
+          </a:p>
+        </p:txBody>
+      </p:sp>
+      <p:sp>
+        <p:nvSpPr>
+          <p:cNvPr id="11" name="Rounded Rectangle 10"/>
+          <p:cNvSpPr/>
+          <p:nvPr/>
+        </p:nvSpPr>
+        <p:spPr>
+          <a:xfrm>
+            <a:off x="640080" y="5806440"/>
+            <a:ext cx="4297680" cy="731520"/>
+          </a:xfrm>
+          <a:prstGeom prst="roundRect">
+            <a:avLst/>
+          </a:prstGeom>
+          <a:solidFill>
+            <a:srgbClr val="F6EEDA"/>
+          </a:solidFill>
+          <a:ln>
+            <a:noFill/>
+          </a:ln>
+          <a:effectLst/>
+        </p:spPr>
+        <p:style>
+          <a:lnRef idx="1">
+            <a:schemeClr val="accent1"/>
+          </a:lnRef>
+          <a:fillRef idx="3">
+            <a:schemeClr val="accent1"/>
+          </a:fillRef>
+          <a:effectRef idx="2">
+            <a:schemeClr val="accent1"/>
+          </a:effectRef>
+          <a:fontRef idx="minor">
+            <a:schemeClr val="lt1"/>
+          </a:fontRef>
+        </p:style>
+        <p:txBody>
+          <a:bodyPr rtlCol="0" anchor="ctr"/>
+          <a:lstStyle/>
+          <a:p>
+            <a:pPr algn="ctr"/>
+          </a:p>
+        </p:txBody>
+      </p:sp>
+      <p:sp>
+        <p:nvSpPr>
+          <p:cNvPr id="12" name="TextBox 11"/>
+          <p:cNvSpPr txBox="1"/>
+          <p:nvPr/>
+        </p:nvSpPr>
+        <p:spPr>
+          <a:xfrm>
+            <a:off x="841248" y="5897880"/>
+            <a:ext cx="3931920" cy="548640"/>
+          </a:xfrm>
+          <a:prstGeom prst="rect">
+            <a:avLst/>
+          </a:prstGeom>
+          <a:noFill/>
+        </p:spPr>
+        <p:txBody>
+          <a:bodyPr wrap="square" anchor="ctr" lIns="0" rIns="0" tIns="0" bIns="0">
+            <a:spAutoFit/>
+          </a:bodyPr>
+          <a:lstStyle/>
+          <a:p>
+            <a:pPr algn="l">
+              <a:spcBef>
+                <a:spcPts val="0"/>
+              </a:spcBef>
+              <a:spcAft>
+                <a:spcPts val="600"/>
+              </a:spcAft>
+            </a:pPr>
+            <a:r>
+              <a:rPr sz="1300" b="1">
+                <a:solidFill>
+                  <a:srgbClr val="7A5C1E"/>
+                </a:solidFill>
+                <a:latin typeface="Microsoft YaHei"/>
+              </a:rPr>
+              <a:t>⚠ </a:t>
+            </a:r>
+            <a:r>
+              <a:rPr sz="1250" b="0">
+                <a:solidFill>
+                  <a:srgbClr val="6B6459"/>
+                </a:solidFill>
+                <a:latin typeface="Microsoft YaHei"/>
+              </a:rPr>
+              <a:t>配置按赛道独立保存；自定义赛道连定义存云端，换设备可恢复。</a:t>
+            </a:r>
+          </a:p>
+        </p:txBody>
+      </p:sp>
+      <p:sp>
+        <p:nvSpPr>
+          <p:cNvPr id="13" name="Rounded Rectangle 12"/>
+          <p:cNvSpPr/>
+          <p:nvPr/>
+        </p:nvSpPr>
+        <p:spPr>
+          <a:xfrm>
+            <a:off x="5111640" y="3914459"/>
+            <a:ext cx="6510240" cy="629282"/>
+          </a:xfrm>
+          <a:prstGeom prst="roundRect">
+            <a:avLst/>
+          </a:prstGeom>
+          <a:solidFill>
+            <a:srgbClr val="FFFFFF"/>
+          </a:solidFill>
+          <a:ln w="15240">
+            <a:solidFill>
+              <a:srgbClr val="EADFC6"/>
+            </a:solidFill>
+          </a:ln>
+          <a:effectLst/>
+        </p:spPr>
+        <p:style>
+          <a:lnRef idx="1">
+            <a:schemeClr val="accent1"/>
+          </a:lnRef>
+          <a:fillRef idx="3">
+            <a:schemeClr val="accent1"/>
+          </a:fillRef>
+          <a:effectRef idx="2">
+            <a:schemeClr val="accent1"/>
+          </a:effectRef>
+          <a:fontRef idx="minor">
+            <a:schemeClr val="lt1"/>
+          </a:fontRef>
+        </p:style>
+        <p:txBody>
+          <a:bodyPr rtlCol="0" anchor="ctr"/>
+          <a:lstStyle/>
+          <a:p>
+            <a:pPr algn="ctr"/>
+          </a:p>
+        </p:txBody>
+      </p:sp>
+      <p:pic>
+        <p:nvPicPr>
+          <p:cNvPr id="14" name="Picture 13" descr="sc_save.png"/>
+          <p:cNvPicPr>
+            <a:picLocks noChangeAspect="1"/>
+          </p:cNvPicPr>
+          <p:nvPr/>
+        </p:nvPicPr>
+        <p:blipFill>
+          <a:blip r:embed="rId2"/>
+          <a:stretch>
+            <a:fillRect/>
+          </a:stretch>
+        </p:blipFill>
+        <p:spPr>
+          <a:xfrm>
+            <a:off x="5120640" y="3923459"/>
+            <a:ext cx="6492240" cy="611282"/>
+          </a:xfrm>
+          <a:prstGeom prst="rect">
+            <a:avLst/>
+          </a:prstGeom>
+        </p:spPr>
+      </p:pic>
+    </p:spTree>
+  </p:cSld>
+  <p:clrMapOvr>
+    <a:masterClrMapping/>
+  </p:clrMapOvr>
+</p:sld>
+</file>
+
+<file path=ppt/slides/slide12.xml><?xml version="1.0" encoding="utf-8"?>
 <p:sld xmlns:a="http://schemas.openxmlformats.org/drawingml/2006/main" xmlns:p="http://schemas.openxmlformats.org/presentationml/2006/main" xmlns:r="http://schemas.openxmlformats.org/officeDocument/2006/relationships">
   <p:cSld>
     <p:bg>
@@ -4036,7 +4777,7 @@
         </p:nvSpPr>
         <p:spPr>
           <a:xfrm>
-            <a:off x="1005840" y="2194560"/>
+            <a:off x="1005840" y="2103120"/>
             <a:ext cx="10058400" cy="2011680"/>
           </a:xfrm>
           <a:prstGeom prst="rect">
@@ -4097,7 +4838,7 @@
         </p:nvSpPr>
         <p:spPr>
           <a:xfrm>
-            <a:off x="1005840" y="4206240"/>
+            <a:off x="1005840" y="4114800"/>
             <a:ext cx="10058400" cy="1371600"/>
           </a:xfrm>
           <a:prstGeom prst="rect">
@@ -4222,57 +4963,13 @@
       </p:sp>
       <p:sp>
         <p:nvSpPr>
-          <p:cNvPr id="3" name="Rounded Rectangle 2"/>
-          <p:cNvSpPr/>
-          <p:nvPr/>
-        </p:nvSpPr>
-        <p:spPr>
-          <a:xfrm>
-            <a:off x="822960" y="566928"/>
-            <a:ext cx="457200" cy="82296"/>
-          </a:xfrm>
-          <a:prstGeom prst="roundRect">
-            <a:avLst/>
-          </a:prstGeom>
-          <a:solidFill>
-            <a:srgbClr val="A5813A"/>
-          </a:solidFill>
-          <a:ln>
-            <a:noFill/>
-          </a:ln>
-          <a:effectLst/>
-        </p:spPr>
-        <p:style>
-          <a:lnRef idx="1">
-            <a:schemeClr val="accent1"/>
-          </a:lnRef>
-          <a:fillRef idx="3">
-            <a:schemeClr val="accent1"/>
-          </a:fillRef>
-          <a:effectRef idx="2">
-            <a:schemeClr val="accent1"/>
-          </a:effectRef>
-          <a:fontRef idx="minor">
-            <a:schemeClr val="lt1"/>
-          </a:fontRef>
-        </p:style>
-        <p:txBody>
-          <a:bodyPr rtlCol="0" anchor="ctr"/>
-          <a:lstStyle/>
-          <a:p>
-            <a:pPr algn="ctr"/>
-          </a:p>
-        </p:txBody>
-      </p:sp>
-      <p:sp>
-        <p:nvSpPr>
-          <p:cNvPr id="4" name="TextBox 3"/>
+          <p:cNvPr id="3" name="TextBox 2"/>
           <p:cNvSpPr txBox="1"/>
           <p:nvPr/>
         </p:nvSpPr>
         <p:spPr>
           <a:xfrm>
-            <a:off x="1371600" y="457200"/>
+            <a:off x="822960" y="502920"/>
             <a:ext cx="7315200" cy="365760"/>
           </a:xfrm>
           <a:prstGeom prst="rect">
@@ -4295,7 +4992,7 @@
               </a:spcAft>
             </a:pPr>
             <a:r>
-              <a:rPr sz="1500" b="1">
+              <a:rPr sz="1400" b="1">
                 <a:solidFill>
                   <a:srgbClr val="7A5C1E"/>
                 </a:solidFill>
@@ -4308,14 +5005,14 @@
       </p:sp>
       <p:sp>
         <p:nvSpPr>
-          <p:cNvPr id="5" name="TextBox 4"/>
+          <p:cNvPr id="4" name="TextBox 3"/>
           <p:cNvSpPr txBox="1"/>
           <p:nvPr/>
         </p:nvSpPr>
         <p:spPr>
           <a:xfrm>
-            <a:off x="822960" y="841248"/>
-            <a:ext cx="10515600" cy="914400"/>
+            <a:off x="822960" y="896112"/>
+            <a:ext cx="10058400" cy="731520"/>
           </a:xfrm>
           <a:prstGeom prst="rect">
             <a:avLst/>
@@ -4337,7 +5034,7 @@
               </a:spcAft>
             </a:pPr>
             <a:r>
-              <a:rPr sz="3400" b="1">
+              <a:rPr sz="3000" b="1">
                 <a:solidFill>
                   <a:srgbClr val="241D14"/>
                 </a:solidFill>
@@ -4350,14 +5047,14 @@
       </p:sp>
       <p:sp>
         <p:nvSpPr>
-          <p:cNvPr id="6" name="Rounded Rectangle 5"/>
+          <p:cNvPr id="5" name="Rounded Rectangle 4"/>
           <p:cNvSpPr/>
           <p:nvPr/>
         </p:nvSpPr>
         <p:spPr>
           <a:xfrm>
-            <a:off x="1005840" y="2194560"/>
-            <a:ext cx="4937760" cy="3291840"/>
+            <a:off x="822960" y="2103120"/>
+            <a:ext cx="5120640" cy="3383280"/>
           </a:xfrm>
           <a:prstGeom prst="roundRect">
             <a:avLst/>
@@ -4396,14 +5093,14 @@
       </p:sp>
       <p:sp>
         <p:nvSpPr>
-          <p:cNvPr id="7" name="TextBox 6"/>
+          <p:cNvPr id="6" name="TextBox 5"/>
           <p:cNvSpPr txBox="1"/>
           <p:nvPr/>
         </p:nvSpPr>
         <p:spPr>
           <a:xfrm>
-            <a:off x="1371600" y="2514600"/>
-            <a:ext cx="4206240" cy="640080"/>
+            <a:off x="1188720" y="2423160"/>
+            <a:ext cx="4389120" cy="640080"/>
           </a:xfrm>
           <a:prstGeom prst="rect">
             <a:avLst/>
@@ -4425,7 +5122,7 @@
               </a:spcAft>
             </a:pPr>
             <a:r>
-              <a:rPr sz="2600" b="1">
+              <a:rPr sz="2500" b="1">
                 <a:solidFill>
                   <a:srgbClr val="241D14"/>
                 </a:solidFill>
@@ -4438,14 +5135,14 @@
       </p:sp>
       <p:sp>
         <p:nvSpPr>
-          <p:cNvPr id="8" name="TextBox 7"/>
+          <p:cNvPr id="7" name="TextBox 6"/>
           <p:cNvSpPr txBox="1"/>
           <p:nvPr/>
         </p:nvSpPr>
         <p:spPr>
           <a:xfrm>
-            <a:off x="1371600" y="3383280"/>
-            <a:ext cx="4206240" cy="1920240"/>
+            <a:off x="1188720" y="3291840"/>
+            <a:ext cx="4389120" cy="2011680"/>
           </a:xfrm>
           <a:prstGeom prst="rect">
             <a:avLst/>
@@ -4467,7 +5164,7 @@
               </a:spcAft>
             </a:pPr>
             <a:r>
-              <a:rPr sz="1900" b="0">
+              <a:rPr sz="1800" b="0">
                 <a:solidFill>
                   <a:srgbClr val="6B6459"/>
                 </a:solidFill>
@@ -4486,7 +5183,7 @@
               </a:spcAft>
             </a:pPr>
             <a:r>
-              <a:rPr sz="1900" b="0">
+              <a:rPr sz="1800" b="0">
                 <a:solidFill>
                   <a:srgbClr val="6B6459"/>
                 </a:solidFill>
@@ -4505,7 +5202,7 @@
               </a:spcAft>
             </a:pPr>
             <a:r>
-              <a:rPr sz="1900" b="0">
+              <a:rPr sz="1800" b="0">
                 <a:solidFill>
                   <a:srgbClr val="6B6459"/>
                 </a:solidFill>
@@ -4518,14 +5215,14 @@
       </p:sp>
       <p:sp>
         <p:nvSpPr>
-          <p:cNvPr id="9" name="Rounded Rectangle 8"/>
+          <p:cNvPr id="8" name="Rounded Rectangle 7"/>
           <p:cNvSpPr/>
           <p:nvPr/>
         </p:nvSpPr>
         <p:spPr>
           <a:xfrm>
-            <a:off x="6400800" y="2194560"/>
-            <a:ext cx="4937760" cy="3291840"/>
+            <a:off x="6217920" y="2103120"/>
+            <a:ext cx="5120640" cy="3383280"/>
           </a:xfrm>
           <a:prstGeom prst="roundRect">
             <a:avLst/>
@@ -4562,14 +5259,14 @@
       </p:sp>
       <p:sp>
         <p:nvSpPr>
-          <p:cNvPr id="10" name="TextBox 9"/>
+          <p:cNvPr id="9" name="TextBox 8"/>
           <p:cNvSpPr txBox="1"/>
           <p:nvPr/>
         </p:nvSpPr>
         <p:spPr>
           <a:xfrm>
-            <a:off x="6766560" y="2514600"/>
-            <a:ext cx="4206240" cy="640080"/>
+            <a:off x="6583680" y="2423160"/>
+            <a:ext cx="4389120" cy="640080"/>
           </a:xfrm>
           <a:prstGeom prst="rect">
             <a:avLst/>
@@ -4591,7 +5288,7 @@
               </a:spcAft>
             </a:pPr>
             <a:r>
-              <a:rPr sz="2600" b="1">
+              <a:rPr sz="2500" b="1">
                 <a:solidFill>
                   <a:srgbClr val="FFFFFF"/>
                 </a:solidFill>
@@ -4604,14 +5301,14 @@
       </p:sp>
       <p:sp>
         <p:nvSpPr>
-          <p:cNvPr id="11" name="TextBox 10"/>
+          <p:cNvPr id="10" name="TextBox 9"/>
           <p:cNvSpPr txBox="1"/>
           <p:nvPr/>
         </p:nvSpPr>
         <p:spPr>
           <a:xfrm>
-            <a:off x="6766560" y="3383280"/>
-            <a:ext cx="4206240" cy="1920240"/>
+            <a:off x="6583680" y="3291840"/>
+            <a:ext cx="4389120" cy="2011680"/>
           </a:xfrm>
           <a:prstGeom prst="rect">
             <a:avLst/>
@@ -4633,7 +5330,7 @@
               </a:spcAft>
             </a:pPr>
             <a:r>
-              <a:rPr sz="1900" b="0">
+              <a:rPr sz="1800" b="0">
                 <a:solidFill>
                   <a:srgbClr val="FDF6E6"/>
                 </a:solidFill>
@@ -4652,7 +5349,7 @@
               </a:spcAft>
             </a:pPr>
             <a:r>
-              <a:rPr sz="1900" b="0">
+              <a:rPr sz="1800" b="0">
                 <a:solidFill>
                   <a:srgbClr val="FDF6E6"/>
                 </a:solidFill>
@@ -4671,7 +5368,7 @@
               </a:spcAft>
             </a:pPr>
             <a:r>
-              <a:rPr sz="1900" b="0">
+              <a:rPr sz="1800" b="0">
                 <a:solidFill>
                   <a:srgbClr val="FDF6E6"/>
                 </a:solidFill>
@@ -4754,57 +5451,13 @@
       </p:sp>
       <p:sp>
         <p:nvSpPr>
-          <p:cNvPr id="3" name="Rounded Rectangle 2"/>
-          <p:cNvSpPr/>
-          <p:nvPr/>
-        </p:nvSpPr>
-        <p:spPr>
-          <a:xfrm>
-            <a:off x="822960" y="566928"/>
-            <a:ext cx="457200" cy="82296"/>
-          </a:xfrm>
-          <a:prstGeom prst="roundRect">
-            <a:avLst/>
-          </a:prstGeom>
-          <a:solidFill>
-            <a:srgbClr val="A5813A"/>
-          </a:solidFill>
-          <a:ln>
-            <a:noFill/>
-          </a:ln>
-          <a:effectLst/>
-        </p:spPr>
-        <p:style>
-          <a:lnRef idx="1">
-            <a:schemeClr val="accent1"/>
-          </a:lnRef>
-          <a:fillRef idx="3">
-            <a:schemeClr val="accent1"/>
-          </a:fillRef>
-          <a:effectRef idx="2">
-            <a:schemeClr val="accent1"/>
-          </a:effectRef>
-          <a:fontRef idx="minor">
-            <a:schemeClr val="lt1"/>
-          </a:fontRef>
-        </p:style>
-        <p:txBody>
-          <a:bodyPr rtlCol="0" anchor="ctr"/>
-          <a:lstStyle/>
-          <a:p>
-            <a:pPr algn="ctr"/>
-          </a:p>
-        </p:txBody>
-      </p:sp>
-      <p:sp>
-        <p:nvSpPr>
-          <p:cNvPr id="4" name="TextBox 3"/>
+          <p:cNvPr id="3" name="TextBox 2"/>
           <p:cNvSpPr txBox="1"/>
           <p:nvPr/>
         </p:nvSpPr>
         <p:spPr>
           <a:xfrm>
-            <a:off x="1371600" y="457200"/>
+            <a:off x="822960" y="502920"/>
             <a:ext cx="7315200" cy="365760"/>
           </a:xfrm>
           <a:prstGeom prst="rect">
@@ -4827,7 +5480,7 @@
               </a:spcAft>
             </a:pPr>
             <a:r>
-              <a:rPr sz="1500" b="1">
+              <a:rPr sz="1400" b="1">
                 <a:solidFill>
                   <a:srgbClr val="7A5C1E"/>
                 </a:solidFill>
@@ -4840,14 +5493,14 @@
       </p:sp>
       <p:sp>
         <p:nvSpPr>
-          <p:cNvPr id="5" name="TextBox 4"/>
+          <p:cNvPr id="4" name="TextBox 3"/>
           <p:cNvSpPr txBox="1"/>
           <p:nvPr/>
         </p:nvSpPr>
         <p:spPr>
           <a:xfrm>
-            <a:off x="822960" y="841248"/>
-            <a:ext cx="10515600" cy="914400"/>
+            <a:off x="822960" y="896112"/>
+            <a:ext cx="10058400" cy="731520"/>
           </a:xfrm>
           <a:prstGeom prst="rect">
             <a:avLst/>
@@ -4869,7 +5522,7 @@
               </a:spcAft>
             </a:pPr>
             <a:r>
-              <a:rPr sz="3400" b="1">
+              <a:rPr sz="3000" b="1">
                 <a:solidFill>
                   <a:srgbClr val="241D14"/>
                 </a:solidFill>
@@ -4882,13 +5535,13 @@
       </p:sp>
       <p:sp>
         <p:nvSpPr>
-          <p:cNvPr id="6" name="Rounded Rectangle 5"/>
+          <p:cNvPr id="5" name="Rounded Rectangle 4"/>
           <p:cNvSpPr/>
           <p:nvPr/>
         </p:nvSpPr>
         <p:spPr>
           <a:xfrm>
-            <a:off x="822960" y="2194560"/>
+            <a:off x="822960" y="2148840"/>
             <a:ext cx="2606040" cy="1554480"/>
           </a:xfrm>
           <a:prstGeom prst="roundRect">
@@ -4928,13 +5581,13 @@
       </p:sp>
       <p:sp>
         <p:nvSpPr>
-          <p:cNvPr id="7" name="TextBox 6"/>
+          <p:cNvPr id="6" name="TextBox 5"/>
           <p:cNvSpPr txBox="1"/>
           <p:nvPr/>
         </p:nvSpPr>
         <p:spPr>
           <a:xfrm>
-            <a:off x="822960" y="2450592"/>
+            <a:off x="822960" y="2377440"/>
             <a:ext cx="2606040" cy="1097280"/>
           </a:xfrm>
           <a:prstGeom prst="rect">
@@ -4957,7 +5610,7 @@
               </a:spcAft>
             </a:pPr>
             <a:r>
-              <a:rPr sz="3000" b="1">
+              <a:rPr sz="2800" b="1">
                 <a:solidFill>
                   <a:srgbClr val="A5813A"/>
                 </a:solidFill>
@@ -4976,7 +5629,7 @@
               </a:spcAft>
             </a:pPr>
             <a:r>
-              <a:rPr sz="1600" b="1">
+              <a:rPr sz="1500" b="1">
                 <a:solidFill>
                   <a:srgbClr val="241D14"/>
                 </a:solidFill>
@@ -4989,13 +5642,13 @@
       </p:sp>
       <p:sp>
         <p:nvSpPr>
-          <p:cNvPr id="8" name="Rounded Rectangle 7"/>
+          <p:cNvPr id="7" name="Rounded Rectangle 6"/>
           <p:cNvSpPr/>
           <p:nvPr/>
         </p:nvSpPr>
         <p:spPr>
           <a:xfrm>
-            <a:off x="3749040" y="2194560"/>
+            <a:off x="3749040" y="2148840"/>
             <a:ext cx="2606040" cy="1554480"/>
           </a:xfrm>
           <a:prstGeom prst="roundRect">
@@ -5035,13 +5688,13 @@
       </p:sp>
       <p:sp>
         <p:nvSpPr>
-          <p:cNvPr id="9" name="TextBox 8"/>
+          <p:cNvPr id="8" name="TextBox 7"/>
           <p:cNvSpPr txBox="1"/>
           <p:nvPr/>
         </p:nvSpPr>
         <p:spPr>
           <a:xfrm>
-            <a:off x="3749040" y="2450592"/>
+            <a:off x="3749040" y="2377440"/>
             <a:ext cx="2606040" cy="1097280"/>
           </a:xfrm>
           <a:prstGeom prst="rect">
@@ -5064,7 +5717,7 @@
               </a:spcAft>
             </a:pPr>
             <a:r>
-              <a:rPr sz="3000" b="1">
+              <a:rPr sz="2800" b="1">
                 <a:solidFill>
                   <a:srgbClr val="A5813A"/>
                 </a:solidFill>
@@ -5083,7 +5736,7 @@
               </a:spcAft>
             </a:pPr>
             <a:r>
-              <a:rPr sz="1600" b="1">
+              <a:rPr sz="1500" b="1">
                 <a:solidFill>
                   <a:srgbClr val="241D14"/>
                 </a:solidFill>
@@ -5096,13 +5749,13 @@
       </p:sp>
       <p:sp>
         <p:nvSpPr>
-          <p:cNvPr id="10" name="Rounded Rectangle 9"/>
+          <p:cNvPr id="9" name="Rounded Rectangle 8"/>
           <p:cNvSpPr/>
           <p:nvPr/>
         </p:nvSpPr>
         <p:spPr>
           <a:xfrm>
-            <a:off x="6675120" y="2194560"/>
+            <a:off x="6675120" y="2148840"/>
             <a:ext cx="2606040" cy="1554480"/>
           </a:xfrm>
           <a:prstGeom prst="roundRect">
@@ -5142,13 +5795,13 @@
       </p:sp>
       <p:sp>
         <p:nvSpPr>
-          <p:cNvPr id="11" name="TextBox 10"/>
+          <p:cNvPr id="10" name="TextBox 9"/>
           <p:cNvSpPr txBox="1"/>
           <p:nvPr/>
         </p:nvSpPr>
         <p:spPr>
           <a:xfrm>
-            <a:off x="6675120" y="2450592"/>
+            <a:off x="6675120" y="2377440"/>
             <a:ext cx="2606040" cy="1097280"/>
           </a:xfrm>
           <a:prstGeom prst="rect">
@@ -5171,7 +5824,7 @@
               </a:spcAft>
             </a:pPr>
             <a:r>
-              <a:rPr sz="3000" b="1">
+              <a:rPr sz="2800" b="1">
                 <a:solidFill>
                   <a:srgbClr val="A5813A"/>
                 </a:solidFill>
@@ -5190,7 +5843,7 @@
               </a:spcAft>
             </a:pPr>
             <a:r>
-              <a:rPr sz="1600" b="1">
+              <a:rPr sz="1500" b="1">
                 <a:solidFill>
                   <a:srgbClr val="241D14"/>
                 </a:solidFill>
@@ -5203,13 +5856,13 @@
       </p:sp>
       <p:sp>
         <p:nvSpPr>
-          <p:cNvPr id="12" name="Rounded Rectangle 11"/>
+          <p:cNvPr id="11" name="Rounded Rectangle 10"/>
           <p:cNvSpPr/>
           <p:nvPr/>
         </p:nvSpPr>
         <p:spPr>
           <a:xfrm>
-            <a:off x="9601200" y="2194560"/>
+            <a:off x="9601200" y="2148840"/>
             <a:ext cx="2606040" cy="1554480"/>
           </a:xfrm>
           <a:prstGeom prst="roundRect">
@@ -5249,13 +5902,13 @@
       </p:sp>
       <p:sp>
         <p:nvSpPr>
-          <p:cNvPr id="13" name="TextBox 12"/>
+          <p:cNvPr id="12" name="TextBox 11"/>
           <p:cNvSpPr txBox="1"/>
           <p:nvPr/>
         </p:nvSpPr>
         <p:spPr>
           <a:xfrm>
-            <a:off x="9601200" y="2450592"/>
+            <a:off x="9601200" y="2377440"/>
             <a:ext cx="2606040" cy="1097280"/>
           </a:xfrm>
           <a:prstGeom prst="rect">
@@ -5278,7 +5931,7 @@
               </a:spcAft>
             </a:pPr>
             <a:r>
-              <a:rPr sz="3000" b="1">
+              <a:rPr sz="2800" b="1">
                 <a:solidFill>
                   <a:srgbClr val="A5813A"/>
                 </a:solidFill>
@@ -5297,7 +5950,7 @@
               </a:spcAft>
             </a:pPr>
             <a:r>
-              <a:rPr sz="1600" b="1">
+              <a:rPr sz="1500" b="1">
                 <a:solidFill>
                   <a:srgbClr val="241D14"/>
                 </a:solidFill>
@@ -5310,7 +5963,7 @@
       </p:sp>
       <p:sp>
         <p:nvSpPr>
-          <p:cNvPr id="14" name="Rounded Rectangle 13"/>
+          <p:cNvPr id="13" name="Rounded Rectangle 12"/>
           <p:cNvSpPr/>
           <p:nvPr/>
         </p:nvSpPr>
@@ -5356,13 +6009,13 @@
       </p:sp>
       <p:sp>
         <p:nvSpPr>
-          <p:cNvPr id="15" name="TextBox 14"/>
+          <p:cNvPr id="14" name="TextBox 13"/>
           <p:cNvSpPr txBox="1"/>
           <p:nvPr/>
         </p:nvSpPr>
         <p:spPr>
           <a:xfrm>
-            <a:off x="822960" y="4370832"/>
+            <a:off x="822960" y="4343400"/>
             <a:ext cx="2606040" cy="1097280"/>
           </a:xfrm>
           <a:prstGeom prst="rect">
@@ -5385,7 +6038,7 @@
               </a:spcAft>
             </a:pPr>
             <a:r>
-              <a:rPr sz="3000" b="1">
+              <a:rPr sz="2800" b="1">
                 <a:solidFill>
                   <a:srgbClr val="A5813A"/>
                 </a:solidFill>
@@ -5404,7 +6057,7 @@
               </a:spcAft>
             </a:pPr>
             <a:r>
-              <a:rPr sz="1600" b="1">
+              <a:rPr sz="1500" b="1">
                 <a:solidFill>
                   <a:srgbClr val="241D14"/>
                 </a:solidFill>
@@ -5417,7 +6070,7 @@
       </p:sp>
       <p:sp>
         <p:nvSpPr>
-          <p:cNvPr id="16" name="Rounded Rectangle 15"/>
+          <p:cNvPr id="15" name="Rounded Rectangle 14"/>
           <p:cNvSpPr/>
           <p:nvPr/>
         </p:nvSpPr>
@@ -5463,13 +6116,13 @@
       </p:sp>
       <p:sp>
         <p:nvSpPr>
-          <p:cNvPr id="17" name="TextBox 16"/>
+          <p:cNvPr id="16" name="TextBox 15"/>
           <p:cNvSpPr txBox="1"/>
           <p:nvPr/>
         </p:nvSpPr>
         <p:spPr>
           <a:xfrm>
-            <a:off x="3749040" y="4370832"/>
+            <a:off x="3749040" y="4343400"/>
             <a:ext cx="2606040" cy="1097280"/>
           </a:xfrm>
           <a:prstGeom prst="rect">
@@ -5492,7 +6145,7 @@
               </a:spcAft>
             </a:pPr>
             <a:r>
-              <a:rPr sz="3000" b="1">
+              <a:rPr sz="2800" b="1">
                 <a:solidFill>
                   <a:srgbClr val="A5813A"/>
                 </a:solidFill>
@@ -5511,7 +6164,7 @@
               </a:spcAft>
             </a:pPr>
             <a:r>
-              <a:rPr sz="1600" b="1">
+              <a:rPr sz="1500" b="1">
                 <a:solidFill>
                   <a:srgbClr val="241D14"/>
                 </a:solidFill>
@@ -5524,7 +6177,7 @@
       </p:sp>
       <p:sp>
         <p:nvSpPr>
-          <p:cNvPr id="18" name="Rounded Rectangle 17"/>
+          <p:cNvPr id="17" name="Rounded Rectangle 16"/>
           <p:cNvSpPr/>
           <p:nvPr/>
         </p:nvSpPr>
@@ -5570,13 +6223,13 @@
       </p:sp>
       <p:sp>
         <p:nvSpPr>
-          <p:cNvPr id="19" name="TextBox 18"/>
+          <p:cNvPr id="18" name="TextBox 17"/>
           <p:cNvSpPr txBox="1"/>
           <p:nvPr/>
         </p:nvSpPr>
         <p:spPr>
           <a:xfrm>
-            <a:off x="6675120" y="4370832"/>
+            <a:off x="6675120" y="4343400"/>
             <a:ext cx="2606040" cy="1097280"/>
           </a:xfrm>
           <a:prstGeom prst="rect">
@@ -5599,7 +6252,7 @@
               </a:spcAft>
             </a:pPr>
             <a:r>
-              <a:rPr sz="3000" b="1">
+              <a:rPr sz="2800" b="1">
                 <a:solidFill>
                   <a:srgbClr val="A5813A"/>
                 </a:solidFill>
@@ -5618,7 +6271,7 @@
               </a:spcAft>
             </a:pPr>
             <a:r>
-              <a:rPr sz="1600" b="1">
+              <a:rPr sz="1500" b="1">
                 <a:solidFill>
                   <a:srgbClr val="241D14"/>
                 </a:solidFill>
@@ -5631,7 +6284,7 @@
       </p:sp>
       <p:sp>
         <p:nvSpPr>
-          <p:cNvPr id="20" name="Rounded Rectangle 19"/>
+          <p:cNvPr id="19" name="Rounded Rectangle 18"/>
           <p:cNvSpPr/>
           <p:nvPr/>
         </p:nvSpPr>
@@ -5675,13 +6328,13 @@
       </p:sp>
       <p:sp>
         <p:nvSpPr>
-          <p:cNvPr id="21" name="TextBox 20"/>
+          <p:cNvPr id="20" name="TextBox 19"/>
           <p:cNvSpPr txBox="1"/>
           <p:nvPr/>
         </p:nvSpPr>
         <p:spPr>
           <a:xfrm>
-            <a:off x="9601200" y="4370832"/>
+            <a:off x="9601200" y="4343400"/>
             <a:ext cx="2606040" cy="1097280"/>
           </a:xfrm>
           <a:prstGeom prst="rect">
@@ -5704,7 +6357,7 @@
               </a:spcAft>
             </a:pPr>
             <a:r>
-              <a:rPr sz="3000" b="1">
+              <a:rPr sz="2800" b="1">
                 <a:solidFill>
                   <a:srgbClr val="E6CF8E"/>
                 </a:solidFill>
@@ -5723,13 +6376,13 @@
               </a:spcAft>
             </a:pPr>
             <a:r>
-              <a:rPr sz="1600" b="1">
+              <a:rPr sz="1500" b="1">
                 <a:solidFill>
                   <a:srgbClr val="FFFFFF"/>
                 </a:solidFill>
                 <a:latin typeface="Microsoft YaHei"/>
               </a:rPr>
-              <a:t>保存生效 → 8 验证</a:t>
+              <a:t>保存 → 8 验证</a:t>
             </a:r>
           </a:p>
         </p:txBody>
@@ -5812,8 +6465,8 @@
         </p:nvSpPr>
         <p:spPr>
           <a:xfrm>
-            <a:off x="822960" y="502920"/>
-            <a:ext cx="1280160" cy="1280160"/>
+            <a:off x="640080" y="457200"/>
+            <a:ext cx="1143000" cy="1143000"/>
           </a:xfrm>
           <a:prstGeom prst="roundRect">
             <a:avLst/>
@@ -5856,8 +6509,8 @@
         </p:nvSpPr>
         <p:spPr>
           <a:xfrm>
-            <a:off x="822960" y="502920"/>
-            <a:ext cx="1280160" cy="1280160"/>
+            <a:off x="640080" y="457200"/>
+            <a:ext cx="1143000" cy="1143000"/>
           </a:xfrm>
           <a:prstGeom prst="rect">
             <a:avLst/>
@@ -5879,7 +6532,7 @@
               </a:spcAft>
             </a:pPr>
             <a:r>
-              <a:rPr sz="1200" b="1">
+              <a:rPr sz="1100" b="1">
                 <a:solidFill>
                   <a:srgbClr val="E6CF8E"/>
                 </a:solidFill>
@@ -5898,7 +6551,7 @@
               </a:spcAft>
             </a:pPr>
             <a:r>
-              <a:rPr sz="4000" b="1">
+              <a:rPr sz="3400" b="1">
                 <a:solidFill>
                   <a:srgbClr val="FFFFFF"/>
                 </a:solidFill>
@@ -5917,8 +6570,8 @@
         </p:nvSpPr>
         <p:spPr>
           <a:xfrm>
-            <a:off x="2286000" y="548640"/>
-            <a:ext cx="9144000" cy="411480"/>
+            <a:off x="1920240" y="502920"/>
+            <a:ext cx="9144000" cy="365760"/>
           </a:xfrm>
           <a:prstGeom prst="rect">
             <a:avLst/>
@@ -5940,7 +6593,7 @@
               </a:spcAft>
             </a:pPr>
             <a:r>
-              <a:rPr sz="1400" b="1">
+              <a:rPr sz="1300" b="1">
                 <a:solidFill>
                   <a:srgbClr val="7A5C1E"/>
                 </a:solidFill>
@@ -5959,8 +6612,8 @@
         </p:nvSpPr>
         <p:spPr>
           <a:xfrm>
-            <a:off x="2286000" y="932688"/>
-            <a:ext cx="9326880" cy="822960"/>
+            <a:off x="1920240" y="868680"/>
+            <a:ext cx="9875520" cy="731520"/>
           </a:xfrm>
           <a:prstGeom prst="rect">
             <a:avLst/>
@@ -5982,7 +6635,7 @@
               </a:spcAft>
             </a:pPr>
             <a:r>
-              <a:rPr sz="3000" b="1">
+              <a:rPr sz="2600" b="1">
                 <a:solidFill>
                   <a:srgbClr val="241D14"/>
                 </a:solidFill>
@@ -6001,8 +6654,349 @@
         </p:nvSpPr>
         <p:spPr>
           <a:xfrm>
-            <a:off x="822960" y="2103120"/>
-            <a:ext cx="10515600" cy="777240"/>
+            <a:off x="640080" y="1920240"/>
+            <a:ext cx="4297680" cy="658368"/>
+          </a:xfrm>
+          <a:prstGeom prst="roundRect">
+            <a:avLst/>
+          </a:prstGeom>
+          <a:solidFill>
+            <a:srgbClr val="FFFFFF"/>
+          </a:solidFill>
+          <a:ln w="13970">
+            <a:solidFill>
+              <a:srgbClr val="EADFC6"/>
+            </a:solidFill>
+          </a:ln>
+          <a:effectLst/>
+        </p:spPr>
+        <p:style>
+          <a:lnRef idx="1">
+            <a:schemeClr val="accent1"/>
+          </a:lnRef>
+          <a:fillRef idx="3">
+            <a:schemeClr val="accent1"/>
+          </a:fillRef>
+          <a:effectRef idx="2">
+            <a:schemeClr val="accent1"/>
+          </a:effectRef>
+          <a:fontRef idx="minor">
+            <a:schemeClr val="lt1"/>
+          </a:fontRef>
+        </p:style>
+        <p:txBody>
+          <a:bodyPr rtlCol="0" anchor="ctr"/>
+          <a:lstStyle/>
+          <a:p>
+            <a:pPr algn="ctr"/>
+          </a:p>
+        </p:txBody>
+      </p:sp>
+      <p:sp>
+        <p:nvSpPr>
+          <p:cNvPr id="8" name="TextBox 7"/>
+          <p:cNvSpPr txBox="1"/>
+          <p:nvPr/>
+        </p:nvSpPr>
+        <p:spPr>
+          <a:xfrm>
+            <a:off x="841248" y="2011680"/>
+            <a:ext cx="3931920" cy="475488"/>
+          </a:xfrm>
+          <a:prstGeom prst="rect">
+            <a:avLst/>
+          </a:prstGeom>
+          <a:noFill/>
+        </p:spPr>
+        <p:txBody>
+          <a:bodyPr wrap="square" anchor="ctr" lIns="0" rIns="0" tIns="0" bIns="0">
+            <a:spAutoFit/>
+          </a:bodyPr>
+          <a:lstStyle/>
+          <a:p>
+            <a:pPr algn="l">
+              <a:spcBef>
+                <a:spcPts val="0"/>
+              </a:spcBef>
+              <a:spcAft>
+                <a:spcPts val="600"/>
+              </a:spcAft>
+            </a:pPr>
+            <a:r>
+              <a:rPr sz="1300" b="1">
+                <a:solidFill>
+                  <a:srgbClr val="7A5C1E"/>
+                </a:solidFill>
+                <a:latin typeface="Microsoft YaHei"/>
+              </a:rPr>
+              <a:t>📍 位置：</a:t>
+            </a:r>
+            <a:r>
+              <a:rPr sz="1250" b="0">
+                <a:solidFill>
+                  <a:srgbClr val="241D14"/>
+                </a:solidFill>
+                <a:latin typeface="Microsoft YaHei"/>
+              </a:rPr>
+              <a:t>顶部导航 →「智能体设置」→ 上方「选择要配置的智能体」</a:t>
+            </a:r>
+          </a:p>
+        </p:txBody>
+      </p:sp>
+      <p:sp>
+        <p:nvSpPr>
+          <p:cNvPr id="9" name="TextBox 8"/>
+          <p:cNvSpPr txBox="1"/>
+          <p:nvPr/>
+        </p:nvSpPr>
+        <p:spPr>
+          <a:xfrm>
+            <a:off x="685800" y="2788920"/>
+            <a:ext cx="4297680" cy="365760"/>
+          </a:xfrm>
+          <a:prstGeom prst="rect">
+            <a:avLst/>
+          </a:prstGeom>
+          <a:noFill/>
+        </p:spPr>
+        <p:txBody>
+          <a:bodyPr wrap="square" anchor="t" lIns="0" rIns="0" tIns="0" bIns="0">
+            <a:spAutoFit/>
+          </a:bodyPr>
+          <a:lstStyle/>
+          <a:p>
+            <a:pPr algn="l">
+              <a:spcBef>
+                <a:spcPts val="0"/>
+              </a:spcBef>
+              <a:spcAft>
+                <a:spcPts val="600"/>
+              </a:spcAft>
+            </a:pPr>
+            <a:r>
+              <a:rPr sz="1600" b="1">
+                <a:solidFill>
+                  <a:srgbClr val="7A5C1E"/>
+                </a:solidFill>
+                <a:latin typeface="Microsoft YaHei"/>
+              </a:rPr>
+              <a:t>操作步骤</a:t>
+            </a:r>
+          </a:p>
+        </p:txBody>
+      </p:sp>
+      <p:sp>
+        <p:nvSpPr>
+          <p:cNvPr id="10" name="TextBox 9"/>
+          <p:cNvSpPr txBox="1"/>
+          <p:nvPr/>
+        </p:nvSpPr>
+        <p:spPr>
+          <a:xfrm>
+            <a:off x="777240" y="3200400"/>
+            <a:ext cx="4114800" cy="2377440"/>
+          </a:xfrm>
+          <a:prstGeom prst="rect">
+            <a:avLst/>
+          </a:prstGeom>
+          <a:noFill/>
+        </p:spPr>
+        <p:txBody>
+          <a:bodyPr wrap="square" anchor="t" lIns="0" rIns="0" tIns="0" bIns="0">
+            <a:spAutoFit/>
+          </a:bodyPr>
+          <a:lstStyle/>
+          <a:p>
+            <a:pPr algn="l">
+              <a:spcBef>
+                <a:spcPts val="0"/>
+              </a:spcBef>
+              <a:spcAft>
+                <a:spcPts val="800"/>
+              </a:spcAft>
+            </a:pPr>
+            <a:r>
+              <a:rPr sz="1600" b="1">
+                <a:solidFill>
+                  <a:srgbClr val="A5813A"/>
+                </a:solidFill>
+                <a:latin typeface="Microsoft YaHei"/>
+              </a:rPr>
+              <a:t>• </a:t>
+            </a:r>
+            <a:r>
+              <a:rPr sz="1550" b="0">
+                <a:solidFill>
+                  <a:srgbClr val="241D14"/>
+                </a:solidFill>
+                <a:latin typeface="Microsoft YaHei"/>
+              </a:rPr>
+              <a:t>在标签区点中你要配置的赛道</a:t>
+            </a:r>
+          </a:p>
+          <a:p>
+            <a:pPr algn="l">
+              <a:spcBef>
+                <a:spcPts val="0"/>
+              </a:spcBef>
+              <a:spcAft>
+                <a:spcPts val="800"/>
+              </a:spcAft>
+            </a:pPr>
+            <a:r>
+              <a:rPr sz="1600" b="1">
+                <a:solidFill>
+                  <a:srgbClr val="A5813A"/>
+                </a:solidFill>
+                <a:latin typeface="Microsoft YaHei"/>
+              </a:rPr>
+              <a:t>• </a:t>
+            </a:r>
+            <a:r>
+              <a:rPr sz="1550" b="0">
+                <a:solidFill>
+                  <a:srgbClr val="241D14"/>
+                </a:solidFill>
+                <a:latin typeface="Microsoft YaHei"/>
+              </a:rPr>
+              <a:t>没有就先新建一个赛道智能体</a:t>
+            </a:r>
+          </a:p>
+          <a:p>
+            <a:pPr algn="l">
+              <a:spcBef>
+                <a:spcPts val="0"/>
+              </a:spcBef>
+              <a:spcAft>
+                <a:spcPts val="800"/>
+              </a:spcAft>
+            </a:pPr>
+            <a:r>
+              <a:rPr sz="1600" b="1">
+                <a:solidFill>
+                  <a:srgbClr val="A5813A"/>
+                </a:solidFill>
+                <a:latin typeface="Microsoft YaHei"/>
+              </a:rPr>
+              <a:t>• </a:t>
+            </a:r>
+            <a:r>
+              <a:rPr sz="1550" b="0">
+                <a:solidFill>
+                  <a:srgbClr val="241D14"/>
+                </a:solidFill>
+                <a:latin typeface="Microsoft YaHei"/>
+              </a:rPr>
+              <a:t>确认右上角「正在配置」是对的号</a:t>
+            </a:r>
+          </a:p>
+        </p:txBody>
+      </p:sp>
+      <p:sp>
+        <p:nvSpPr>
+          <p:cNvPr id="11" name="Rounded Rectangle 10"/>
+          <p:cNvSpPr/>
+          <p:nvPr/>
+        </p:nvSpPr>
+        <p:spPr>
+          <a:xfrm>
+            <a:off x="640080" y="5806440"/>
+            <a:ext cx="4297680" cy="731520"/>
+          </a:xfrm>
+          <a:prstGeom prst="roundRect">
+            <a:avLst/>
+          </a:prstGeom>
+          <a:solidFill>
+            <a:srgbClr val="F6EEDA"/>
+          </a:solidFill>
+          <a:ln>
+            <a:noFill/>
+          </a:ln>
+          <a:effectLst/>
+        </p:spPr>
+        <p:style>
+          <a:lnRef idx="1">
+            <a:schemeClr val="accent1"/>
+          </a:lnRef>
+          <a:fillRef idx="3">
+            <a:schemeClr val="accent1"/>
+          </a:fillRef>
+          <a:effectRef idx="2">
+            <a:schemeClr val="accent1"/>
+          </a:effectRef>
+          <a:fontRef idx="minor">
+            <a:schemeClr val="lt1"/>
+          </a:fontRef>
+        </p:style>
+        <p:txBody>
+          <a:bodyPr rtlCol="0" anchor="ctr"/>
+          <a:lstStyle/>
+          <a:p>
+            <a:pPr algn="ctr"/>
+          </a:p>
+        </p:txBody>
+      </p:sp>
+      <p:sp>
+        <p:nvSpPr>
+          <p:cNvPr id="12" name="TextBox 11"/>
+          <p:cNvSpPr txBox="1"/>
+          <p:nvPr/>
+        </p:nvSpPr>
+        <p:spPr>
+          <a:xfrm>
+            <a:off x="841248" y="5897880"/>
+            <a:ext cx="3931920" cy="548640"/>
+          </a:xfrm>
+          <a:prstGeom prst="rect">
+            <a:avLst/>
+          </a:prstGeom>
+          <a:noFill/>
+        </p:spPr>
+        <p:txBody>
+          <a:bodyPr wrap="square" anchor="ctr" lIns="0" rIns="0" tIns="0" bIns="0">
+            <a:spAutoFit/>
+          </a:bodyPr>
+          <a:lstStyle/>
+          <a:p>
+            <a:pPr algn="l">
+              <a:spcBef>
+                <a:spcPts val="0"/>
+              </a:spcBef>
+              <a:spcAft>
+                <a:spcPts val="600"/>
+              </a:spcAft>
+            </a:pPr>
+            <a:r>
+              <a:rPr sz="1300" b="1">
+                <a:solidFill>
+                  <a:srgbClr val="7A5C1E"/>
+                </a:solidFill>
+                <a:latin typeface="Microsoft YaHei"/>
+              </a:rPr>
+              <a:t>⚠ </a:t>
+            </a:r>
+            <a:r>
+              <a:rPr sz="1250" b="0">
+                <a:solidFill>
+                  <a:srgbClr val="6B6459"/>
+                </a:solidFill>
+                <a:latin typeface="Microsoft YaHei"/>
+              </a:rPr>
+              <a:t>配置按赛道独立保存，各赛道互不干扰；别填错号。</a:t>
+            </a:r>
+          </a:p>
+        </p:txBody>
+      </p:sp>
+      <p:sp>
+        <p:nvSpPr>
+          <p:cNvPr id="13" name="Rounded Rectangle 12"/>
+          <p:cNvSpPr/>
+          <p:nvPr/>
+        </p:nvSpPr>
+        <p:spPr>
+          <a:xfrm>
+            <a:off x="5111640" y="3691238"/>
+            <a:ext cx="6510240" cy="1075724"/>
           </a:xfrm>
           <a:prstGeom prst="roundRect">
             <a:avLst/>
@@ -6039,301 +7033,30 @@
           </a:p>
         </p:txBody>
       </p:sp>
-      <p:sp>
-        <p:nvSpPr>
-          <p:cNvPr id="8" name="TextBox 7"/>
-          <p:cNvSpPr txBox="1"/>
-          <p:nvPr/>
-        </p:nvSpPr>
-        <p:spPr>
-          <a:xfrm>
-            <a:off x="1097280" y="2212848"/>
-            <a:ext cx="10058400" cy="548640"/>
+      <p:pic>
+        <p:nvPicPr>
+          <p:cNvPr id="14" name="Picture 13" descr="sc_chips.png"/>
+          <p:cNvPicPr>
+            <a:picLocks noChangeAspect="1"/>
+          </p:cNvPicPr>
+          <p:nvPr/>
+        </p:nvPicPr>
+        <p:blipFill>
+          <a:blip r:embed="rId2"/>
+          <a:stretch>
+            <a:fillRect/>
+          </a:stretch>
+        </p:blipFill>
+        <p:spPr>
+          <a:xfrm>
+            <a:off x="5120640" y="3700238"/>
+            <a:ext cx="6492240" cy="1057724"/>
           </a:xfrm>
           <a:prstGeom prst="rect">
             <a:avLst/>
           </a:prstGeom>
-          <a:noFill/>
-        </p:spPr>
-        <p:txBody>
-          <a:bodyPr wrap="square" anchor="ctr" lIns="0" rIns="0" tIns="0" bIns="0">
-            <a:spAutoFit/>
-          </a:bodyPr>
-          <a:lstStyle/>
-          <a:p>
-            <a:pPr algn="l">
-              <a:spcBef>
-                <a:spcPts val="0"/>
-              </a:spcBef>
-              <a:spcAft>
-                <a:spcPts val="600"/>
-              </a:spcAft>
-            </a:pPr>
-            <a:r>
-              <a:rPr sz="1700" b="1">
-                <a:solidFill>
-                  <a:srgbClr val="7A5C1E"/>
-                </a:solidFill>
-                <a:latin typeface="Microsoft YaHei"/>
-              </a:rPr>
-              <a:t>📍 界面位置：</a:t>
-            </a:r>
-            <a:r>
-              <a:rPr sz="1700" b="0">
-                <a:solidFill>
-                  <a:srgbClr val="241D14"/>
-                </a:solidFill>
-                <a:latin typeface="Microsoft YaHei"/>
-              </a:rPr>
-              <a:t>顶部/左侧导航 →「智能体设置」页 → 顶部「选择要配置的智能体」</a:t>
-            </a:r>
-          </a:p>
-        </p:txBody>
-      </p:sp>
-      <p:sp>
-        <p:nvSpPr>
-          <p:cNvPr id="9" name="TextBox 8"/>
-          <p:cNvSpPr txBox="1"/>
-          <p:nvPr/>
-        </p:nvSpPr>
-        <p:spPr>
-          <a:xfrm>
-            <a:off x="914400" y="3063240"/>
-            <a:ext cx="10332720" cy="457200"/>
-          </a:xfrm>
-          <a:prstGeom prst="rect">
-            <a:avLst/>
-          </a:prstGeom>
-          <a:noFill/>
-        </p:spPr>
-        <p:txBody>
-          <a:bodyPr wrap="square" anchor="t" lIns="0" rIns="0" tIns="0" bIns="0">
-            <a:spAutoFit/>
-          </a:bodyPr>
-          <a:lstStyle/>
-          <a:p>
-            <a:pPr algn="l">
-              <a:spcBef>
-                <a:spcPts val="0"/>
-              </a:spcBef>
-              <a:spcAft>
-                <a:spcPts val="600"/>
-              </a:spcAft>
-            </a:pPr>
-            <a:r>
-              <a:rPr sz="1800" b="1">
-                <a:solidFill>
-                  <a:srgbClr val="7A5C1E"/>
-                </a:solidFill>
-                <a:latin typeface="Microsoft YaHei"/>
-              </a:rPr>
-              <a:t>操作步骤</a:t>
-            </a:r>
-          </a:p>
-        </p:txBody>
-      </p:sp>
-      <p:sp>
-        <p:nvSpPr>
-          <p:cNvPr id="10" name="TextBox 9"/>
-          <p:cNvSpPr txBox="1"/>
-          <p:nvPr/>
-        </p:nvSpPr>
-        <p:spPr>
-          <a:xfrm>
-            <a:off x="1051560" y="3520440"/>
-            <a:ext cx="10149840" cy="2194560"/>
-          </a:xfrm>
-          <a:prstGeom prst="rect">
-            <a:avLst/>
-          </a:prstGeom>
-          <a:noFill/>
-        </p:spPr>
-        <p:txBody>
-          <a:bodyPr wrap="square" anchor="t" lIns="0" rIns="0" tIns="0" bIns="0">
-            <a:spAutoFit/>
-          </a:bodyPr>
-          <a:lstStyle/>
-          <a:p>
-            <a:pPr algn="l">
-              <a:spcBef>
-                <a:spcPts val="0"/>
-              </a:spcBef>
-              <a:spcAft>
-                <a:spcPts val="900"/>
-              </a:spcAft>
-            </a:pPr>
-            <a:r>
-              <a:rPr sz="1900" b="1">
-                <a:solidFill>
-                  <a:srgbClr val="A5813A"/>
-                </a:solidFill>
-                <a:latin typeface="Microsoft YaHei"/>
-              </a:rPr>
-              <a:t>• </a:t>
-            </a:r>
-            <a:r>
-              <a:rPr sz="1900" b="0">
-                <a:solidFill>
-                  <a:srgbClr val="241D14"/>
-                </a:solidFill>
-                <a:latin typeface="Microsoft YaHei"/>
-              </a:rPr>
-              <a:t>在标签区点中你要配置的赛道（如设计考研）</a:t>
-            </a:r>
-          </a:p>
-          <a:p>
-            <a:pPr algn="l">
-              <a:spcBef>
-                <a:spcPts val="0"/>
-              </a:spcBef>
-              <a:spcAft>
-                <a:spcPts val="900"/>
-              </a:spcAft>
-            </a:pPr>
-            <a:r>
-              <a:rPr sz="1900" b="1">
-                <a:solidFill>
-                  <a:srgbClr val="A5813A"/>
-                </a:solidFill>
-                <a:latin typeface="Microsoft YaHei"/>
-              </a:rPr>
-              <a:t>• </a:t>
-            </a:r>
-            <a:r>
-              <a:rPr sz="1900" b="0">
-                <a:solidFill>
-                  <a:srgbClr val="241D14"/>
-                </a:solidFill>
-                <a:latin typeface="Microsoft YaHei"/>
-              </a:rPr>
-              <a:t>没有就先新建一个赛道智能体</a:t>
-            </a:r>
-          </a:p>
-          <a:p>
-            <a:pPr algn="l">
-              <a:spcBef>
-                <a:spcPts val="0"/>
-              </a:spcBef>
-              <a:spcAft>
-                <a:spcPts val="900"/>
-              </a:spcAft>
-            </a:pPr>
-            <a:r>
-              <a:rPr sz="1900" b="1">
-                <a:solidFill>
-                  <a:srgbClr val="A5813A"/>
-                </a:solidFill>
-                <a:latin typeface="Microsoft YaHei"/>
-              </a:rPr>
-              <a:t>• </a:t>
-            </a:r>
-            <a:r>
-              <a:rPr sz="1900" b="0">
-                <a:solidFill>
-                  <a:srgbClr val="241D14"/>
-                </a:solidFill>
-                <a:latin typeface="Microsoft YaHei"/>
-              </a:rPr>
-              <a:t>确认右上角「正在配置」显示的是对的号</a:t>
-            </a:r>
-          </a:p>
-        </p:txBody>
-      </p:sp>
-      <p:sp>
-        <p:nvSpPr>
-          <p:cNvPr id="11" name="Rounded Rectangle 10"/>
-          <p:cNvSpPr/>
-          <p:nvPr/>
-        </p:nvSpPr>
-        <p:spPr>
-          <a:xfrm>
-            <a:off x="822960" y="5806440"/>
-            <a:ext cx="10515600" cy="685800"/>
-          </a:xfrm>
-          <a:prstGeom prst="roundRect">
-            <a:avLst/>
-          </a:prstGeom>
-          <a:solidFill>
-            <a:srgbClr val="F6EEDA"/>
-          </a:solidFill>
-          <a:ln>
-            <a:noFill/>
-          </a:ln>
-          <a:effectLst/>
-        </p:spPr>
-        <p:style>
-          <a:lnRef idx="1">
-            <a:schemeClr val="accent1"/>
-          </a:lnRef>
-          <a:fillRef idx="3">
-            <a:schemeClr val="accent1"/>
-          </a:fillRef>
-          <a:effectRef idx="2">
-            <a:schemeClr val="accent1"/>
-          </a:effectRef>
-          <a:fontRef idx="minor">
-            <a:schemeClr val="lt1"/>
-          </a:fontRef>
-        </p:style>
-        <p:txBody>
-          <a:bodyPr rtlCol="0" anchor="ctr"/>
-          <a:lstStyle/>
-          <a:p>
-            <a:pPr algn="ctr"/>
-          </a:p>
-        </p:txBody>
-      </p:sp>
-      <p:sp>
-        <p:nvSpPr>
-          <p:cNvPr id="12" name="TextBox 11"/>
-          <p:cNvSpPr txBox="1"/>
-          <p:nvPr/>
-        </p:nvSpPr>
-        <p:spPr>
-          <a:xfrm>
-            <a:off x="1097280" y="5897880"/>
-            <a:ext cx="10058400" cy="502920"/>
-          </a:xfrm>
-          <a:prstGeom prst="rect">
-            <a:avLst/>
-          </a:prstGeom>
-          <a:noFill/>
-        </p:spPr>
-        <p:txBody>
-          <a:bodyPr wrap="square" anchor="ctr" lIns="0" rIns="0" tIns="0" bIns="0">
-            <a:spAutoFit/>
-          </a:bodyPr>
-          <a:lstStyle/>
-          <a:p>
-            <a:pPr algn="l">
-              <a:spcBef>
-                <a:spcPts val="0"/>
-              </a:spcBef>
-              <a:spcAft>
-                <a:spcPts val="600"/>
-              </a:spcAft>
-            </a:pPr>
-            <a:r>
-              <a:rPr sz="1500" b="1">
-                <a:solidFill>
-                  <a:srgbClr val="7A5C1E"/>
-                </a:solidFill>
-                <a:latin typeface="Microsoft YaHei"/>
-              </a:rPr>
-              <a:t>⚠ 避坑：</a:t>
-            </a:r>
-            <a:r>
-              <a:rPr sz="1500" b="0">
-                <a:solidFill>
-                  <a:srgbClr val="6B6459"/>
-                </a:solidFill>
-                <a:latin typeface="Microsoft YaHei"/>
-              </a:rPr>
-              <a:t>配置按赛道独立保存，各赛道互不干扰；别填错号。</a:t>
-            </a:r>
-          </a:p>
-        </p:txBody>
-      </p:sp>
+        </p:spPr>
+      </p:pic>
     </p:spTree>
   </p:cSld>
   <p:clrMapOvr>
@@ -6412,8 +7135,8 @@
         </p:nvSpPr>
         <p:spPr>
           <a:xfrm>
-            <a:off x="822960" y="502920"/>
-            <a:ext cx="1280160" cy="1280160"/>
+            <a:off x="640080" y="457200"/>
+            <a:ext cx="1143000" cy="1143000"/>
           </a:xfrm>
           <a:prstGeom prst="roundRect">
             <a:avLst/>
@@ -6456,8 +7179,8 @@
         </p:nvSpPr>
         <p:spPr>
           <a:xfrm>
-            <a:off x="822960" y="502920"/>
-            <a:ext cx="1280160" cy="1280160"/>
+            <a:off x="640080" y="457200"/>
+            <a:ext cx="1143000" cy="1143000"/>
           </a:xfrm>
           <a:prstGeom prst="rect">
             <a:avLst/>
@@ -6479,7 +7202,7 @@
               </a:spcAft>
             </a:pPr>
             <a:r>
-              <a:rPr sz="1200" b="1">
+              <a:rPr sz="1100" b="1">
                 <a:solidFill>
                   <a:srgbClr val="E6CF8E"/>
                 </a:solidFill>
@@ -6498,7 +7221,7 @@
               </a:spcAft>
             </a:pPr>
             <a:r>
-              <a:rPr sz="4000" b="1">
+              <a:rPr sz="3400" b="1">
                 <a:solidFill>
                   <a:srgbClr val="FFFFFF"/>
                 </a:solidFill>
@@ -6517,8 +7240,8 @@
         </p:nvSpPr>
         <p:spPr>
           <a:xfrm>
-            <a:off x="2286000" y="548640"/>
-            <a:ext cx="9144000" cy="411480"/>
+            <a:off x="1920240" y="502920"/>
+            <a:ext cx="9144000" cy="365760"/>
           </a:xfrm>
           <a:prstGeom prst="rect">
             <a:avLst/>
@@ -6540,7 +7263,7 @@
               </a:spcAft>
             </a:pPr>
             <a:r>
-              <a:rPr sz="1400" b="1">
+              <a:rPr sz="1300" b="1">
                 <a:solidFill>
                   <a:srgbClr val="7A5C1E"/>
                 </a:solidFill>
@@ -6559,8 +7282,8 @@
         </p:nvSpPr>
         <p:spPr>
           <a:xfrm>
-            <a:off x="2286000" y="932688"/>
-            <a:ext cx="9326880" cy="822960"/>
+            <a:off x="1920240" y="868680"/>
+            <a:ext cx="9875520" cy="731520"/>
           </a:xfrm>
           <a:prstGeom prst="rect">
             <a:avLst/>
@@ -6582,7 +7305,7 @@
               </a:spcAft>
             </a:pPr>
             <a:r>
-              <a:rPr sz="3000" b="1">
+              <a:rPr sz="2600" b="1">
                 <a:solidFill>
                   <a:srgbClr val="241D14"/>
                 </a:solidFill>
@@ -6601,8 +7324,349 @@
         </p:nvSpPr>
         <p:spPr>
           <a:xfrm>
-            <a:off x="822960" y="2103120"/>
-            <a:ext cx="10515600" cy="777240"/>
+            <a:off x="640080" y="1920240"/>
+            <a:ext cx="4297680" cy="658368"/>
+          </a:xfrm>
+          <a:prstGeom prst="roundRect">
+            <a:avLst/>
+          </a:prstGeom>
+          <a:solidFill>
+            <a:srgbClr val="FFFFFF"/>
+          </a:solidFill>
+          <a:ln w="13970">
+            <a:solidFill>
+              <a:srgbClr val="EADFC6"/>
+            </a:solidFill>
+          </a:ln>
+          <a:effectLst/>
+        </p:spPr>
+        <p:style>
+          <a:lnRef idx="1">
+            <a:schemeClr val="accent1"/>
+          </a:lnRef>
+          <a:fillRef idx="3">
+            <a:schemeClr val="accent1"/>
+          </a:fillRef>
+          <a:effectRef idx="2">
+            <a:schemeClr val="accent1"/>
+          </a:effectRef>
+          <a:fontRef idx="minor">
+            <a:schemeClr val="lt1"/>
+          </a:fontRef>
+        </p:style>
+        <p:txBody>
+          <a:bodyPr rtlCol="0" anchor="ctr"/>
+          <a:lstStyle/>
+          <a:p>
+            <a:pPr algn="ctr"/>
+          </a:p>
+        </p:txBody>
+      </p:sp>
+      <p:sp>
+        <p:nvSpPr>
+          <p:cNvPr id="8" name="TextBox 7"/>
+          <p:cNvSpPr txBox="1"/>
+          <p:nvPr/>
+        </p:nvSpPr>
+        <p:spPr>
+          <a:xfrm>
+            <a:off x="841248" y="2011680"/>
+            <a:ext cx="3931920" cy="475488"/>
+          </a:xfrm>
+          <a:prstGeom prst="rect">
+            <a:avLst/>
+          </a:prstGeom>
+          <a:noFill/>
+        </p:spPr>
+        <p:txBody>
+          <a:bodyPr wrap="square" anchor="ctr" lIns="0" rIns="0" tIns="0" bIns="0">
+            <a:spAutoFit/>
+          </a:bodyPr>
+          <a:lstStyle/>
+          <a:p>
+            <a:pPr algn="l">
+              <a:spcBef>
+                <a:spcPts val="0"/>
+              </a:spcBef>
+              <a:spcAft>
+                <a:spcPts val="600"/>
+              </a:spcAft>
+            </a:pPr>
+            <a:r>
+              <a:rPr sz="1300" b="1">
+                <a:solidFill>
+                  <a:srgbClr val="7A5C1E"/>
+                </a:solidFill>
+                <a:latin typeface="Microsoft YaHei"/>
+              </a:rPr>
+              <a:t>📍 位置：</a:t>
+            </a:r>
+            <a:r>
+              <a:rPr sz="1250" b="0">
+                <a:solidFill>
+                  <a:srgbClr val="241D14"/>
+                </a:solidFill>
+                <a:latin typeface="Microsoft YaHei"/>
+              </a:rPr>
+              <a:t>本地准备（文档 / 图片皆可）</a:t>
+            </a:r>
+          </a:p>
+        </p:txBody>
+      </p:sp>
+      <p:sp>
+        <p:nvSpPr>
+          <p:cNvPr id="9" name="TextBox 8"/>
+          <p:cNvSpPr txBox="1"/>
+          <p:nvPr/>
+        </p:nvSpPr>
+        <p:spPr>
+          <a:xfrm>
+            <a:off x="685800" y="2788920"/>
+            <a:ext cx="4297680" cy="365760"/>
+          </a:xfrm>
+          <a:prstGeom prst="rect">
+            <a:avLst/>
+          </a:prstGeom>
+          <a:noFill/>
+        </p:spPr>
+        <p:txBody>
+          <a:bodyPr wrap="square" anchor="t" lIns="0" rIns="0" tIns="0" bIns="0">
+            <a:spAutoFit/>
+          </a:bodyPr>
+          <a:lstStyle/>
+          <a:p>
+            <a:pPr algn="l">
+              <a:spcBef>
+                <a:spcPts val="0"/>
+              </a:spcBef>
+              <a:spcAft>
+                <a:spcPts val="600"/>
+              </a:spcAft>
+            </a:pPr>
+            <a:r>
+              <a:rPr sz="1600" b="1">
+                <a:solidFill>
+                  <a:srgbClr val="7A5C1E"/>
+                </a:solidFill>
+                <a:latin typeface="Microsoft YaHei"/>
+              </a:rPr>
+              <a:t>操作步骤</a:t>
+            </a:r>
+          </a:p>
+        </p:txBody>
+      </p:sp>
+      <p:sp>
+        <p:nvSpPr>
+          <p:cNvPr id="10" name="TextBox 9"/>
+          <p:cNvSpPr txBox="1"/>
+          <p:nvPr/>
+        </p:nvSpPr>
+        <p:spPr>
+          <a:xfrm>
+            <a:off x="777240" y="3200400"/>
+            <a:ext cx="4114800" cy="2377440"/>
+          </a:xfrm>
+          <a:prstGeom prst="rect">
+            <a:avLst/>
+          </a:prstGeom>
+          <a:noFill/>
+        </p:spPr>
+        <p:txBody>
+          <a:bodyPr wrap="square" anchor="t" lIns="0" rIns="0" tIns="0" bIns="0">
+            <a:spAutoFit/>
+          </a:bodyPr>
+          <a:lstStyle/>
+          <a:p>
+            <a:pPr algn="l">
+              <a:spcBef>
+                <a:spcPts val="0"/>
+              </a:spcBef>
+              <a:spcAft>
+                <a:spcPts val="800"/>
+              </a:spcAft>
+            </a:pPr>
+            <a:r>
+              <a:rPr sz="1600" b="1">
+                <a:solidFill>
+                  <a:srgbClr val="A5813A"/>
+                </a:solidFill>
+                <a:latin typeface="Microsoft YaHei"/>
+              </a:rPr>
+              <a:t>• </a:t>
+            </a:r>
+            <a:r>
+              <a:rPr sz="1550" b="0">
+                <a:solidFill>
+                  <a:srgbClr val="241D14"/>
+                </a:solidFill>
+                <a:latin typeface="Microsoft YaHei"/>
+              </a:rPr>
+              <a:t>本人笔记 3~5 篇（克隆语气的核心）</a:t>
+            </a:r>
+          </a:p>
+          <a:p>
+            <a:pPr algn="l">
+              <a:spcBef>
+                <a:spcPts val="0"/>
+              </a:spcBef>
+              <a:spcAft>
+                <a:spcPts val="800"/>
+              </a:spcAft>
+            </a:pPr>
+            <a:r>
+              <a:rPr sz="1600" b="1">
+                <a:solidFill>
+                  <a:srgbClr val="A5813A"/>
+                </a:solidFill>
+                <a:latin typeface="Microsoft YaHei"/>
+              </a:rPr>
+              <a:t>• </a:t>
+            </a:r>
+            <a:r>
+              <a:rPr sz="1550" b="0">
+                <a:solidFill>
+                  <a:srgbClr val="241D14"/>
+                </a:solidFill>
+                <a:latin typeface="Microsoft YaHei"/>
+              </a:rPr>
+              <a:t>行业事实资料（时间节点/各科要点/院校梯队）</a:t>
+            </a:r>
+          </a:p>
+          <a:p>
+            <a:pPr algn="l">
+              <a:spcBef>
+                <a:spcPts val="0"/>
+              </a:spcBef>
+              <a:spcAft>
+                <a:spcPts val="800"/>
+              </a:spcAft>
+            </a:pPr>
+            <a:r>
+              <a:rPr sz="1600" b="1">
+                <a:solidFill>
+                  <a:srgbClr val="A5813A"/>
+                </a:solidFill>
+                <a:latin typeface="Microsoft YaHei"/>
+              </a:rPr>
+              <a:t>• </a:t>
+            </a:r>
+            <a:r>
+              <a:rPr sz="1550" b="0">
+                <a:solidFill>
+                  <a:srgbClr val="241D14"/>
+                </a:solidFill>
+                <a:latin typeface="Microsoft YaHei"/>
+              </a:rPr>
+              <a:t>红线清单（不能提的机构名/价格/承诺）</a:t>
+            </a:r>
+          </a:p>
+        </p:txBody>
+      </p:sp>
+      <p:sp>
+        <p:nvSpPr>
+          <p:cNvPr id="11" name="Rounded Rectangle 10"/>
+          <p:cNvSpPr/>
+          <p:nvPr/>
+        </p:nvSpPr>
+        <p:spPr>
+          <a:xfrm>
+            <a:off x="640080" y="5806440"/>
+            <a:ext cx="4297680" cy="731520"/>
+          </a:xfrm>
+          <a:prstGeom prst="roundRect">
+            <a:avLst/>
+          </a:prstGeom>
+          <a:solidFill>
+            <a:srgbClr val="F6EEDA"/>
+          </a:solidFill>
+          <a:ln>
+            <a:noFill/>
+          </a:ln>
+          <a:effectLst/>
+        </p:spPr>
+        <p:style>
+          <a:lnRef idx="1">
+            <a:schemeClr val="accent1"/>
+          </a:lnRef>
+          <a:fillRef idx="3">
+            <a:schemeClr val="accent1"/>
+          </a:fillRef>
+          <a:effectRef idx="2">
+            <a:schemeClr val="accent1"/>
+          </a:effectRef>
+          <a:fontRef idx="minor">
+            <a:schemeClr val="lt1"/>
+          </a:fontRef>
+        </p:style>
+        <p:txBody>
+          <a:bodyPr rtlCol="0" anchor="ctr"/>
+          <a:lstStyle/>
+          <a:p>
+            <a:pPr algn="ctr"/>
+          </a:p>
+        </p:txBody>
+      </p:sp>
+      <p:sp>
+        <p:nvSpPr>
+          <p:cNvPr id="12" name="TextBox 11"/>
+          <p:cNvSpPr txBox="1"/>
+          <p:nvPr/>
+        </p:nvSpPr>
+        <p:spPr>
+          <a:xfrm>
+            <a:off x="841248" y="5897880"/>
+            <a:ext cx="3931920" cy="548640"/>
+          </a:xfrm>
+          <a:prstGeom prst="rect">
+            <a:avLst/>
+          </a:prstGeom>
+          <a:noFill/>
+        </p:spPr>
+        <p:txBody>
+          <a:bodyPr wrap="square" anchor="ctr" lIns="0" rIns="0" tIns="0" bIns="0">
+            <a:spAutoFit/>
+          </a:bodyPr>
+          <a:lstStyle/>
+          <a:p>
+            <a:pPr algn="l">
+              <a:spcBef>
+                <a:spcPts val="0"/>
+              </a:spcBef>
+              <a:spcAft>
+                <a:spcPts val="600"/>
+              </a:spcAft>
+            </a:pPr>
+            <a:r>
+              <a:rPr sz="1300" b="1">
+                <a:solidFill>
+                  <a:srgbClr val="7A5C1E"/>
+                </a:solidFill>
+                <a:latin typeface="Microsoft YaHei"/>
+              </a:rPr>
+              <a:t>⚠ </a:t>
+            </a:r>
+            <a:r>
+              <a:rPr sz="1250" b="0">
+                <a:solidFill>
+                  <a:srgbClr val="6B6459"/>
+                </a:solidFill>
+                <a:latin typeface="Microsoft YaHei"/>
+              </a:rPr>
+              <a:t>最关键是你自己写过的笔记——这是让 AI 学你说话方式的根。</a:t>
+            </a:r>
+          </a:p>
+        </p:txBody>
+      </p:sp>
+      <p:sp>
+        <p:nvSpPr>
+          <p:cNvPr id="13" name="Rounded Rectangle 12"/>
+          <p:cNvSpPr/>
+          <p:nvPr/>
+        </p:nvSpPr>
+        <p:spPr>
+          <a:xfrm>
+            <a:off x="6349462" y="1911240"/>
+            <a:ext cx="4034596" cy="4635720"/>
           </a:xfrm>
           <a:prstGeom prst="roundRect">
             <a:avLst/>
@@ -6639,301 +7703,30 @@
           </a:p>
         </p:txBody>
       </p:sp>
-      <p:sp>
-        <p:nvSpPr>
-          <p:cNvPr id="8" name="TextBox 7"/>
-          <p:cNvSpPr txBox="1"/>
-          <p:nvPr/>
-        </p:nvSpPr>
-        <p:spPr>
-          <a:xfrm>
-            <a:off x="1097280" y="2212848"/>
-            <a:ext cx="10058400" cy="548640"/>
+      <p:pic>
+        <p:nvPicPr>
+          <p:cNvPr id="14" name="Picture 13" descr="sc_rskills.png"/>
+          <p:cNvPicPr>
+            <a:picLocks noChangeAspect="1"/>
+          </p:cNvPicPr>
+          <p:nvPr/>
+        </p:nvPicPr>
+        <p:blipFill>
+          <a:blip r:embed="rId2"/>
+          <a:stretch>
+            <a:fillRect/>
+          </a:stretch>
+        </p:blipFill>
+        <p:spPr>
+          <a:xfrm>
+            <a:off x="6358462" y="1920240"/>
+            <a:ext cx="4016596" cy="4617719"/>
           </a:xfrm>
           <a:prstGeom prst="rect">
             <a:avLst/>
           </a:prstGeom>
-          <a:noFill/>
-        </p:spPr>
-        <p:txBody>
-          <a:bodyPr wrap="square" anchor="ctr" lIns="0" rIns="0" tIns="0" bIns="0">
-            <a:spAutoFit/>
-          </a:bodyPr>
-          <a:lstStyle/>
-          <a:p>
-            <a:pPr algn="l">
-              <a:spcBef>
-                <a:spcPts val="0"/>
-              </a:spcBef>
-              <a:spcAft>
-                <a:spcPts val="600"/>
-              </a:spcAft>
-            </a:pPr>
-            <a:r>
-              <a:rPr sz="1700" b="1">
-                <a:solidFill>
-                  <a:srgbClr val="7A5C1E"/>
-                </a:solidFill>
-                <a:latin typeface="Microsoft YaHei"/>
-              </a:rPr>
-              <a:t>📍 界面位置：</a:t>
-            </a:r>
-            <a:r>
-              <a:rPr sz="1700" b="0">
-                <a:solidFill>
-                  <a:srgbClr val="241D14"/>
-                </a:solidFill>
-                <a:latin typeface="Microsoft YaHei"/>
-              </a:rPr>
-              <a:t>本地准备（文档 / 图片皆可）</a:t>
-            </a:r>
-          </a:p>
-        </p:txBody>
-      </p:sp>
-      <p:sp>
-        <p:nvSpPr>
-          <p:cNvPr id="9" name="TextBox 8"/>
-          <p:cNvSpPr txBox="1"/>
-          <p:nvPr/>
-        </p:nvSpPr>
-        <p:spPr>
-          <a:xfrm>
-            <a:off x="914400" y="3063240"/>
-            <a:ext cx="10332720" cy="457200"/>
-          </a:xfrm>
-          <a:prstGeom prst="rect">
-            <a:avLst/>
-          </a:prstGeom>
-          <a:noFill/>
-        </p:spPr>
-        <p:txBody>
-          <a:bodyPr wrap="square" anchor="t" lIns="0" rIns="0" tIns="0" bIns="0">
-            <a:spAutoFit/>
-          </a:bodyPr>
-          <a:lstStyle/>
-          <a:p>
-            <a:pPr algn="l">
-              <a:spcBef>
-                <a:spcPts val="0"/>
-              </a:spcBef>
-              <a:spcAft>
-                <a:spcPts val="600"/>
-              </a:spcAft>
-            </a:pPr>
-            <a:r>
-              <a:rPr sz="1800" b="1">
-                <a:solidFill>
-                  <a:srgbClr val="7A5C1E"/>
-                </a:solidFill>
-                <a:latin typeface="Microsoft YaHei"/>
-              </a:rPr>
-              <a:t>操作步骤</a:t>
-            </a:r>
-          </a:p>
-        </p:txBody>
-      </p:sp>
-      <p:sp>
-        <p:nvSpPr>
-          <p:cNvPr id="10" name="TextBox 9"/>
-          <p:cNvSpPr txBox="1"/>
-          <p:nvPr/>
-        </p:nvSpPr>
-        <p:spPr>
-          <a:xfrm>
-            <a:off x="1051560" y="3520440"/>
-            <a:ext cx="10149840" cy="2194560"/>
-          </a:xfrm>
-          <a:prstGeom prst="rect">
-            <a:avLst/>
-          </a:prstGeom>
-          <a:noFill/>
-        </p:spPr>
-        <p:txBody>
-          <a:bodyPr wrap="square" anchor="t" lIns="0" rIns="0" tIns="0" bIns="0">
-            <a:spAutoFit/>
-          </a:bodyPr>
-          <a:lstStyle/>
-          <a:p>
-            <a:pPr algn="l">
-              <a:spcBef>
-                <a:spcPts val="0"/>
-              </a:spcBef>
-              <a:spcAft>
-                <a:spcPts val="900"/>
-              </a:spcAft>
-            </a:pPr>
-            <a:r>
-              <a:rPr sz="1900" b="1">
-                <a:solidFill>
-                  <a:srgbClr val="A5813A"/>
-                </a:solidFill>
-                <a:latin typeface="Microsoft YaHei"/>
-              </a:rPr>
-              <a:t>• </a:t>
-            </a:r>
-            <a:r>
-              <a:rPr sz="1900" b="0">
-                <a:solidFill>
-                  <a:srgbClr val="241D14"/>
-                </a:solidFill>
-                <a:latin typeface="Microsoft YaHei"/>
-              </a:rPr>
-              <a:t>本人笔记 3~5 篇（克隆语气的核心）</a:t>
-            </a:r>
-          </a:p>
-          <a:p>
-            <a:pPr algn="l">
-              <a:spcBef>
-                <a:spcPts val="0"/>
-              </a:spcBef>
-              <a:spcAft>
-                <a:spcPts val="900"/>
-              </a:spcAft>
-            </a:pPr>
-            <a:r>
-              <a:rPr sz="1900" b="1">
-                <a:solidFill>
-                  <a:srgbClr val="A5813A"/>
-                </a:solidFill>
-                <a:latin typeface="Microsoft YaHei"/>
-              </a:rPr>
-              <a:t>• </a:t>
-            </a:r>
-            <a:r>
-              <a:rPr sz="1900" b="0">
-                <a:solidFill>
-                  <a:srgbClr val="241D14"/>
-                </a:solidFill>
-                <a:latin typeface="Microsoft YaHei"/>
-              </a:rPr>
-              <a:t>行业事实资料（时间节点/各科要点/院校梯队）</a:t>
-            </a:r>
-          </a:p>
-          <a:p>
-            <a:pPr algn="l">
-              <a:spcBef>
-                <a:spcPts val="0"/>
-              </a:spcBef>
-              <a:spcAft>
-                <a:spcPts val="900"/>
-              </a:spcAft>
-            </a:pPr>
-            <a:r>
-              <a:rPr sz="1900" b="1">
-                <a:solidFill>
-                  <a:srgbClr val="A5813A"/>
-                </a:solidFill>
-                <a:latin typeface="Microsoft YaHei"/>
-              </a:rPr>
-              <a:t>• </a:t>
-            </a:r>
-            <a:r>
-              <a:rPr sz="1900" b="0">
-                <a:solidFill>
-                  <a:srgbClr val="241D14"/>
-                </a:solidFill>
-                <a:latin typeface="Microsoft YaHei"/>
-              </a:rPr>
-              <a:t>红线清单（不能提的机构名/价格/承诺）</a:t>
-            </a:r>
-          </a:p>
-        </p:txBody>
-      </p:sp>
-      <p:sp>
-        <p:nvSpPr>
-          <p:cNvPr id="11" name="Rounded Rectangle 10"/>
-          <p:cNvSpPr/>
-          <p:nvPr/>
-        </p:nvSpPr>
-        <p:spPr>
-          <a:xfrm>
-            <a:off x="822960" y="5806440"/>
-            <a:ext cx="10515600" cy="685800"/>
-          </a:xfrm>
-          <a:prstGeom prst="roundRect">
-            <a:avLst/>
-          </a:prstGeom>
-          <a:solidFill>
-            <a:srgbClr val="F6EEDA"/>
-          </a:solidFill>
-          <a:ln>
-            <a:noFill/>
-          </a:ln>
-          <a:effectLst/>
-        </p:spPr>
-        <p:style>
-          <a:lnRef idx="1">
-            <a:schemeClr val="accent1"/>
-          </a:lnRef>
-          <a:fillRef idx="3">
-            <a:schemeClr val="accent1"/>
-          </a:fillRef>
-          <a:effectRef idx="2">
-            <a:schemeClr val="accent1"/>
-          </a:effectRef>
-          <a:fontRef idx="minor">
-            <a:schemeClr val="lt1"/>
-          </a:fontRef>
-        </p:style>
-        <p:txBody>
-          <a:bodyPr rtlCol="0" anchor="ctr"/>
-          <a:lstStyle/>
-          <a:p>
-            <a:pPr algn="ctr"/>
-          </a:p>
-        </p:txBody>
-      </p:sp>
-      <p:sp>
-        <p:nvSpPr>
-          <p:cNvPr id="12" name="TextBox 11"/>
-          <p:cNvSpPr txBox="1"/>
-          <p:nvPr/>
-        </p:nvSpPr>
-        <p:spPr>
-          <a:xfrm>
-            <a:off x="1097280" y="5897880"/>
-            <a:ext cx="10058400" cy="502920"/>
-          </a:xfrm>
-          <a:prstGeom prst="rect">
-            <a:avLst/>
-          </a:prstGeom>
-          <a:noFill/>
-        </p:spPr>
-        <p:txBody>
-          <a:bodyPr wrap="square" anchor="ctr" lIns="0" rIns="0" tIns="0" bIns="0">
-            <a:spAutoFit/>
-          </a:bodyPr>
-          <a:lstStyle/>
-          <a:p>
-            <a:pPr algn="l">
-              <a:spcBef>
-                <a:spcPts val="0"/>
-              </a:spcBef>
-              <a:spcAft>
-                <a:spcPts val="600"/>
-              </a:spcAft>
-            </a:pPr>
-            <a:r>
-              <a:rPr sz="1500" b="1">
-                <a:solidFill>
-                  <a:srgbClr val="7A5C1E"/>
-                </a:solidFill>
-                <a:latin typeface="Microsoft YaHei"/>
-              </a:rPr>
-              <a:t>⚠ 避坑：</a:t>
-            </a:r>
-            <a:r>
-              <a:rPr sz="1500" b="0">
-                <a:solidFill>
-                  <a:srgbClr val="6B6459"/>
-                </a:solidFill>
-                <a:latin typeface="Microsoft YaHei"/>
-              </a:rPr>
-              <a:t>最关键是你自己写过的笔记——这是让 AI 学你说话方式的根。</a:t>
-            </a:r>
-          </a:p>
-        </p:txBody>
-      </p:sp>
+        </p:spPr>
+      </p:pic>
     </p:spTree>
   </p:cSld>
   <p:clrMapOvr>
@@ -7012,8 +7805,8 @@
         </p:nvSpPr>
         <p:spPr>
           <a:xfrm>
-            <a:off x="822960" y="502920"/>
-            <a:ext cx="1280160" cy="1280160"/>
+            <a:off x="640080" y="457200"/>
+            <a:ext cx="1143000" cy="1143000"/>
           </a:xfrm>
           <a:prstGeom prst="roundRect">
             <a:avLst/>
@@ -7056,8 +7849,8 @@
         </p:nvSpPr>
         <p:spPr>
           <a:xfrm>
-            <a:off x="822960" y="502920"/>
-            <a:ext cx="1280160" cy="1280160"/>
+            <a:off x="640080" y="457200"/>
+            <a:ext cx="1143000" cy="1143000"/>
           </a:xfrm>
           <a:prstGeom prst="rect">
             <a:avLst/>
@@ -7079,7 +7872,7 @@
               </a:spcAft>
             </a:pPr>
             <a:r>
-              <a:rPr sz="1200" b="1">
+              <a:rPr sz="1100" b="1">
                 <a:solidFill>
                   <a:srgbClr val="E6CF8E"/>
                 </a:solidFill>
@@ -7098,7 +7891,7 @@
               </a:spcAft>
             </a:pPr>
             <a:r>
-              <a:rPr sz="4000" b="1">
+              <a:rPr sz="3400" b="1">
                 <a:solidFill>
                   <a:srgbClr val="FFFFFF"/>
                 </a:solidFill>
@@ -7117,8 +7910,8 @@
         </p:nvSpPr>
         <p:spPr>
           <a:xfrm>
-            <a:off x="2286000" y="548640"/>
-            <a:ext cx="9144000" cy="411480"/>
+            <a:off x="1920240" y="502920"/>
+            <a:ext cx="9144000" cy="365760"/>
           </a:xfrm>
           <a:prstGeom prst="rect">
             <a:avLst/>
@@ -7140,7 +7933,7 @@
               </a:spcAft>
             </a:pPr>
             <a:r>
-              <a:rPr sz="1400" b="1">
+              <a:rPr sz="1300" b="1">
                 <a:solidFill>
                   <a:srgbClr val="7A5C1E"/>
                 </a:solidFill>
@@ -7159,8 +7952,8 @@
         </p:nvSpPr>
         <p:spPr>
           <a:xfrm>
-            <a:off x="2286000" y="932688"/>
-            <a:ext cx="9326880" cy="822960"/>
+            <a:off x="1920240" y="868680"/>
+            <a:ext cx="9875520" cy="731520"/>
           </a:xfrm>
           <a:prstGeom prst="rect">
             <a:avLst/>
@@ -7182,7 +7975,7 @@
               </a:spcAft>
             </a:pPr>
             <a:r>
-              <a:rPr sz="3000" b="1">
+              <a:rPr sz="2600" b="1">
                 <a:solidFill>
                   <a:srgbClr val="241D14"/>
                 </a:solidFill>
@@ -7201,8 +7994,349 @@
         </p:nvSpPr>
         <p:spPr>
           <a:xfrm>
-            <a:off x="822960" y="2103120"/>
-            <a:ext cx="10515600" cy="777240"/>
+            <a:off x="640080" y="1920240"/>
+            <a:ext cx="4297680" cy="658368"/>
+          </a:xfrm>
+          <a:prstGeom prst="roundRect">
+            <a:avLst/>
+          </a:prstGeom>
+          <a:solidFill>
+            <a:srgbClr val="FFFFFF"/>
+          </a:solidFill>
+          <a:ln w="13970">
+            <a:solidFill>
+              <a:srgbClr val="EADFC6"/>
+            </a:solidFill>
+          </a:ln>
+          <a:effectLst/>
+        </p:spPr>
+        <p:style>
+          <a:lnRef idx="1">
+            <a:schemeClr val="accent1"/>
+          </a:lnRef>
+          <a:fillRef idx="3">
+            <a:schemeClr val="accent1"/>
+          </a:fillRef>
+          <a:effectRef idx="2">
+            <a:schemeClr val="accent1"/>
+          </a:effectRef>
+          <a:fontRef idx="minor">
+            <a:schemeClr val="lt1"/>
+          </a:fontRef>
+        </p:style>
+        <p:txBody>
+          <a:bodyPr rtlCol="0" anchor="ctr"/>
+          <a:lstStyle/>
+          <a:p>
+            <a:pPr algn="ctr"/>
+          </a:p>
+        </p:txBody>
+      </p:sp>
+      <p:sp>
+        <p:nvSpPr>
+          <p:cNvPr id="8" name="TextBox 7"/>
+          <p:cNvSpPr txBox="1"/>
+          <p:nvPr/>
+        </p:nvSpPr>
+        <p:spPr>
+          <a:xfrm>
+            <a:off x="841248" y="2011680"/>
+            <a:ext cx="3931920" cy="475488"/>
+          </a:xfrm>
+          <a:prstGeom prst="rect">
+            <a:avLst/>
+          </a:prstGeom>
+          <a:noFill/>
+        </p:spPr>
+        <p:txBody>
+          <a:bodyPr wrap="square" anchor="ctr" lIns="0" rIns="0" tIns="0" bIns="0">
+            <a:spAutoFit/>
+          </a:bodyPr>
+          <a:lstStyle/>
+          <a:p>
+            <a:pPr algn="l">
+              <a:spcBef>
+                <a:spcPts val="0"/>
+              </a:spcBef>
+              <a:spcAft>
+                <a:spcPts val="600"/>
+              </a:spcAft>
+            </a:pPr>
+            <a:r>
+              <a:rPr sz="1300" b="1">
+                <a:solidFill>
+                  <a:srgbClr val="7A5C1E"/>
+                </a:solidFill>
+                <a:latin typeface="Microsoft YaHei"/>
+              </a:rPr>
+              <a:t>📍 位置：</a:t>
+            </a:r>
+            <a:r>
+              <a:rPr sz="1250" b="0">
+                <a:solidFill>
+                  <a:srgbClr val="241D14"/>
+                </a:solidFill>
+                <a:latin typeface="Microsoft YaHei"/>
+              </a:rPr>
+              <a:t>左栏第一张卡「基础人设」</a:t>
+            </a:r>
+          </a:p>
+        </p:txBody>
+      </p:sp>
+      <p:sp>
+        <p:nvSpPr>
+          <p:cNvPr id="9" name="TextBox 8"/>
+          <p:cNvSpPr txBox="1"/>
+          <p:nvPr/>
+        </p:nvSpPr>
+        <p:spPr>
+          <a:xfrm>
+            <a:off x="685800" y="2788920"/>
+            <a:ext cx="4297680" cy="365760"/>
+          </a:xfrm>
+          <a:prstGeom prst="rect">
+            <a:avLst/>
+          </a:prstGeom>
+          <a:noFill/>
+        </p:spPr>
+        <p:txBody>
+          <a:bodyPr wrap="square" anchor="t" lIns="0" rIns="0" tIns="0" bIns="0">
+            <a:spAutoFit/>
+          </a:bodyPr>
+          <a:lstStyle/>
+          <a:p>
+            <a:pPr algn="l">
+              <a:spcBef>
+                <a:spcPts val="0"/>
+              </a:spcBef>
+              <a:spcAft>
+                <a:spcPts val="600"/>
+              </a:spcAft>
+            </a:pPr>
+            <a:r>
+              <a:rPr sz="1600" b="1">
+                <a:solidFill>
+                  <a:srgbClr val="7A5C1E"/>
+                </a:solidFill>
+                <a:latin typeface="Microsoft YaHei"/>
+              </a:rPr>
+              <a:t>操作步骤</a:t>
+            </a:r>
+          </a:p>
+        </p:txBody>
+      </p:sp>
+      <p:sp>
+        <p:nvSpPr>
+          <p:cNvPr id="10" name="TextBox 9"/>
+          <p:cNvSpPr txBox="1"/>
+          <p:nvPr/>
+        </p:nvSpPr>
+        <p:spPr>
+          <a:xfrm>
+            <a:off x="777240" y="3200400"/>
+            <a:ext cx="4114800" cy="2377440"/>
+          </a:xfrm>
+          <a:prstGeom prst="rect">
+            <a:avLst/>
+          </a:prstGeom>
+          <a:noFill/>
+        </p:spPr>
+        <p:txBody>
+          <a:bodyPr wrap="square" anchor="t" lIns="0" rIns="0" tIns="0" bIns="0">
+            <a:spAutoFit/>
+          </a:bodyPr>
+          <a:lstStyle/>
+          <a:p>
+            <a:pPr algn="l">
+              <a:spcBef>
+                <a:spcPts val="0"/>
+              </a:spcBef>
+              <a:spcAft>
+                <a:spcPts val="800"/>
+              </a:spcAft>
+            </a:pPr>
+            <a:r>
+              <a:rPr sz="1600" b="1">
+                <a:solidFill>
+                  <a:srgbClr val="A5813A"/>
+                </a:solidFill>
+                <a:latin typeface="Microsoft YaHei"/>
+              </a:rPr>
+              <a:t>• </a:t>
+            </a:r>
+            <a:r>
+              <a:rPr sz="1550" b="0">
+                <a:solidFill>
+                  <a:srgbClr val="241D14"/>
+                </a:solidFill>
+                <a:latin typeface="Microsoft YaHei"/>
+              </a:rPr>
+              <a:t>手写：身份/定位、语气、方法论、边界</a:t>
+            </a:r>
+          </a:p>
+          <a:p>
+            <a:pPr algn="l">
+              <a:spcBef>
+                <a:spcPts val="0"/>
+              </a:spcBef>
+              <a:spcAft>
+                <a:spcPts val="800"/>
+              </a:spcAft>
+            </a:pPr>
+            <a:r>
+              <a:rPr sz="1600" b="1">
+                <a:solidFill>
+                  <a:srgbClr val="A5813A"/>
+                </a:solidFill>
+                <a:latin typeface="Microsoft YaHei"/>
+              </a:rPr>
+              <a:t>• </a:t>
+            </a:r>
+            <a:r>
+              <a:rPr sz="1550" b="0">
+                <a:solidFill>
+                  <a:srgbClr val="241D14"/>
+                </a:solidFill>
+                <a:latin typeface="Microsoft YaHei"/>
+              </a:rPr>
+              <a:t>推荐：先把笔记贴进 KB2/KB1</a:t>
+            </a:r>
+          </a:p>
+          <a:p>
+            <a:pPr algn="l">
+              <a:spcBef>
+                <a:spcPts val="0"/>
+              </a:spcBef>
+              <a:spcAft>
+                <a:spcPts val="800"/>
+              </a:spcAft>
+            </a:pPr>
+            <a:r>
+              <a:rPr sz="1600" b="1">
+                <a:solidFill>
+                  <a:srgbClr val="A5813A"/>
+                </a:solidFill>
+                <a:latin typeface="Microsoft YaHei"/>
+              </a:rPr>
+              <a:t>• </a:t>
+            </a:r>
+            <a:r>
+              <a:rPr sz="1550" b="0">
+                <a:solidFill>
+                  <a:srgbClr val="241D14"/>
+                </a:solidFill>
+                <a:latin typeface="Microsoft YaHei"/>
+              </a:rPr>
+              <a:t>点「✨据我的笔记一键生成」→ AI 语气克隆+方法论提取</a:t>
+            </a:r>
+          </a:p>
+        </p:txBody>
+      </p:sp>
+      <p:sp>
+        <p:nvSpPr>
+          <p:cNvPr id="11" name="Rounded Rectangle 10"/>
+          <p:cNvSpPr/>
+          <p:nvPr/>
+        </p:nvSpPr>
+        <p:spPr>
+          <a:xfrm>
+            <a:off x="640080" y="5806440"/>
+            <a:ext cx="4297680" cy="731520"/>
+          </a:xfrm>
+          <a:prstGeom prst="roundRect">
+            <a:avLst/>
+          </a:prstGeom>
+          <a:solidFill>
+            <a:srgbClr val="F6EEDA"/>
+          </a:solidFill>
+          <a:ln>
+            <a:noFill/>
+          </a:ln>
+          <a:effectLst/>
+        </p:spPr>
+        <p:style>
+          <a:lnRef idx="1">
+            <a:schemeClr val="accent1"/>
+          </a:lnRef>
+          <a:fillRef idx="3">
+            <a:schemeClr val="accent1"/>
+          </a:fillRef>
+          <a:effectRef idx="2">
+            <a:schemeClr val="accent1"/>
+          </a:effectRef>
+          <a:fontRef idx="minor">
+            <a:schemeClr val="lt1"/>
+          </a:fontRef>
+        </p:style>
+        <p:txBody>
+          <a:bodyPr rtlCol="0" anchor="ctr"/>
+          <a:lstStyle/>
+          <a:p>
+            <a:pPr algn="ctr"/>
+          </a:p>
+        </p:txBody>
+      </p:sp>
+      <p:sp>
+        <p:nvSpPr>
+          <p:cNvPr id="12" name="TextBox 11"/>
+          <p:cNvSpPr txBox="1"/>
+          <p:nvPr/>
+        </p:nvSpPr>
+        <p:spPr>
+          <a:xfrm>
+            <a:off x="841248" y="5897880"/>
+            <a:ext cx="3931920" cy="548640"/>
+          </a:xfrm>
+          <a:prstGeom prst="rect">
+            <a:avLst/>
+          </a:prstGeom>
+          <a:noFill/>
+        </p:spPr>
+        <p:txBody>
+          <a:bodyPr wrap="square" anchor="ctr" lIns="0" rIns="0" tIns="0" bIns="0">
+            <a:spAutoFit/>
+          </a:bodyPr>
+          <a:lstStyle/>
+          <a:p>
+            <a:pPr algn="l">
+              <a:spcBef>
+                <a:spcPts val="0"/>
+              </a:spcBef>
+              <a:spcAft>
+                <a:spcPts val="600"/>
+              </a:spcAft>
+            </a:pPr>
+            <a:r>
+              <a:rPr sz="1300" b="1">
+                <a:solidFill>
+                  <a:srgbClr val="7A5C1E"/>
+                </a:solidFill>
+                <a:latin typeface="Microsoft YaHei"/>
+              </a:rPr>
+              <a:t>⚠ </a:t>
+            </a:r>
+            <a:r>
+              <a:rPr sz="1250" b="0">
+                <a:solidFill>
+                  <a:srgbClr val="6B6459"/>
+                </a:solidFill>
+                <a:latin typeface="Microsoft YaHei"/>
+              </a:rPr>
+              <a:t>一键生成前 KB2 或 KB1 必须先有内容，否则会提示先粘贴/上传。</a:t>
+            </a:r>
+          </a:p>
+        </p:txBody>
+      </p:sp>
+      <p:sp>
+        <p:nvSpPr>
+          <p:cNvPr id="13" name="Rounded Rectangle 12"/>
+          <p:cNvSpPr/>
+          <p:nvPr/>
+        </p:nvSpPr>
+        <p:spPr>
+          <a:xfrm>
+            <a:off x="5111640" y="2965917"/>
+            <a:ext cx="6510240" cy="2526365"/>
           </a:xfrm>
           <a:prstGeom prst="roundRect">
             <a:avLst/>
@@ -7239,301 +8373,30 @@
           </a:p>
         </p:txBody>
       </p:sp>
-      <p:sp>
-        <p:nvSpPr>
-          <p:cNvPr id="8" name="TextBox 7"/>
-          <p:cNvSpPr txBox="1"/>
-          <p:nvPr/>
-        </p:nvSpPr>
-        <p:spPr>
-          <a:xfrm>
-            <a:off x="1097280" y="2212848"/>
-            <a:ext cx="10058400" cy="548640"/>
+      <p:pic>
+        <p:nvPicPr>
+          <p:cNvPr id="14" name="Picture 13" descr="sc_persona.png"/>
+          <p:cNvPicPr>
+            <a:picLocks noChangeAspect="1"/>
+          </p:cNvPicPr>
+          <p:nvPr/>
+        </p:nvPicPr>
+        <p:blipFill>
+          <a:blip r:embed="rId2"/>
+          <a:stretch>
+            <a:fillRect/>
+          </a:stretch>
+        </p:blipFill>
+        <p:spPr>
+          <a:xfrm>
+            <a:off x="5120640" y="2974917"/>
+            <a:ext cx="6492240" cy="2508365"/>
           </a:xfrm>
           <a:prstGeom prst="rect">
             <a:avLst/>
           </a:prstGeom>
-          <a:noFill/>
-        </p:spPr>
-        <p:txBody>
-          <a:bodyPr wrap="square" anchor="ctr" lIns="0" rIns="0" tIns="0" bIns="0">
-            <a:spAutoFit/>
-          </a:bodyPr>
-          <a:lstStyle/>
-          <a:p>
-            <a:pPr algn="l">
-              <a:spcBef>
-                <a:spcPts val="0"/>
-              </a:spcBef>
-              <a:spcAft>
-                <a:spcPts val="600"/>
-              </a:spcAft>
-            </a:pPr>
-            <a:r>
-              <a:rPr sz="1700" b="1">
-                <a:solidFill>
-                  <a:srgbClr val="7A5C1E"/>
-                </a:solidFill>
-                <a:latin typeface="Microsoft YaHei"/>
-              </a:rPr>
-              <a:t>📍 界面位置：</a:t>
-            </a:r>
-            <a:r>
-              <a:rPr sz="1700" b="0">
-                <a:solidFill>
-                  <a:srgbClr val="241D14"/>
-                </a:solidFill>
-                <a:latin typeface="Microsoft YaHei"/>
-              </a:rPr>
-              <a:t>左栏第一张卡「基础人设」</a:t>
-            </a:r>
-          </a:p>
-        </p:txBody>
-      </p:sp>
-      <p:sp>
-        <p:nvSpPr>
-          <p:cNvPr id="9" name="TextBox 8"/>
-          <p:cNvSpPr txBox="1"/>
-          <p:nvPr/>
-        </p:nvSpPr>
-        <p:spPr>
-          <a:xfrm>
-            <a:off x="914400" y="3063240"/>
-            <a:ext cx="10332720" cy="457200"/>
-          </a:xfrm>
-          <a:prstGeom prst="rect">
-            <a:avLst/>
-          </a:prstGeom>
-          <a:noFill/>
-        </p:spPr>
-        <p:txBody>
-          <a:bodyPr wrap="square" anchor="t" lIns="0" rIns="0" tIns="0" bIns="0">
-            <a:spAutoFit/>
-          </a:bodyPr>
-          <a:lstStyle/>
-          <a:p>
-            <a:pPr algn="l">
-              <a:spcBef>
-                <a:spcPts val="0"/>
-              </a:spcBef>
-              <a:spcAft>
-                <a:spcPts val="600"/>
-              </a:spcAft>
-            </a:pPr>
-            <a:r>
-              <a:rPr sz="1800" b="1">
-                <a:solidFill>
-                  <a:srgbClr val="7A5C1E"/>
-                </a:solidFill>
-                <a:latin typeface="Microsoft YaHei"/>
-              </a:rPr>
-              <a:t>操作步骤</a:t>
-            </a:r>
-          </a:p>
-        </p:txBody>
-      </p:sp>
-      <p:sp>
-        <p:nvSpPr>
-          <p:cNvPr id="10" name="TextBox 9"/>
-          <p:cNvSpPr txBox="1"/>
-          <p:nvPr/>
-        </p:nvSpPr>
-        <p:spPr>
-          <a:xfrm>
-            <a:off x="1051560" y="3520440"/>
-            <a:ext cx="10149840" cy="2194560"/>
-          </a:xfrm>
-          <a:prstGeom prst="rect">
-            <a:avLst/>
-          </a:prstGeom>
-          <a:noFill/>
-        </p:spPr>
-        <p:txBody>
-          <a:bodyPr wrap="square" anchor="t" lIns="0" rIns="0" tIns="0" bIns="0">
-            <a:spAutoFit/>
-          </a:bodyPr>
-          <a:lstStyle/>
-          <a:p>
-            <a:pPr algn="l">
-              <a:spcBef>
-                <a:spcPts val="0"/>
-              </a:spcBef>
-              <a:spcAft>
-                <a:spcPts val="900"/>
-              </a:spcAft>
-            </a:pPr>
-            <a:r>
-              <a:rPr sz="1900" b="1">
-                <a:solidFill>
-                  <a:srgbClr val="A5813A"/>
-                </a:solidFill>
-                <a:latin typeface="Microsoft YaHei"/>
-              </a:rPr>
-              <a:t>• </a:t>
-            </a:r>
-            <a:r>
-              <a:rPr sz="1900" b="0">
-                <a:solidFill>
-                  <a:srgbClr val="241D14"/>
-                </a:solidFill>
-                <a:latin typeface="Microsoft YaHei"/>
-              </a:rPr>
-              <a:t>手写：身份/定位、语气、选题方法论、边界</a:t>
-            </a:r>
-          </a:p>
-          <a:p>
-            <a:pPr algn="l">
-              <a:spcBef>
-                <a:spcPts val="0"/>
-              </a:spcBef>
-              <a:spcAft>
-                <a:spcPts val="900"/>
-              </a:spcAft>
-            </a:pPr>
-            <a:r>
-              <a:rPr sz="1900" b="1">
-                <a:solidFill>
-                  <a:srgbClr val="A5813A"/>
-                </a:solidFill>
-                <a:latin typeface="Microsoft YaHei"/>
-              </a:rPr>
-              <a:t>• </a:t>
-            </a:r>
-            <a:r>
-              <a:rPr sz="1900" b="0">
-                <a:solidFill>
-                  <a:srgbClr val="241D14"/>
-                </a:solidFill>
-                <a:latin typeface="Microsoft YaHei"/>
-              </a:rPr>
-              <a:t>一键生成(推荐)：先把笔记贴进 KB2/KB1 → 点「✨据我的笔记一键生成」</a:t>
-            </a:r>
-          </a:p>
-          <a:p>
-            <a:pPr algn="l">
-              <a:spcBef>
-                <a:spcPts val="0"/>
-              </a:spcBef>
-              <a:spcAft>
-                <a:spcPts val="900"/>
-              </a:spcAft>
-            </a:pPr>
-            <a:r>
-              <a:rPr sz="1900" b="1">
-                <a:solidFill>
-                  <a:srgbClr val="A5813A"/>
-                </a:solidFill>
-                <a:latin typeface="Microsoft YaHei"/>
-              </a:rPr>
-              <a:t>• </a:t>
-            </a:r>
-            <a:r>
-              <a:rPr sz="1900" b="0">
-                <a:solidFill>
-                  <a:srgbClr val="241D14"/>
-                </a:solidFill>
-                <a:latin typeface="Microsoft YaHei"/>
-              </a:rPr>
-              <a:t>AI 做 语气克隆 + 方法论提取，生成后可再改</a:t>
-            </a:r>
-          </a:p>
-        </p:txBody>
-      </p:sp>
-      <p:sp>
-        <p:nvSpPr>
-          <p:cNvPr id="11" name="Rounded Rectangle 10"/>
-          <p:cNvSpPr/>
-          <p:nvPr/>
-        </p:nvSpPr>
-        <p:spPr>
-          <a:xfrm>
-            <a:off x="822960" y="5806440"/>
-            <a:ext cx="10515600" cy="685800"/>
-          </a:xfrm>
-          <a:prstGeom prst="roundRect">
-            <a:avLst/>
-          </a:prstGeom>
-          <a:solidFill>
-            <a:srgbClr val="F6EEDA"/>
-          </a:solidFill>
-          <a:ln>
-            <a:noFill/>
-          </a:ln>
-          <a:effectLst/>
-        </p:spPr>
-        <p:style>
-          <a:lnRef idx="1">
-            <a:schemeClr val="accent1"/>
-          </a:lnRef>
-          <a:fillRef idx="3">
-            <a:schemeClr val="accent1"/>
-          </a:fillRef>
-          <a:effectRef idx="2">
-            <a:schemeClr val="accent1"/>
-          </a:effectRef>
-          <a:fontRef idx="minor">
-            <a:schemeClr val="lt1"/>
-          </a:fontRef>
-        </p:style>
-        <p:txBody>
-          <a:bodyPr rtlCol="0" anchor="ctr"/>
-          <a:lstStyle/>
-          <a:p>
-            <a:pPr algn="ctr"/>
-          </a:p>
-        </p:txBody>
-      </p:sp>
-      <p:sp>
-        <p:nvSpPr>
-          <p:cNvPr id="12" name="TextBox 11"/>
-          <p:cNvSpPr txBox="1"/>
-          <p:nvPr/>
-        </p:nvSpPr>
-        <p:spPr>
-          <a:xfrm>
-            <a:off x="1097280" y="5897880"/>
-            <a:ext cx="10058400" cy="502920"/>
-          </a:xfrm>
-          <a:prstGeom prst="rect">
-            <a:avLst/>
-          </a:prstGeom>
-          <a:noFill/>
-        </p:spPr>
-        <p:txBody>
-          <a:bodyPr wrap="square" anchor="ctr" lIns="0" rIns="0" tIns="0" bIns="0">
-            <a:spAutoFit/>
-          </a:bodyPr>
-          <a:lstStyle/>
-          <a:p>
-            <a:pPr algn="l">
-              <a:spcBef>
-                <a:spcPts val="0"/>
-              </a:spcBef>
-              <a:spcAft>
-                <a:spcPts val="600"/>
-              </a:spcAft>
-            </a:pPr>
-            <a:r>
-              <a:rPr sz="1500" b="1">
-                <a:solidFill>
-                  <a:srgbClr val="7A5C1E"/>
-                </a:solidFill>
-                <a:latin typeface="Microsoft YaHei"/>
-              </a:rPr>
-              <a:t>⚠ 避坑：</a:t>
-            </a:r>
-            <a:r>
-              <a:rPr sz="1500" b="0">
-                <a:solidFill>
-                  <a:srgbClr val="6B6459"/>
-                </a:solidFill>
-                <a:latin typeface="Microsoft YaHei"/>
-              </a:rPr>
-              <a:t>一键生成前 KB2 或 KB1 必须先有内容，否则会提示先粘贴/上传。</a:t>
-            </a:r>
-          </a:p>
-        </p:txBody>
-      </p:sp>
+        </p:spPr>
+      </p:pic>
     </p:spTree>
   </p:cSld>
   <p:clrMapOvr>
@@ -7612,8 +8475,8 @@
         </p:nvSpPr>
         <p:spPr>
           <a:xfrm>
-            <a:off x="822960" y="502920"/>
-            <a:ext cx="1280160" cy="1280160"/>
+            <a:off x="640080" y="457200"/>
+            <a:ext cx="1143000" cy="1143000"/>
           </a:xfrm>
           <a:prstGeom prst="roundRect">
             <a:avLst/>
@@ -7656,8 +8519,8 @@
         </p:nvSpPr>
         <p:spPr>
           <a:xfrm>
-            <a:off x="822960" y="502920"/>
-            <a:ext cx="1280160" cy="1280160"/>
+            <a:off x="640080" y="457200"/>
+            <a:ext cx="1143000" cy="1143000"/>
           </a:xfrm>
           <a:prstGeom prst="rect">
             <a:avLst/>
@@ -7679,7 +8542,7 @@
               </a:spcAft>
             </a:pPr>
             <a:r>
-              <a:rPr sz="1200" b="1">
+              <a:rPr sz="1100" b="1">
                 <a:solidFill>
                   <a:srgbClr val="E6CF8E"/>
                 </a:solidFill>
@@ -7698,7 +8561,7 @@
               </a:spcAft>
             </a:pPr>
             <a:r>
-              <a:rPr sz="4000" b="1">
+              <a:rPr sz="3400" b="1">
                 <a:solidFill>
                   <a:srgbClr val="FFFFFF"/>
                 </a:solidFill>
@@ -7717,8 +8580,8 @@
         </p:nvSpPr>
         <p:spPr>
           <a:xfrm>
-            <a:off x="2286000" y="548640"/>
-            <a:ext cx="9144000" cy="411480"/>
+            <a:off x="1920240" y="502920"/>
+            <a:ext cx="9144000" cy="365760"/>
           </a:xfrm>
           <a:prstGeom prst="rect">
             <a:avLst/>
@@ -7740,7 +8603,7 @@
               </a:spcAft>
             </a:pPr>
             <a:r>
-              <a:rPr sz="1400" b="1">
+              <a:rPr sz="1300" b="1">
                 <a:solidFill>
                   <a:srgbClr val="7A5C1E"/>
                 </a:solidFill>
@@ -7759,8 +8622,8 @@
         </p:nvSpPr>
         <p:spPr>
           <a:xfrm>
-            <a:off x="2286000" y="932688"/>
-            <a:ext cx="9326880" cy="822960"/>
+            <a:off x="1920240" y="868680"/>
+            <a:ext cx="9875520" cy="731520"/>
           </a:xfrm>
           <a:prstGeom prst="rect">
             <a:avLst/>
@@ -7782,7 +8645,7 @@
               </a:spcAft>
             </a:pPr>
             <a:r>
-              <a:rPr sz="3000" b="1">
+              <a:rPr sz="2600" b="1">
                 <a:solidFill>
                   <a:srgbClr val="241D14"/>
                 </a:solidFill>
@@ -7801,14 +8664,316 @@
         </p:nvSpPr>
         <p:spPr>
           <a:xfrm>
-            <a:off x="822960" y="2148840"/>
-            <a:ext cx="3017520" cy="841248"/>
+            <a:off x="640080" y="1920240"/>
+            <a:ext cx="4297680" cy="658368"/>
           </a:xfrm>
           <a:prstGeom prst="roundRect">
             <a:avLst/>
           </a:prstGeom>
           <a:solidFill>
-            <a:srgbClr val="A5813A"/>
+            <a:srgbClr val="FFFFFF"/>
+          </a:solidFill>
+          <a:ln w="13970">
+            <a:solidFill>
+              <a:srgbClr val="EADFC6"/>
+            </a:solidFill>
+          </a:ln>
+          <a:effectLst/>
+        </p:spPr>
+        <p:style>
+          <a:lnRef idx="1">
+            <a:schemeClr val="accent1"/>
+          </a:lnRef>
+          <a:fillRef idx="3">
+            <a:schemeClr val="accent1"/>
+          </a:fillRef>
+          <a:effectRef idx="2">
+            <a:schemeClr val="accent1"/>
+          </a:effectRef>
+          <a:fontRef idx="minor">
+            <a:schemeClr val="lt1"/>
+          </a:fontRef>
+        </p:style>
+        <p:txBody>
+          <a:bodyPr rtlCol="0" anchor="ctr"/>
+          <a:lstStyle/>
+          <a:p>
+            <a:pPr algn="ctr"/>
+          </a:p>
+        </p:txBody>
+      </p:sp>
+      <p:sp>
+        <p:nvSpPr>
+          <p:cNvPr id="8" name="TextBox 7"/>
+          <p:cNvSpPr txBox="1"/>
+          <p:nvPr/>
+        </p:nvSpPr>
+        <p:spPr>
+          <a:xfrm>
+            <a:off x="841248" y="2011680"/>
+            <a:ext cx="3931920" cy="475488"/>
+          </a:xfrm>
+          <a:prstGeom prst="rect">
+            <a:avLst/>
+          </a:prstGeom>
+          <a:noFill/>
+        </p:spPr>
+        <p:txBody>
+          <a:bodyPr wrap="square" anchor="ctr" lIns="0" rIns="0" tIns="0" bIns="0">
+            <a:spAutoFit/>
+          </a:bodyPr>
+          <a:lstStyle/>
+          <a:p>
+            <a:pPr algn="l">
+              <a:spcBef>
+                <a:spcPts val="0"/>
+              </a:spcBef>
+              <a:spcAft>
+                <a:spcPts val="600"/>
+              </a:spcAft>
+            </a:pPr>
+            <a:r>
+              <a:rPr sz="1300" b="1">
+                <a:solidFill>
+                  <a:srgbClr val="7A5C1E"/>
+                </a:solidFill>
+                <a:latin typeface="Microsoft YaHei"/>
+              </a:rPr>
+              <a:t>📍 位置：</a:t>
+            </a:r>
+            <a:r>
+              <a:rPr sz="1250" b="0">
+                <a:solidFill>
+                  <a:srgbClr val="241D14"/>
+                </a:solidFill>
+                <a:latin typeface="Microsoft YaHei"/>
+              </a:rPr>
+              <a:t>左栏「专属知识库」卡（四格）</a:t>
+            </a:r>
+          </a:p>
+        </p:txBody>
+      </p:sp>
+      <p:sp>
+        <p:nvSpPr>
+          <p:cNvPr id="9" name="TextBox 8"/>
+          <p:cNvSpPr txBox="1"/>
+          <p:nvPr/>
+        </p:nvSpPr>
+        <p:spPr>
+          <a:xfrm>
+            <a:off x="685800" y="2788920"/>
+            <a:ext cx="4297680" cy="365760"/>
+          </a:xfrm>
+          <a:prstGeom prst="rect">
+            <a:avLst/>
+          </a:prstGeom>
+          <a:noFill/>
+        </p:spPr>
+        <p:txBody>
+          <a:bodyPr wrap="square" anchor="t" lIns="0" rIns="0" tIns="0" bIns="0">
+            <a:spAutoFit/>
+          </a:bodyPr>
+          <a:lstStyle/>
+          <a:p>
+            <a:pPr algn="l">
+              <a:spcBef>
+                <a:spcPts val="0"/>
+              </a:spcBef>
+              <a:spcAft>
+                <a:spcPts val="600"/>
+              </a:spcAft>
+            </a:pPr>
+            <a:r>
+              <a:rPr sz="1600" b="1">
+                <a:solidFill>
+                  <a:srgbClr val="7A5C1E"/>
+                </a:solidFill>
+                <a:latin typeface="Microsoft YaHei"/>
+              </a:rPr>
+              <a:t>操作步骤</a:t>
+            </a:r>
+          </a:p>
+        </p:txBody>
+      </p:sp>
+      <p:sp>
+        <p:nvSpPr>
+          <p:cNvPr id="10" name="TextBox 9"/>
+          <p:cNvSpPr txBox="1"/>
+          <p:nvPr/>
+        </p:nvSpPr>
+        <p:spPr>
+          <a:xfrm>
+            <a:off x="777240" y="3200400"/>
+            <a:ext cx="4114800" cy="2377440"/>
+          </a:xfrm>
+          <a:prstGeom prst="rect">
+            <a:avLst/>
+          </a:prstGeom>
+          <a:noFill/>
+        </p:spPr>
+        <p:txBody>
+          <a:bodyPr wrap="square" anchor="t" lIns="0" rIns="0" tIns="0" bIns="0">
+            <a:spAutoFit/>
+          </a:bodyPr>
+          <a:lstStyle/>
+          <a:p>
+            <a:pPr algn="l">
+              <a:spcBef>
+                <a:spcPts val="0"/>
+              </a:spcBef>
+              <a:spcAft>
+                <a:spcPts val="800"/>
+              </a:spcAft>
+            </a:pPr>
+            <a:r>
+              <a:rPr sz="1600" b="1">
+                <a:solidFill>
+                  <a:srgbClr val="A5813A"/>
+                </a:solidFill>
+                <a:latin typeface="Microsoft YaHei"/>
+              </a:rPr>
+              <a:t>• </a:t>
+            </a:r>
+            <a:r>
+              <a:rPr sz="1550" b="0">
+                <a:solidFill>
+                  <a:srgbClr val="241D14"/>
+                </a:solidFill>
+                <a:latin typeface="Microsoft YaHei"/>
+              </a:rPr>
+              <a:t>KB1 账号人设资料：你是谁</a:t>
+            </a:r>
+          </a:p>
+          <a:p>
+            <a:pPr algn="l">
+              <a:spcBef>
+                <a:spcPts val="0"/>
+              </a:spcBef>
+              <a:spcAft>
+                <a:spcPts val="800"/>
+              </a:spcAft>
+            </a:pPr>
+            <a:r>
+              <a:rPr sz="1600" b="1">
+                <a:solidFill>
+                  <a:srgbClr val="A5813A"/>
+                </a:solidFill>
+                <a:latin typeface="Microsoft YaHei"/>
+              </a:rPr>
+              <a:t>• </a:t>
+            </a:r>
+            <a:r>
+              <a:rPr sz="1550" b="0">
+                <a:solidFill>
+                  <a:srgbClr val="241D14"/>
+                </a:solidFill>
+                <a:latin typeface="Microsoft YaHei"/>
+              </a:rPr>
+              <a:t>KB3 行业知识/事实：你懂什么真信息</a:t>
+            </a:r>
+          </a:p>
+          <a:p>
+            <a:pPr algn="l">
+              <a:spcBef>
+                <a:spcPts val="0"/>
+              </a:spcBef>
+              <a:spcAft>
+                <a:spcPts val="800"/>
+              </a:spcAft>
+            </a:pPr>
+            <a:r>
+              <a:rPr sz="1600" b="1">
+                <a:solidFill>
+                  <a:srgbClr val="A5813A"/>
+                </a:solidFill>
+                <a:latin typeface="Microsoft YaHei"/>
+              </a:rPr>
+              <a:t>• </a:t>
+            </a:r>
+            <a:r>
+              <a:rPr sz="1550" b="0">
+                <a:solidFill>
+                  <a:srgbClr val="241D14"/>
+                </a:solidFill>
+                <a:latin typeface="Microsoft YaHei"/>
+              </a:rPr>
+              <a:t>KB2 本人爆文样本：你怎么说话（只学不抄）</a:t>
+            </a:r>
+          </a:p>
+          <a:p>
+            <a:pPr algn="l">
+              <a:spcBef>
+                <a:spcPts val="0"/>
+              </a:spcBef>
+              <a:spcAft>
+                <a:spcPts val="800"/>
+              </a:spcAft>
+            </a:pPr>
+            <a:r>
+              <a:rPr sz="1600" b="1">
+                <a:solidFill>
+                  <a:srgbClr val="A5813A"/>
+                </a:solidFill>
+                <a:latin typeface="Microsoft YaHei"/>
+              </a:rPr>
+              <a:t>• </a:t>
+            </a:r>
+            <a:r>
+              <a:rPr sz="1550" b="0">
+                <a:solidFill>
+                  <a:srgbClr val="241D14"/>
+                </a:solidFill>
+                <a:latin typeface="Microsoft YaHei"/>
+              </a:rPr>
+              <a:t>KB4 额外违禁/红线：你不能说什么</a:t>
+            </a:r>
+          </a:p>
+          <a:p>
+            <a:pPr algn="l">
+              <a:spcBef>
+                <a:spcPts val="0"/>
+              </a:spcBef>
+              <a:spcAft>
+                <a:spcPts val="800"/>
+              </a:spcAft>
+            </a:pPr>
+            <a:r>
+              <a:rPr sz="1600" b="1">
+                <a:solidFill>
+                  <a:srgbClr val="A5813A"/>
+                </a:solidFill>
+                <a:latin typeface="Microsoft YaHei"/>
+              </a:rPr>
+              <a:t>• </a:t>
+            </a:r>
+            <a:r>
+              <a:rPr sz="1550" b="0">
+                <a:solidFill>
+                  <a:srgbClr val="241D14"/>
+                </a:solidFill>
+                <a:latin typeface="Microsoft YaHei"/>
+              </a:rPr>
+              <a:t>每格可粘贴文字或 📎上传文件</a:t>
+            </a:r>
+          </a:p>
+        </p:txBody>
+      </p:sp>
+      <p:sp>
+        <p:nvSpPr>
+          <p:cNvPr id="11" name="Rounded Rectangle 10"/>
+          <p:cNvSpPr/>
+          <p:nvPr/>
+        </p:nvSpPr>
+        <p:spPr>
+          <a:xfrm>
+            <a:off x="640080" y="5806440"/>
+            <a:ext cx="4297680" cy="731520"/>
+          </a:xfrm>
+          <a:prstGeom prst="roundRect">
+            <a:avLst/>
+          </a:prstGeom>
+          <a:solidFill>
+            <a:srgbClr val="F6EEDA"/>
           </a:solidFill>
           <a:ln>
             <a:noFill/>
@@ -7839,23 +9004,76 @@
       </p:sp>
       <p:sp>
         <p:nvSpPr>
-          <p:cNvPr id="8" name="Rounded Rectangle 7"/>
+          <p:cNvPr id="12" name="TextBox 11"/>
+          <p:cNvSpPr txBox="1"/>
+          <p:nvPr/>
+        </p:nvSpPr>
+        <p:spPr>
+          <a:xfrm>
+            <a:off x="841248" y="5897880"/>
+            <a:ext cx="3931920" cy="548640"/>
+          </a:xfrm>
+          <a:prstGeom prst="rect">
+            <a:avLst/>
+          </a:prstGeom>
+          <a:noFill/>
+        </p:spPr>
+        <p:txBody>
+          <a:bodyPr wrap="square" anchor="ctr" lIns="0" rIns="0" tIns="0" bIns="0">
+            <a:spAutoFit/>
+          </a:bodyPr>
+          <a:lstStyle/>
+          <a:p>
+            <a:pPr algn="l">
+              <a:spcBef>
+                <a:spcPts val="0"/>
+              </a:spcBef>
+              <a:spcAft>
+                <a:spcPts val="600"/>
+              </a:spcAft>
+            </a:pPr>
+            <a:r>
+              <a:rPr sz="1300" b="1">
+                <a:solidFill>
+                  <a:srgbClr val="7A5C1E"/>
+                </a:solidFill>
+                <a:latin typeface="Microsoft YaHei"/>
+              </a:rPr>
+              <a:t>⚠ </a:t>
+            </a:r>
+            <a:r>
+              <a:rPr sz="1250" b="0">
+                <a:solidFill>
+                  <a:srgbClr val="6B6459"/>
+                </a:solidFill>
+                <a:latin typeface="Microsoft YaHei"/>
+              </a:rPr>
+              <a:t>右上角实时显示「X文件·约X字」；KB2 只学语气不照抄，不确定信息标「需核实」。</a:t>
+            </a:r>
+          </a:p>
+        </p:txBody>
+      </p:sp>
+      <p:sp>
+        <p:nvSpPr>
+          <p:cNvPr id="13" name="Rounded Rectangle 12"/>
           <p:cNvSpPr/>
           <p:nvPr/>
         </p:nvSpPr>
         <p:spPr>
           <a:xfrm>
-            <a:off x="3886200" y="2148840"/>
-            <a:ext cx="3291840" cy="841248"/>
+            <a:off x="5466992" y="1911240"/>
+            <a:ext cx="5799535" cy="4635720"/>
           </a:xfrm>
           <a:prstGeom prst="roundRect">
             <a:avLst/>
           </a:prstGeom>
           <a:solidFill>
-            <a:srgbClr val="A5813A"/>
+            <a:srgbClr val="FFFFFF"/>
           </a:solidFill>
-          <a:ln>
-            <a:noFill/>
+          <a:ln w="15240">
+            <a:solidFill>
+              <a:srgbClr val="EADFC6"/>
+            </a:solidFill>
           </a:ln>
           <a:effectLst/>
         </p:spPr>
@@ -7881,1274 +9099,30 @@
           </a:p>
         </p:txBody>
       </p:sp>
-      <p:sp>
-        <p:nvSpPr>
-          <p:cNvPr id="9" name="Rounded Rectangle 8"/>
-          <p:cNvSpPr/>
-          <p:nvPr/>
-        </p:nvSpPr>
-        <p:spPr>
-          <a:xfrm>
-            <a:off x="7223760" y="2148840"/>
-            <a:ext cx="4114800" cy="841248"/>
-          </a:xfrm>
-          <a:prstGeom prst="roundRect">
-            <a:avLst/>
-          </a:prstGeom>
-          <a:solidFill>
-            <a:srgbClr val="A5813A"/>
-          </a:solidFill>
-          <a:ln>
-            <a:noFill/>
-          </a:ln>
-          <a:effectLst/>
-        </p:spPr>
-        <p:style>
-          <a:lnRef idx="1">
-            <a:schemeClr val="accent1"/>
-          </a:lnRef>
-          <a:fillRef idx="3">
-            <a:schemeClr val="accent1"/>
-          </a:fillRef>
-          <a:effectRef idx="2">
-            <a:schemeClr val="accent1"/>
-          </a:effectRef>
-          <a:fontRef idx="minor">
-            <a:schemeClr val="lt1"/>
-          </a:fontRef>
-        </p:style>
-        <p:txBody>
-          <a:bodyPr rtlCol="0" anchor="ctr"/>
-          <a:lstStyle/>
-          <a:p>
-            <a:pPr algn="ctr"/>
-          </a:p>
-        </p:txBody>
-      </p:sp>
-      <p:sp>
-        <p:nvSpPr>
-          <p:cNvPr id="10" name="TextBox 9"/>
-          <p:cNvSpPr txBox="1"/>
-          <p:nvPr/>
-        </p:nvSpPr>
-        <p:spPr>
-          <a:xfrm>
-            <a:off x="822960" y="2148840"/>
-            <a:ext cx="3017520" cy="841248"/>
+      <p:pic>
+        <p:nvPicPr>
+          <p:cNvPr id="14" name="Picture 13" descr="sc_kb.png"/>
+          <p:cNvPicPr>
+            <a:picLocks noChangeAspect="1"/>
+          </p:cNvPicPr>
+          <p:nvPr/>
+        </p:nvPicPr>
+        <p:blipFill>
+          <a:blip r:embed="rId2"/>
+          <a:stretch>
+            <a:fillRect/>
+          </a:stretch>
+        </p:blipFill>
+        <p:spPr>
+          <a:xfrm>
+            <a:off x="5475992" y="1920240"/>
+            <a:ext cx="5781535" cy="4617720"/>
           </a:xfrm>
           <a:prstGeom prst="rect">
             <a:avLst/>
           </a:prstGeom>
-          <a:noFill/>
-        </p:spPr>
-        <p:txBody>
-          <a:bodyPr wrap="square" anchor="ctr" lIns="0" rIns="0" tIns="0" bIns="0">
-            <a:spAutoFit/>
-          </a:bodyPr>
-          <a:lstStyle/>
-          <a:p>
-            <a:pPr algn="ctr">
-              <a:spcBef>
-                <a:spcPts val="0"/>
-              </a:spcBef>
-              <a:spcAft>
-                <a:spcPts val="0"/>
-              </a:spcAft>
-            </a:pPr>
-            <a:r>
-              <a:rPr sz="1700" b="1">
-                <a:solidFill>
-                  <a:srgbClr val="FFFFFF"/>
-                </a:solidFill>
-                <a:latin typeface="Microsoft YaHei"/>
-              </a:rPr>
-              <a:t>栏目</a:t>
-            </a:r>
-          </a:p>
-        </p:txBody>
-      </p:sp>
-      <p:sp>
-        <p:nvSpPr>
-          <p:cNvPr id="11" name="TextBox 10"/>
-          <p:cNvSpPr txBox="1"/>
-          <p:nvPr/>
-        </p:nvSpPr>
-        <p:spPr>
-          <a:xfrm>
-            <a:off x="3886200" y="2148840"/>
-            <a:ext cx="3291840" cy="841248"/>
-          </a:xfrm>
-          <a:prstGeom prst="rect">
-            <a:avLst/>
-          </a:prstGeom>
-          <a:noFill/>
-        </p:spPr>
-        <p:txBody>
-          <a:bodyPr wrap="square" anchor="ctr" lIns="0" rIns="0" tIns="0" bIns="0">
-            <a:spAutoFit/>
-          </a:bodyPr>
-          <a:lstStyle/>
-          <a:p>
-            <a:pPr algn="ctr">
-              <a:spcBef>
-                <a:spcPts val="0"/>
-              </a:spcBef>
-              <a:spcAft>
-                <a:spcPts val="0"/>
-              </a:spcAft>
-            </a:pPr>
-            <a:r>
-              <a:rPr sz="1700" b="1">
-                <a:solidFill>
-                  <a:srgbClr val="FFFFFF"/>
-                </a:solidFill>
-                <a:latin typeface="Microsoft YaHei"/>
-              </a:rPr>
-              <a:t>录什么</a:t>
-            </a:r>
-          </a:p>
-        </p:txBody>
-      </p:sp>
-      <p:sp>
-        <p:nvSpPr>
-          <p:cNvPr id="12" name="TextBox 11"/>
-          <p:cNvSpPr txBox="1"/>
-          <p:nvPr/>
-        </p:nvSpPr>
-        <p:spPr>
-          <a:xfrm>
-            <a:off x="7223760" y="2148840"/>
-            <a:ext cx="4114800" cy="841248"/>
-          </a:xfrm>
-          <a:prstGeom prst="rect">
-            <a:avLst/>
-          </a:prstGeom>
-          <a:noFill/>
-        </p:spPr>
-        <p:txBody>
-          <a:bodyPr wrap="square" anchor="ctr" lIns="0" rIns="0" tIns="0" bIns="0">
-            <a:spAutoFit/>
-          </a:bodyPr>
-          <a:lstStyle/>
-          <a:p>
-            <a:pPr algn="ctr">
-              <a:spcBef>
-                <a:spcPts val="0"/>
-              </a:spcBef>
-              <a:spcAft>
-                <a:spcPts val="0"/>
-              </a:spcAft>
-            </a:pPr>
-            <a:r>
-              <a:rPr sz="1700" b="1">
-                <a:solidFill>
-                  <a:srgbClr val="FFFFFF"/>
-                </a:solidFill>
-                <a:latin typeface="Microsoft YaHei"/>
-              </a:rPr>
-              <a:t>举例</a:t>
-            </a:r>
-          </a:p>
-        </p:txBody>
-      </p:sp>
-      <p:sp>
-        <p:nvSpPr>
-          <p:cNvPr id="13" name="Rounded Rectangle 12"/>
-          <p:cNvSpPr/>
-          <p:nvPr/>
-        </p:nvSpPr>
-        <p:spPr>
-          <a:xfrm>
-            <a:off x="822960" y="2990088"/>
-            <a:ext cx="3017520" cy="841248"/>
-          </a:xfrm>
-          <a:prstGeom prst="roundRect">
-            <a:avLst/>
-          </a:prstGeom>
-          <a:solidFill>
-            <a:srgbClr val="FFFFFF"/>
-          </a:solidFill>
-          <a:ln w="12700">
-            <a:solidFill>
-              <a:srgbClr val="EADFC6"/>
-            </a:solidFill>
-          </a:ln>
-          <a:effectLst/>
-        </p:spPr>
-        <p:style>
-          <a:lnRef idx="1">
-            <a:schemeClr val="accent1"/>
-          </a:lnRef>
-          <a:fillRef idx="3">
-            <a:schemeClr val="accent1"/>
-          </a:fillRef>
-          <a:effectRef idx="2">
-            <a:schemeClr val="accent1"/>
-          </a:effectRef>
-          <a:fontRef idx="minor">
-            <a:schemeClr val="lt1"/>
-          </a:fontRef>
-        </p:style>
-        <p:txBody>
-          <a:bodyPr rtlCol="0" anchor="ctr"/>
-          <a:lstStyle/>
-          <a:p>
-            <a:pPr algn="ctr"/>
-          </a:p>
-        </p:txBody>
-      </p:sp>
-      <p:sp>
-        <p:nvSpPr>
-          <p:cNvPr id="14" name="Rounded Rectangle 13"/>
-          <p:cNvSpPr/>
-          <p:nvPr/>
-        </p:nvSpPr>
-        <p:spPr>
-          <a:xfrm>
-            <a:off x="3886200" y="2990088"/>
-            <a:ext cx="3291840" cy="841248"/>
-          </a:xfrm>
-          <a:prstGeom prst="roundRect">
-            <a:avLst/>
-          </a:prstGeom>
-          <a:solidFill>
-            <a:srgbClr val="FFFFFF"/>
-          </a:solidFill>
-          <a:ln w="12700">
-            <a:solidFill>
-              <a:srgbClr val="EADFC6"/>
-            </a:solidFill>
-          </a:ln>
-          <a:effectLst/>
-        </p:spPr>
-        <p:style>
-          <a:lnRef idx="1">
-            <a:schemeClr val="accent1"/>
-          </a:lnRef>
-          <a:fillRef idx="3">
-            <a:schemeClr val="accent1"/>
-          </a:fillRef>
-          <a:effectRef idx="2">
-            <a:schemeClr val="accent1"/>
-          </a:effectRef>
-          <a:fontRef idx="minor">
-            <a:schemeClr val="lt1"/>
-          </a:fontRef>
-        </p:style>
-        <p:txBody>
-          <a:bodyPr rtlCol="0" anchor="ctr"/>
-          <a:lstStyle/>
-          <a:p>
-            <a:pPr algn="ctr"/>
-          </a:p>
-        </p:txBody>
-      </p:sp>
-      <p:sp>
-        <p:nvSpPr>
-          <p:cNvPr id="15" name="Rounded Rectangle 14"/>
-          <p:cNvSpPr/>
-          <p:nvPr/>
-        </p:nvSpPr>
-        <p:spPr>
-          <a:xfrm>
-            <a:off x="7223760" y="2990088"/>
-            <a:ext cx="4114800" cy="841248"/>
-          </a:xfrm>
-          <a:prstGeom prst="roundRect">
-            <a:avLst/>
-          </a:prstGeom>
-          <a:solidFill>
-            <a:srgbClr val="FFFFFF"/>
-          </a:solidFill>
-          <a:ln w="12700">
-            <a:solidFill>
-              <a:srgbClr val="EADFC6"/>
-            </a:solidFill>
-          </a:ln>
-          <a:effectLst/>
-        </p:spPr>
-        <p:style>
-          <a:lnRef idx="1">
-            <a:schemeClr val="accent1"/>
-          </a:lnRef>
-          <a:fillRef idx="3">
-            <a:schemeClr val="accent1"/>
-          </a:fillRef>
-          <a:effectRef idx="2">
-            <a:schemeClr val="accent1"/>
-          </a:effectRef>
-          <a:fontRef idx="minor">
-            <a:schemeClr val="lt1"/>
-          </a:fontRef>
-        </p:style>
-        <p:txBody>
-          <a:bodyPr rtlCol="0" anchor="ctr"/>
-          <a:lstStyle/>
-          <a:p>
-            <a:pPr algn="ctr"/>
-          </a:p>
-        </p:txBody>
-      </p:sp>
-      <p:sp>
-        <p:nvSpPr>
-          <p:cNvPr id="16" name="TextBox 15"/>
-          <p:cNvSpPr txBox="1"/>
-          <p:nvPr/>
-        </p:nvSpPr>
-        <p:spPr>
-          <a:xfrm>
-            <a:off x="960120" y="2990088"/>
-            <a:ext cx="2788920" cy="841248"/>
-          </a:xfrm>
-          <a:prstGeom prst="rect">
-            <a:avLst/>
-          </a:prstGeom>
-          <a:noFill/>
-        </p:spPr>
-        <p:txBody>
-          <a:bodyPr wrap="square" anchor="ctr" lIns="0" rIns="0" tIns="0" bIns="0">
-            <a:spAutoFit/>
-          </a:bodyPr>
-          <a:lstStyle/>
-          <a:p>
-            <a:pPr algn="l">
-              <a:spcBef>
-                <a:spcPts val="0"/>
-              </a:spcBef>
-              <a:spcAft>
-                <a:spcPts val="0"/>
-              </a:spcAft>
-            </a:pPr>
-            <a:r>
-              <a:rPr sz="1450" b="1">
-                <a:solidFill>
-                  <a:srgbClr val="7A5C1E"/>
-                </a:solidFill>
-                <a:latin typeface="Microsoft YaHei"/>
-              </a:rPr>
-              <a:t>KB1 · 账号人设资料</a:t>
-            </a:r>
-          </a:p>
-        </p:txBody>
-      </p:sp>
-      <p:sp>
-        <p:nvSpPr>
-          <p:cNvPr id="17" name="TextBox 16"/>
-          <p:cNvSpPr txBox="1"/>
-          <p:nvPr/>
-        </p:nvSpPr>
-        <p:spPr>
-          <a:xfrm>
-            <a:off x="4023360" y="2990088"/>
-            <a:ext cx="3063240" cy="841248"/>
-          </a:xfrm>
-          <a:prstGeom prst="rect">
-            <a:avLst/>
-          </a:prstGeom>
-          <a:noFill/>
-        </p:spPr>
-        <p:txBody>
-          <a:bodyPr wrap="square" anchor="ctr" lIns="0" rIns="0" tIns="0" bIns="0">
-            <a:spAutoFit/>
-          </a:bodyPr>
-          <a:lstStyle/>
-          <a:p>
-            <a:pPr algn="l">
-              <a:spcBef>
-                <a:spcPts val="0"/>
-              </a:spcBef>
-              <a:spcAft>
-                <a:spcPts val="0"/>
-              </a:spcAft>
-            </a:pPr>
-            <a:r>
-              <a:rPr sz="1350" b="0">
-                <a:solidFill>
-                  <a:srgbClr val="241D14"/>
-                </a:solidFill>
-                <a:latin typeface="Microsoft YaHei"/>
-              </a:rPr>
-              <a:t>身份/口吻/擅长/不碰的话题</a:t>
-            </a:r>
-          </a:p>
-        </p:txBody>
-      </p:sp>
-      <p:sp>
-        <p:nvSpPr>
-          <p:cNvPr id="18" name="TextBox 17"/>
-          <p:cNvSpPr txBox="1"/>
-          <p:nvPr/>
-        </p:nvSpPr>
-        <p:spPr>
-          <a:xfrm>
-            <a:off x="7360920" y="2990088"/>
-            <a:ext cx="3886200" cy="841248"/>
-          </a:xfrm>
-          <a:prstGeom prst="rect">
-            <a:avLst/>
-          </a:prstGeom>
-          <a:noFill/>
-        </p:spPr>
-        <p:txBody>
-          <a:bodyPr wrap="square" anchor="ctr" lIns="0" rIns="0" tIns="0" bIns="0">
-            <a:spAutoFit/>
-          </a:bodyPr>
-          <a:lstStyle/>
-          <a:p>
-            <a:pPr algn="l">
-              <a:spcBef>
-                <a:spcPts val="0"/>
-              </a:spcBef>
-              <a:spcAft>
-                <a:spcPts val="0"/>
-              </a:spcAft>
-            </a:pPr>
-            <a:r>
-              <a:rPr sz="1300" b="0">
-                <a:solidFill>
-                  <a:srgbClr val="6B6459"/>
-                </a:solidFill>
-                <a:latin typeface="Microsoft YaHei"/>
-              </a:rPr>
-              <a:t>985在读，带过3届考研；说话干脆爱举例</a:t>
-            </a:r>
-          </a:p>
-        </p:txBody>
-      </p:sp>
-      <p:sp>
-        <p:nvSpPr>
-          <p:cNvPr id="19" name="Rounded Rectangle 18"/>
-          <p:cNvSpPr/>
-          <p:nvPr/>
-        </p:nvSpPr>
-        <p:spPr>
-          <a:xfrm>
-            <a:off x="822960" y="3831336"/>
-            <a:ext cx="3017520" cy="841248"/>
-          </a:xfrm>
-          <a:prstGeom prst="roundRect">
-            <a:avLst/>
-          </a:prstGeom>
-          <a:solidFill>
-            <a:srgbClr val="FFFFFF"/>
-          </a:solidFill>
-          <a:ln w="12700">
-            <a:solidFill>
-              <a:srgbClr val="EADFC6"/>
-            </a:solidFill>
-          </a:ln>
-          <a:effectLst/>
-        </p:spPr>
-        <p:style>
-          <a:lnRef idx="1">
-            <a:schemeClr val="accent1"/>
-          </a:lnRef>
-          <a:fillRef idx="3">
-            <a:schemeClr val="accent1"/>
-          </a:fillRef>
-          <a:effectRef idx="2">
-            <a:schemeClr val="accent1"/>
-          </a:effectRef>
-          <a:fontRef idx="minor">
-            <a:schemeClr val="lt1"/>
-          </a:fontRef>
-        </p:style>
-        <p:txBody>
-          <a:bodyPr rtlCol="0" anchor="ctr"/>
-          <a:lstStyle/>
-          <a:p>
-            <a:pPr algn="ctr"/>
-          </a:p>
-        </p:txBody>
-      </p:sp>
-      <p:sp>
-        <p:nvSpPr>
-          <p:cNvPr id="20" name="Rounded Rectangle 19"/>
-          <p:cNvSpPr/>
-          <p:nvPr/>
-        </p:nvSpPr>
-        <p:spPr>
-          <a:xfrm>
-            <a:off x="3886200" y="3831336"/>
-            <a:ext cx="3291840" cy="841248"/>
-          </a:xfrm>
-          <a:prstGeom prst="roundRect">
-            <a:avLst/>
-          </a:prstGeom>
-          <a:solidFill>
-            <a:srgbClr val="FFFFFF"/>
-          </a:solidFill>
-          <a:ln w="12700">
-            <a:solidFill>
-              <a:srgbClr val="EADFC6"/>
-            </a:solidFill>
-          </a:ln>
-          <a:effectLst/>
-        </p:spPr>
-        <p:style>
-          <a:lnRef idx="1">
-            <a:schemeClr val="accent1"/>
-          </a:lnRef>
-          <a:fillRef idx="3">
-            <a:schemeClr val="accent1"/>
-          </a:fillRef>
-          <a:effectRef idx="2">
-            <a:schemeClr val="accent1"/>
-          </a:effectRef>
-          <a:fontRef idx="minor">
-            <a:schemeClr val="lt1"/>
-          </a:fontRef>
-        </p:style>
-        <p:txBody>
-          <a:bodyPr rtlCol="0" anchor="ctr"/>
-          <a:lstStyle/>
-          <a:p>
-            <a:pPr algn="ctr"/>
-          </a:p>
-        </p:txBody>
-      </p:sp>
-      <p:sp>
-        <p:nvSpPr>
-          <p:cNvPr id="21" name="Rounded Rectangle 20"/>
-          <p:cNvSpPr/>
-          <p:nvPr/>
-        </p:nvSpPr>
-        <p:spPr>
-          <a:xfrm>
-            <a:off x="7223760" y="3831336"/>
-            <a:ext cx="4114800" cy="841248"/>
-          </a:xfrm>
-          <a:prstGeom prst="roundRect">
-            <a:avLst/>
-          </a:prstGeom>
-          <a:solidFill>
-            <a:srgbClr val="FFFFFF"/>
-          </a:solidFill>
-          <a:ln w="12700">
-            <a:solidFill>
-              <a:srgbClr val="EADFC6"/>
-            </a:solidFill>
-          </a:ln>
-          <a:effectLst/>
-        </p:spPr>
-        <p:style>
-          <a:lnRef idx="1">
-            <a:schemeClr val="accent1"/>
-          </a:lnRef>
-          <a:fillRef idx="3">
-            <a:schemeClr val="accent1"/>
-          </a:fillRef>
-          <a:effectRef idx="2">
-            <a:schemeClr val="accent1"/>
-          </a:effectRef>
-          <a:fontRef idx="minor">
-            <a:schemeClr val="lt1"/>
-          </a:fontRef>
-        </p:style>
-        <p:txBody>
-          <a:bodyPr rtlCol="0" anchor="ctr"/>
-          <a:lstStyle/>
-          <a:p>
-            <a:pPr algn="ctr"/>
-          </a:p>
-        </p:txBody>
-      </p:sp>
-      <p:sp>
-        <p:nvSpPr>
-          <p:cNvPr id="22" name="TextBox 21"/>
-          <p:cNvSpPr txBox="1"/>
-          <p:nvPr/>
-        </p:nvSpPr>
-        <p:spPr>
-          <a:xfrm>
-            <a:off x="960120" y="3831336"/>
-            <a:ext cx="2788920" cy="841248"/>
-          </a:xfrm>
-          <a:prstGeom prst="rect">
-            <a:avLst/>
-          </a:prstGeom>
-          <a:noFill/>
-        </p:spPr>
-        <p:txBody>
-          <a:bodyPr wrap="square" anchor="ctr" lIns="0" rIns="0" tIns="0" bIns="0">
-            <a:spAutoFit/>
-          </a:bodyPr>
-          <a:lstStyle/>
-          <a:p>
-            <a:pPr algn="l">
-              <a:spcBef>
-                <a:spcPts val="0"/>
-              </a:spcBef>
-              <a:spcAft>
-                <a:spcPts val="0"/>
-              </a:spcAft>
-            </a:pPr>
-            <a:r>
-              <a:rPr sz="1450" b="1">
-                <a:solidFill>
-                  <a:srgbClr val="7A5C1E"/>
-                </a:solidFill>
-                <a:latin typeface="Microsoft YaHei"/>
-              </a:rPr>
-              <a:t>KB3 · 行业知识/事实</a:t>
-            </a:r>
-          </a:p>
-        </p:txBody>
-      </p:sp>
-      <p:sp>
-        <p:nvSpPr>
-          <p:cNvPr id="23" name="TextBox 22"/>
-          <p:cNvSpPr txBox="1"/>
-          <p:nvPr/>
-        </p:nvSpPr>
-        <p:spPr>
-          <a:xfrm>
-            <a:off x="4023360" y="3831336"/>
-            <a:ext cx="3063240" cy="841248"/>
-          </a:xfrm>
-          <a:prstGeom prst="rect">
-            <a:avLst/>
-          </a:prstGeom>
-          <a:noFill/>
-        </p:spPr>
-        <p:txBody>
-          <a:bodyPr wrap="square" anchor="ctr" lIns="0" rIns="0" tIns="0" bIns="0">
-            <a:spAutoFit/>
-          </a:bodyPr>
-          <a:lstStyle/>
-          <a:p>
-            <a:pPr algn="l">
-              <a:spcBef>
-                <a:spcPts val="0"/>
-              </a:spcBef>
-              <a:spcAft>
-                <a:spcPts val="0"/>
-              </a:spcAft>
-            </a:pPr>
-            <a:r>
-              <a:rPr sz="1350" b="0">
-                <a:solidFill>
-                  <a:srgbClr val="241D14"/>
-                </a:solidFill>
-                <a:latin typeface="Microsoft YaHei"/>
-              </a:rPr>
-              <a:t>可引用的真实信息点</a:t>
-            </a:r>
-          </a:p>
-        </p:txBody>
-      </p:sp>
-      <p:sp>
-        <p:nvSpPr>
-          <p:cNvPr id="24" name="TextBox 23"/>
-          <p:cNvSpPr txBox="1"/>
-          <p:nvPr/>
-        </p:nvSpPr>
-        <p:spPr>
-          <a:xfrm>
-            <a:off x="7360920" y="3831336"/>
-            <a:ext cx="3886200" cy="841248"/>
-          </a:xfrm>
-          <a:prstGeom prst="rect">
-            <a:avLst/>
-          </a:prstGeom>
-          <a:noFill/>
-        </p:spPr>
-        <p:txBody>
-          <a:bodyPr wrap="square" anchor="ctr" lIns="0" rIns="0" tIns="0" bIns="0">
-            <a:spAutoFit/>
-          </a:bodyPr>
-          <a:lstStyle/>
-          <a:p>
-            <a:pPr algn="l">
-              <a:spcBef>
-                <a:spcPts val="0"/>
-              </a:spcBef>
-              <a:spcAft>
-                <a:spcPts val="0"/>
-              </a:spcAft>
-            </a:pPr>
-            <a:r>
-              <a:rPr sz="1300" b="0">
-                <a:solidFill>
-                  <a:srgbClr val="6B6459"/>
-                </a:solidFill>
-                <a:latin typeface="Microsoft YaHei"/>
-              </a:rPr>
-              <a:t>报名节点/各科要点；不确定标「需核实」</a:t>
-            </a:r>
-          </a:p>
-        </p:txBody>
-      </p:sp>
-      <p:sp>
-        <p:nvSpPr>
-          <p:cNvPr id="25" name="Rounded Rectangle 24"/>
-          <p:cNvSpPr/>
-          <p:nvPr/>
-        </p:nvSpPr>
-        <p:spPr>
-          <a:xfrm>
-            <a:off x="822960" y="4672584"/>
-            <a:ext cx="3017520" cy="841248"/>
-          </a:xfrm>
-          <a:prstGeom prst="roundRect">
-            <a:avLst/>
-          </a:prstGeom>
-          <a:solidFill>
-            <a:srgbClr val="FFFFFF"/>
-          </a:solidFill>
-          <a:ln w="12700">
-            <a:solidFill>
-              <a:srgbClr val="EADFC6"/>
-            </a:solidFill>
-          </a:ln>
-          <a:effectLst/>
-        </p:spPr>
-        <p:style>
-          <a:lnRef idx="1">
-            <a:schemeClr val="accent1"/>
-          </a:lnRef>
-          <a:fillRef idx="3">
-            <a:schemeClr val="accent1"/>
-          </a:fillRef>
-          <a:effectRef idx="2">
-            <a:schemeClr val="accent1"/>
-          </a:effectRef>
-          <a:fontRef idx="minor">
-            <a:schemeClr val="lt1"/>
-          </a:fontRef>
-        </p:style>
-        <p:txBody>
-          <a:bodyPr rtlCol="0" anchor="ctr"/>
-          <a:lstStyle/>
-          <a:p>
-            <a:pPr algn="ctr"/>
-          </a:p>
-        </p:txBody>
-      </p:sp>
-      <p:sp>
-        <p:nvSpPr>
-          <p:cNvPr id="26" name="Rounded Rectangle 25"/>
-          <p:cNvSpPr/>
-          <p:nvPr/>
-        </p:nvSpPr>
-        <p:spPr>
-          <a:xfrm>
-            <a:off x="3886200" y="4672584"/>
-            <a:ext cx="3291840" cy="841248"/>
-          </a:xfrm>
-          <a:prstGeom prst="roundRect">
-            <a:avLst/>
-          </a:prstGeom>
-          <a:solidFill>
-            <a:srgbClr val="FFFFFF"/>
-          </a:solidFill>
-          <a:ln w="12700">
-            <a:solidFill>
-              <a:srgbClr val="EADFC6"/>
-            </a:solidFill>
-          </a:ln>
-          <a:effectLst/>
-        </p:spPr>
-        <p:style>
-          <a:lnRef idx="1">
-            <a:schemeClr val="accent1"/>
-          </a:lnRef>
-          <a:fillRef idx="3">
-            <a:schemeClr val="accent1"/>
-          </a:fillRef>
-          <a:effectRef idx="2">
-            <a:schemeClr val="accent1"/>
-          </a:effectRef>
-          <a:fontRef idx="minor">
-            <a:schemeClr val="lt1"/>
-          </a:fontRef>
-        </p:style>
-        <p:txBody>
-          <a:bodyPr rtlCol="0" anchor="ctr"/>
-          <a:lstStyle/>
-          <a:p>
-            <a:pPr algn="ctr"/>
-          </a:p>
-        </p:txBody>
-      </p:sp>
-      <p:sp>
-        <p:nvSpPr>
-          <p:cNvPr id="27" name="Rounded Rectangle 26"/>
-          <p:cNvSpPr/>
-          <p:nvPr/>
-        </p:nvSpPr>
-        <p:spPr>
-          <a:xfrm>
-            <a:off x="7223760" y="4672584"/>
-            <a:ext cx="4114800" cy="841248"/>
-          </a:xfrm>
-          <a:prstGeom prst="roundRect">
-            <a:avLst/>
-          </a:prstGeom>
-          <a:solidFill>
-            <a:srgbClr val="FFFFFF"/>
-          </a:solidFill>
-          <a:ln w="12700">
-            <a:solidFill>
-              <a:srgbClr val="EADFC6"/>
-            </a:solidFill>
-          </a:ln>
-          <a:effectLst/>
-        </p:spPr>
-        <p:style>
-          <a:lnRef idx="1">
-            <a:schemeClr val="accent1"/>
-          </a:lnRef>
-          <a:fillRef idx="3">
-            <a:schemeClr val="accent1"/>
-          </a:fillRef>
-          <a:effectRef idx="2">
-            <a:schemeClr val="accent1"/>
-          </a:effectRef>
-          <a:fontRef idx="minor">
-            <a:schemeClr val="lt1"/>
-          </a:fontRef>
-        </p:style>
-        <p:txBody>
-          <a:bodyPr rtlCol="0" anchor="ctr"/>
-          <a:lstStyle/>
-          <a:p>
-            <a:pPr algn="ctr"/>
-          </a:p>
-        </p:txBody>
-      </p:sp>
-      <p:sp>
-        <p:nvSpPr>
-          <p:cNvPr id="28" name="TextBox 27"/>
-          <p:cNvSpPr txBox="1"/>
-          <p:nvPr/>
-        </p:nvSpPr>
-        <p:spPr>
-          <a:xfrm>
-            <a:off x="960120" y="4672584"/>
-            <a:ext cx="2788920" cy="841248"/>
-          </a:xfrm>
-          <a:prstGeom prst="rect">
-            <a:avLst/>
-          </a:prstGeom>
-          <a:noFill/>
-        </p:spPr>
-        <p:txBody>
-          <a:bodyPr wrap="square" anchor="ctr" lIns="0" rIns="0" tIns="0" bIns="0">
-            <a:spAutoFit/>
-          </a:bodyPr>
-          <a:lstStyle/>
-          <a:p>
-            <a:pPr algn="l">
-              <a:spcBef>
-                <a:spcPts val="0"/>
-              </a:spcBef>
-              <a:spcAft>
-                <a:spcPts val="0"/>
-              </a:spcAft>
-            </a:pPr>
-            <a:r>
-              <a:rPr sz="1450" b="1">
-                <a:solidFill>
-                  <a:srgbClr val="7A5C1E"/>
-                </a:solidFill>
-                <a:latin typeface="Microsoft YaHei"/>
-              </a:rPr>
-              <a:t>KB2 · 本人爆文样本</a:t>
-            </a:r>
-          </a:p>
-        </p:txBody>
-      </p:sp>
-      <p:sp>
-        <p:nvSpPr>
-          <p:cNvPr id="29" name="TextBox 28"/>
-          <p:cNvSpPr txBox="1"/>
-          <p:nvPr/>
-        </p:nvSpPr>
-        <p:spPr>
-          <a:xfrm>
-            <a:off x="4023360" y="4672584"/>
-            <a:ext cx="3063240" cy="841248"/>
-          </a:xfrm>
-          <a:prstGeom prst="rect">
-            <a:avLst/>
-          </a:prstGeom>
-          <a:noFill/>
-        </p:spPr>
-        <p:txBody>
-          <a:bodyPr wrap="square" anchor="ctr" lIns="0" rIns="0" tIns="0" bIns="0">
-            <a:spAutoFit/>
-          </a:bodyPr>
-          <a:lstStyle/>
-          <a:p>
-            <a:pPr algn="l">
-              <a:spcBef>
-                <a:spcPts val="0"/>
-              </a:spcBef>
-              <a:spcAft>
-                <a:spcPts val="0"/>
-              </a:spcAft>
-            </a:pPr>
-            <a:r>
-              <a:rPr sz="1350" b="0">
-                <a:solidFill>
-                  <a:srgbClr val="241D14"/>
-                </a:solidFill>
-                <a:latin typeface="Microsoft YaHei"/>
-              </a:rPr>
-              <a:t>你写过的爆文原文（只学语气不照抄）</a:t>
-            </a:r>
-          </a:p>
-        </p:txBody>
-      </p:sp>
-      <p:sp>
-        <p:nvSpPr>
-          <p:cNvPr id="30" name="TextBox 29"/>
-          <p:cNvSpPr txBox="1"/>
-          <p:nvPr/>
-        </p:nvSpPr>
-        <p:spPr>
-          <a:xfrm>
-            <a:off x="7360920" y="4672584"/>
-            <a:ext cx="3886200" cy="841248"/>
-          </a:xfrm>
-          <a:prstGeom prst="rect">
-            <a:avLst/>
-          </a:prstGeom>
-          <a:noFill/>
-        </p:spPr>
-        <p:txBody>
-          <a:bodyPr wrap="square" anchor="ctr" lIns="0" rIns="0" tIns="0" bIns="0">
-            <a:spAutoFit/>
-          </a:bodyPr>
-          <a:lstStyle/>
-          <a:p>
-            <a:pPr algn="l">
-              <a:spcBef>
-                <a:spcPts val="0"/>
-              </a:spcBef>
-              <a:spcAft>
-                <a:spcPts val="0"/>
-              </a:spcAft>
-            </a:pPr>
-            <a:r>
-              <a:rPr sz="1300" b="0">
-                <a:solidFill>
-                  <a:srgbClr val="6B6459"/>
-                </a:solidFill>
-                <a:latin typeface="Microsoft YaHei"/>
-              </a:rPr>
-              <a:t>贴 3~5 段本人笔记原文</a:t>
-            </a:r>
-          </a:p>
-        </p:txBody>
-      </p:sp>
-      <p:sp>
-        <p:nvSpPr>
-          <p:cNvPr id="31" name="Rounded Rectangle 30"/>
-          <p:cNvSpPr/>
-          <p:nvPr/>
-        </p:nvSpPr>
-        <p:spPr>
-          <a:xfrm>
-            <a:off x="822960" y="5513832"/>
-            <a:ext cx="3017520" cy="841248"/>
-          </a:xfrm>
-          <a:prstGeom prst="roundRect">
-            <a:avLst/>
-          </a:prstGeom>
-          <a:solidFill>
-            <a:srgbClr val="FFFFFF"/>
-          </a:solidFill>
-          <a:ln w="12700">
-            <a:solidFill>
-              <a:srgbClr val="EADFC6"/>
-            </a:solidFill>
-          </a:ln>
-          <a:effectLst/>
-        </p:spPr>
-        <p:style>
-          <a:lnRef idx="1">
-            <a:schemeClr val="accent1"/>
-          </a:lnRef>
-          <a:fillRef idx="3">
-            <a:schemeClr val="accent1"/>
-          </a:fillRef>
-          <a:effectRef idx="2">
-            <a:schemeClr val="accent1"/>
-          </a:effectRef>
-          <a:fontRef idx="minor">
-            <a:schemeClr val="lt1"/>
-          </a:fontRef>
-        </p:style>
-        <p:txBody>
-          <a:bodyPr rtlCol="0" anchor="ctr"/>
-          <a:lstStyle/>
-          <a:p>
-            <a:pPr algn="ctr"/>
-          </a:p>
-        </p:txBody>
-      </p:sp>
-      <p:sp>
-        <p:nvSpPr>
-          <p:cNvPr id="32" name="Rounded Rectangle 31"/>
-          <p:cNvSpPr/>
-          <p:nvPr/>
-        </p:nvSpPr>
-        <p:spPr>
-          <a:xfrm>
-            <a:off x="3886200" y="5513832"/>
-            <a:ext cx="3291840" cy="841248"/>
-          </a:xfrm>
-          <a:prstGeom prst="roundRect">
-            <a:avLst/>
-          </a:prstGeom>
-          <a:solidFill>
-            <a:srgbClr val="FFFFFF"/>
-          </a:solidFill>
-          <a:ln w="12700">
-            <a:solidFill>
-              <a:srgbClr val="EADFC6"/>
-            </a:solidFill>
-          </a:ln>
-          <a:effectLst/>
-        </p:spPr>
-        <p:style>
-          <a:lnRef idx="1">
-            <a:schemeClr val="accent1"/>
-          </a:lnRef>
-          <a:fillRef idx="3">
-            <a:schemeClr val="accent1"/>
-          </a:fillRef>
-          <a:effectRef idx="2">
-            <a:schemeClr val="accent1"/>
-          </a:effectRef>
-          <a:fontRef idx="minor">
-            <a:schemeClr val="lt1"/>
-          </a:fontRef>
-        </p:style>
-        <p:txBody>
-          <a:bodyPr rtlCol="0" anchor="ctr"/>
-          <a:lstStyle/>
-          <a:p>
-            <a:pPr algn="ctr"/>
-          </a:p>
-        </p:txBody>
-      </p:sp>
-      <p:sp>
-        <p:nvSpPr>
-          <p:cNvPr id="33" name="Rounded Rectangle 32"/>
-          <p:cNvSpPr/>
-          <p:nvPr/>
-        </p:nvSpPr>
-        <p:spPr>
-          <a:xfrm>
-            <a:off x="7223760" y="5513832"/>
-            <a:ext cx="4114800" cy="841248"/>
-          </a:xfrm>
-          <a:prstGeom prst="roundRect">
-            <a:avLst/>
-          </a:prstGeom>
-          <a:solidFill>
-            <a:srgbClr val="FFFFFF"/>
-          </a:solidFill>
-          <a:ln w="12700">
-            <a:solidFill>
-              <a:srgbClr val="EADFC6"/>
-            </a:solidFill>
-          </a:ln>
-          <a:effectLst/>
-        </p:spPr>
-        <p:style>
-          <a:lnRef idx="1">
-            <a:schemeClr val="accent1"/>
-          </a:lnRef>
-          <a:fillRef idx="3">
-            <a:schemeClr val="accent1"/>
-          </a:fillRef>
-          <a:effectRef idx="2">
-            <a:schemeClr val="accent1"/>
-          </a:effectRef>
-          <a:fontRef idx="minor">
-            <a:schemeClr val="lt1"/>
-          </a:fontRef>
-        </p:style>
-        <p:txBody>
-          <a:bodyPr rtlCol="0" anchor="ctr"/>
-          <a:lstStyle/>
-          <a:p>
-            <a:pPr algn="ctr"/>
-          </a:p>
-        </p:txBody>
-      </p:sp>
-      <p:sp>
-        <p:nvSpPr>
-          <p:cNvPr id="34" name="TextBox 33"/>
-          <p:cNvSpPr txBox="1"/>
-          <p:nvPr/>
-        </p:nvSpPr>
-        <p:spPr>
-          <a:xfrm>
-            <a:off x="960120" y="5513832"/>
-            <a:ext cx="2788920" cy="841248"/>
-          </a:xfrm>
-          <a:prstGeom prst="rect">
-            <a:avLst/>
-          </a:prstGeom>
-          <a:noFill/>
-        </p:spPr>
-        <p:txBody>
-          <a:bodyPr wrap="square" anchor="ctr" lIns="0" rIns="0" tIns="0" bIns="0">
-            <a:spAutoFit/>
-          </a:bodyPr>
-          <a:lstStyle/>
-          <a:p>
-            <a:pPr algn="l">
-              <a:spcBef>
-                <a:spcPts val="0"/>
-              </a:spcBef>
-              <a:spcAft>
-                <a:spcPts val="0"/>
-              </a:spcAft>
-            </a:pPr>
-            <a:r>
-              <a:rPr sz="1450" b="1">
-                <a:solidFill>
-                  <a:srgbClr val="7A5C1E"/>
-                </a:solidFill>
-                <a:latin typeface="Microsoft YaHei"/>
-              </a:rPr>
-              <a:t>KB4 · 额外违禁/红线</a:t>
-            </a:r>
-          </a:p>
-        </p:txBody>
-      </p:sp>
-      <p:sp>
-        <p:nvSpPr>
-          <p:cNvPr id="35" name="TextBox 34"/>
-          <p:cNvSpPr txBox="1"/>
-          <p:nvPr/>
-        </p:nvSpPr>
-        <p:spPr>
-          <a:xfrm>
-            <a:off x="4023360" y="5513832"/>
-            <a:ext cx="3063240" cy="841248"/>
-          </a:xfrm>
-          <a:prstGeom prst="rect">
-            <a:avLst/>
-          </a:prstGeom>
-          <a:noFill/>
-        </p:spPr>
-        <p:txBody>
-          <a:bodyPr wrap="square" anchor="ctr" lIns="0" rIns="0" tIns="0" bIns="0">
-            <a:spAutoFit/>
-          </a:bodyPr>
-          <a:lstStyle/>
-          <a:p>
-            <a:pPr algn="l">
-              <a:spcBef>
-                <a:spcPts val="0"/>
-              </a:spcBef>
-              <a:spcAft>
-                <a:spcPts val="0"/>
-              </a:spcAft>
-            </a:pPr>
-            <a:r>
-              <a:rPr sz="1350" b="0">
-                <a:solidFill>
-                  <a:srgbClr val="241D14"/>
-                </a:solidFill>
-                <a:latin typeface="Microsoft YaHei"/>
-              </a:rPr>
-              <a:t>内置合规之外的补充禁区</a:t>
-            </a:r>
-          </a:p>
-        </p:txBody>
-      </p:sp>
-      <p:sp>
-        <p:nvSpPr>
-          <p:cNvPr id="36" name="TextBox 35"/>
-          <p:cNvSpPr txBox="1"/>
-          <p:nvPr/>
-        </p:nvSpPr>
-        <p:spPr>
-          <a:xfrm>
-            <a:off x="7360920" y="5513832"/>
-            <a:ext cx="3886200" cy="841248"/>
-          </a:xfrm>
-          <a:prstGeom prst="rect">
-            <a:avLst/>
-          </a:prstGeom>
-          <a:noFill/>
-        </p:spPr>
-        <p:txBody>
-          <a:bodyPr wrap="square" anchor="ctr" lIns="0" rIns="0" tIns="0" bIns="0">
-            <a:spAutoFit/>
-          </a:bodyPr>
-          <a:lstStyle/>
-          <a:p>
-            <a:pPr algn="l">
-              <a:spcBef>
-                <a:spcPts val="0"/>
-              </a:spcBef>
-              <a:spcAft>
-                <a:spcPts val="0"/>
-              </a:spcAft>
-            </a:pPr>
-            <a:r>
-              <a:rPr sz="1300" b="0">
-                <a:solidFill>
-                  <a:srgbClr val="6B6459"/>
-                </a:solidFill>
-                <a:latin typeface="Microsoft YaHei"/>
-              </a:rPr>
-              <a:t>不提机构名、不出现价格</a:t>
-            </a:r>
-          </a:p>
-        </p:txBody>
-      </p:sp>
-      <p:sp>
-        <p:nvSpPr>
-          <p:cNvPr id="37" name="TextBox 36"/>
-          <p:cNvSpPr txBox="1"/>
-          <p:nvPr/>
-        </p:nvSpPr>
-        <p:spPr>
-          <a:xfrm>
-            <a:off x="822960" y="6172200"/>
-            <a:ext cx="10607040" cy="548640"/>
-          </a:xfrm>
-          <a:prstGeom prst="rect">
-            <a:avLst/>
-          </a:prstGeom>
-          <a:noFill/>
-        </p:spPr>
-        <p:txBody>
-          <a:bodyPr wrap="square" anchor="t" lIns="0" rIns="0" tIns="0" bIns="0">
-            <a:spAutoFit/>
-          </a:bodyPr>
-          <a:lstStyle/>
-          <a:p>
-            <a:pPr algn="l">
-              <a:spcBef>
-                <a:spcPts val="0"/>
-              </a:spcBef>
-              <a:spcAft>
-                <a:spcPts val="600"/>
-              </a:spcAft>
-            </a:pPr>
-            <a:r>
-              <a:rPr sz="1350" b="0">
-                <a:solidFill>
-                  <a:srgbClr val="6B6459"/>
-                </a:solidFill>
-                <a:latin typeface="Microsoft YaHei"/>
-              </a:rPr>
-              <a:t>每栏可直接粘贴文字或 📎上传文件（txt/md/docx/xlsx/pptx/pdf/图片）；右上角实时显示「X文件·约X字」。KB2 只学语气不照抄。</a:t>
-            </a:r>
-          </a:p>
-        </p:txBody>
-      </p:sp>
+        </p:spPr>
+      </p:pic>
     </p:spTree>
   </p:cSld>
   <p:clrMapOvr>
@@ -9227,8 +9201,8 @@
         </p:nvSpPr>
         <p:spPr>
           <a:xfrm>
-            <a:off x="822960" y="502920"/>
-            <a:ext cx="1280160" cy="1280160"/>
+            <a:off x="640080" y="457200"/>
+            <a:ext cx="1143000" cy="1143000"/>
           </a:xfrm>
           <a:prstGeom prst="roundRect">
             <a:avLst/>
@@ -9271,8 +9245,8 @@
         </p:nvSpPr>
         <p:spPr>
           <a:xfrm>
-            <a:off x="822960" y="502920"/>
-            <a:ext cx="1280160" cy="1280160"/>
+            <a:off x="640080" y="457200"/>
+            <a:ext cx="1143000" cy="1143000"/>
           </a:xfrm>
           <a:prstGeom prst="rect">
             <a:avLst/>
@@ -9294,7 +9268,7 @@
               </a:spcAft>
             </a:pPr>
             <a:r>
-              <a:rPr sz="1200" b="1">
+              <a:rPr sz="1100" b="1">
                 <a:solidFill>
                   <a:srgbClr val="E6CF8E"/>
                 </a:solidFill>
@@ -9313,7 +9287,7 @@
               </a:spcAft>
             </a:pPr>
             <a:r>
-              <a:rPr sz="4000" b="1">
+              <a:rPr sz="3400" b="1">
                 <a:solidFill>
                   <a:srgbClr val="FFFFFF"/>
                 </a:solidFill>
@@ -9332,8 +9306,8 @@
         </p:nvSpPr>
         <p:spPr>
           <a:xfrm>
-            <a:off x="2286000" y="548640"/>
-            <a:ext cx="9144000" cy="411480"/>
+            <a:off x="1920240" y="502920"/>
+            <a:ext cx="9144000" cy="365760"/>
           </a:xfrm>
           <a:prstGeom prst="rect">
             <a:avLst/>
@@ -9355,7 +9329,7 @@
               </a:spcAft>
             </a:pPr>
             <a:r>
-              <a:rPr sz="1400" b="1">
+              <a:rPr sz="1300" b="1">
                 <a:solidFill>
                   <a:srgbClr val="7A5C1E"/>
                 </a:solidFill>
@@ -9374,8 +9348,8 @@
         </p:nvSpPr>
         <p:spPr>
           <a:xfrm>
-            <a:off x="2286000" y="932688"/>
-            <a:ext cx="9326880" cy="822960"/>
+            <a:off x="1920240" y="868680"/>
+            <a:ext cx="9875520" cy="731520"/>
           </a:xfrm>
           <a:prstGeom prst="rect">
             <a:avLst/>
@@ -9397,7 +9371,7 @@
               </a:spcAft>
             </a:pPr>
             <a:r>
-              <a:rPr sz="3000" b="1">
+              <a:rPr sz="2600" b="1">
                 <a:solidFill>
                   <a:srgbClr val="241D14"/>
                 </a:solidFill>
@@ -9416,8 +9390,377 @@
         </p:nvSpPr>
         <p:spPr>
           <a:xfrm>
-            <a:off x="822960" y="2103120"/>
-            <a:ext cx="10515600" cy="777240"/>
+            <a:off x="640080" y="1920240"/>
+            <a:ext cx="4297680" cy="658368"/>
+          </a:xfrm>
+          <a:prstGeom prst="roundRect">
+            <a:avLst/>
+          </a:prstGeom>
+          <a:solidFill>
+            <a:srgbClr val="FFFFFF"/>
+          </a:solidFill>
+          <a:ln w="13970">
+            <a:solidFill>
+              <a:srgbClr val="EADFC6"/>
+            </a:solidFill>
+          </a:ln>
+          <a:effectLst/>
+        </p:spPr>
+        <p:style>
+          <a:lnRef idx="1">
+            <a:schemeClr val="accent1"/>
+          </a:lnRef>
+          <a:fillRef idx="3">
+            <a:schemeClr val="accent1"/>
+          </a:fillRef>
+          <a:effectRef idx="2">
+            <a:schemeClr val="accent1"/>
+          </a:effectRef>
+          <a:fontRef idx="minor">
+            <a:schemeClr val="lt1"/>
+          </a:fontRef>
+        </p:style>
+        <p:txBody>
+          <a:bodyPr rtlCol="0" anchor="ctr"/>
+          <a:lstStyle/>
+          <a:p>
+            <a:pPr algn="ctr"/>
+          </a:p>
+        </p:txBody>
+      </p:sp>
+      <p:sp>
+        <p:nvSpPr>
+          <p:cNvPr id="8" name="TextBox 7"/>
+          <p:cNvSpPr txBox="1"/>
+          <p:nvPr/>
+        </p:nvSpPr>
+        <p:spPr>
+          <a:xfrm>
+            <a:off x="841248" y="2011680"/>
+            <a:ext cx="3931920" cy="475488"/>
+          </a:xfrm>
+          <a:prstGeom prst="rect">
+            <a:avLst/>
+          </a:prstGeom>
+          <a:noFill/>
+        </p:spPr>
+        <p:txBody>
+          <a:bodyPr wrap="square" anchor="ctr" lIns="0" rIns="0" tIns="0" bIns="0">
+            <a:spAutoFit/>
+          </a:bodyPr>
+          <a:lstStyle/>
+          <a:p>
+            <a:pPr algn="l">
+              <a:spcBef>
+                <a:spcPts val="0"/>
+              </a:spcBef>
+              <a:spcAft>
+                <a:spcPts val="600"/>
+              </a:spcAft>
+            </a:pPr>
+            <a:r>
+              <a:rPr sz="1300" b="1">
+                <a:solidFill>
+                  <a:srgbClr val="7A5C1E"/>
+                </a:solidFill>
+                <a:latin typeface="Microsoft YaHei"/>
+              </a:rPr>
+              <a:t>📍 位置：</a:t>
+            </a:r>
+            <a:r>
+              <a:rPr sz="1250" b="0">
+                <a:solidFill>
+                  <a:srgbClr val="241D14"/>
+                </a:solidFill>
+                <a:latin typeface="Microsoft YaHei"/>
+              </a:rPr>
+              <a:t>左栏「边界约束」卡，四个框</a:t>
+            </a:r>
+          </a:p>
+        </p:txBody>
+      </p:sp>
+      <p:sp>
+        <p:nvSpPr>
+          <p:cNvPr id="9" name="TextBox 8"/>
+          <p:cNvSpPr txBox="1"/>
+          <p:nvPr/>
+        </p:nvSpPr>
+        <p:spPr>
+          <a:xfrm>
+            <a:off x="685800" y="2788920"/>
+            <a:ext cx="4297680" cy="365760"/>
+          </a:xfrm>
+          <a:prstGeom prst="rect">
+            <a:avLst/>
+          </a:prstGeom>
+          <a:noFill/>
+        </p:spPr>
+        <p:txBody>
+          <a:bodyPr wrap="square" anchor="t" lIns="0" rIns="0" tIns="0" bIns="0">
+            <a:spAutoFit/>
+          </a:bodyPr>
+          <a:lstStyle/>
+          <a:p>
+            <a:pPr algn="l">
+              <a:spcBef>
+                <a:spcPts val="0"/>
+              </a:spcBef>
+              <a:spcAft>
+                <a:spcPts val="600"/>
+              </a:spcAft>
+            </a:pPr>
+            <a:r>
+              <a:rPr sz="1600" b="1">
+                <a:solidFill>
+                  <a:srgbClr val="7A5C1E"/>
+                </a:solidFill>
+                <a:latin typeface="Microsoft YaHei"/>
+              </a:rPr>
+              <a:t>操作步骤</a:t>
+            </a:r>
+          </a:p>
+        </p:txBody>
+      </p:sp>
+      <p:sp>
+        <p:nvSpPr>
+          <p:cNvPr id="10" name="TextBox 9"/>
+          <p:cNvSpPr txBox="1"/>
+          <p:nvPr/>
+        </p:nvSpPr>
+        <p:spPr>
+          <a:xfrm>
+            <a:off x="777240" y="3200400"/>
+            <a:ext cx="4114800" cy="2377440"/>
+          </a:xfrm>
+          <a:prstGeom prst="rect">
+            <a:avLst/>
+          </a:prstGeom>
+          <a:noFill/>
+        </p:spPr>
+        <p:txBody>
+          <a:bodyPr wrap="square" anchor="t" lIns="0" rIns="0" tIns="0" bIns="0">
+            <a:spAutoFit/>
+          </a:bodyPr>
+          <a:lstStyle/>
+          <a:p>
+            <a:pPr algn="l">
+              <a:spcBef>
+                <a:spcPts val="0"/>
+              </a:spcBef>
+              <a:spcAft>
+                <a:spcPts val="800"/>
+              </a:spcAft>
+            </a:pPr>
+            <a:r>
+              <a:rPr sz="1600" b="1">
+                <a:solidFill>
+                  <a:srgbClr val="A5813A"/>
+                </a:solidFill>
+                <a:latin typeface="Microsoft YaHei"/>
+              </a:rPr>
+              <a:t>• </a:t>
+            </a:r>
+            <a:r>
+              <a:rPr sz="1550" b="0">
+                <a:solidFill>
+                  <a:srgbClr val="241D14"/>
+                </a:solidFill>
+                <a:latin typeface="Microsoft YaHei"/>
+              </a:rPr>
+              <a:t>⛔ 禁区 · 绝不出现</a:t>
+            </a:r>
+          </a:p>
+          <a:p>
+            <a:pPr algn="l">
+              <a:spcBef>
+                <a:spcPts val="0"/>
+              </a:spcBef>
+              <a:spcAft>
+                <a:spcPts val="800"/>
+              </a:spcAft>
+            </a:pPr>
+            <a:r>
+              <a:rPr sz="1600" b="1">
+                <a:solidFill>
+                  <a:srgbClr val="A5813A"/>
+                </a:solidFill>
+                <a:latin typeface="Microsoft YaHei"/>
+              </a:rPr>
+              <a:t>• </a:t>
+            </a:r>
+            <a:r>
+              <a:rPr sz="1550" b="0">
+                <a:solidFill>
+                  <a:srgbClr val="241D14"/>
+                </a:solidFill>
+                <a:latin typeface="Microsoft YaHei"/>
+              </a:rPr>
+              <a:t>✅ 必守事实 · 只能这样说</a:t>
+            </a:r>
+          </a:p>
+          <a:p>
+            <a:pPr algn="l">
+              <a:spcBef>
+                <a:spcPts val="0"/>
+              </a:spcBef>
+              <a:spcAft>
+                <a:spcPts val="800"/>
+              </a:spcAft>
+            </a:pPr>
+            <a:r>
+              <a:rPr sz="1600" b="1">
+                <a:solidFill>
+                  <a:srgbClr val="A5813A"/>
+                </a:solidFill>
+                <a:latin typeface="Microsoft YaHei"/>
+              </a:rPr>
+              <a:t>• </a:t>
+            </a:r>
+            <a:r>
+              <a:rPr sz="1550" b="0">
+                <a:solidFill>
+                  <a:srgbClr val="241D14"/>
+                </a:solidFill>
+                <a:latin typeface="Microsoft YaHei"/>
+              </a:rPr>
+              <a:t>🎯 统一口径 · 术语一致</a:t>
+            </a:r>
+          </a:p>
+          <a:p>
+            <a:pPr algn="l">
+              <a:spcBef>
+                <a:spcPts val="0"/>
+              </a:spcBef>
+              <a:spcAft>
+                <a:spcPts val="800"/>
+              </a:spcAft>
+            </a:pPr>
+            <a:r>
+              <a:rPr sz="1600" b="1">
+                <a:solidFill>
+                  <a:srgbClr val="A5813A"/>
+                </a:solidFill>
+                <a:latin typeface="Microsoft YaHei"/>
+              </a:rPr>
+              <a:t>• </a:t>
+            </a:r>
+            <a:r>
+              <a:rPr sz="1550" b="0">
+                <a:solidFill>
+                  <a:srgbClr val="241D14"/>
+                </a:solidFill>
+                <a:latin typeface="Microsoft YaHei"/>
+              </a:rPr>
+              <a:t>📌 创作偏好 · 减少返工</a:t>
+            </a:r>
+          </a:p>
+        </p:txBody>
+      </p:sp>
+      <p:sp>
+        <p:nvSpPr>
+          <p:cNvPr id="11" name="Rounded Rectangle 10"/>
+          <p:cNvSpPr/>
+          <p:nvPr/>
+        </p:nvSpPr>
+        <p:spPr>
+          <a:xfrm>
+            <a:off x="640080" y="5806440"/>
+            <a:ext cx="4297680" cy="731520"/>
+          </a:xfrm>
+          <a:prstGeom prst="roundRect">
+            <a:avLst/>
+          </a:prstGeom>
+          <a:solidFill>
+            <a:srgbClr val="F6EEDA"/>
+          </a:solidFill>
+          <a:ln>
+            <a:noFill/>
+          </a:ln>
+          <a:effectLst/>
+        </p:spPr>
+        <p:style>
+          <a:lnRef idx="1">
+            <a:schemeClr val="accent1"/>
+          </a:lnRef>
+          <a:fillRef idx="3">
+            <a:schemeClr val="accent1"/>
+          </a:fillRef>
+          <a:effectRef idx="2">
+            <a:schemeClr val="accent1"/>
+          </a:effectRef>
+          <a:fontRef idx="minor">
+            <a:schemeClr val="lt1"/>
+          </a:fontRef>
+        </p:style>
+        <p:txBody>
+          <a:bodyPr rtlCol="0" anchor="ctr"/>
+          <a:lstStyle/>
+          <a:p>
+            <a:pPr algn="ctr"/>
+          </a:p>
+        </p:txBody>
+      </p:sp>
+      <p:sp>
+        <p:nvSpPr>
+          <p:cNvPr id="12" name="TextBox 11"/>
+          <p:cNvSpPr txBox="1"/>
+          <p:nvPr/>
+        </p:nvSpPr>
+        <p:spPr>
+          <a:xfrm>
+            <a:off x="841248" y="5897880"/>
+            <a:ext cx="3931920" cy="548640"/>
+          </a:xfrm>
+          <a:prstGeom prst="rect">
+            <a:avLst/>
+          </a:prstGeom>
+          <a:noFill/>
+        </p:spPr>
+        <p:txBody>
+          <a:bodyPr wrap="square" anchor="ctr" lIns="0" rIns="0" tIns="0" bIns="0">
+            <a:spAutoFit/>
+          </a:bodyPr>
+          <a:lstStyle/>
+          <a:p>
+            <a:pPr algn="l">
+              <a:spcBef>
+                <a:spcPts val="0"/>
+              </a:spcBef>
+              <a:spcAft>
+                <a:spcPts val="600"/>
+              </a:spcAft>
+            </a:pPr>
+            <a:r>
+              <a:rPr sz="1300" b="1">
+                <a:solidFill>
+                  <a:srgbClr val="7A5C1E"/>
+                </a:solidFill>
+                <a:latin typeface="Microsoft YaHei"/>
+              </a:rPr>
+              <a:t>⚠ </a:t>
+            </a:r>
+            <a:r>
+              <a:rPr sz="1250" b="0">
+                <a:solidFill>
+                  <a:srgbClr val="6B6459"/>
+                </a:solidFill>
+                <a:latin typeface="Microsoft YaHei"/>
+              </a:rPr>
+              <a:t>优先级最高，强制生效于每一次生成；流水线可「记偏好」随时追加。</a:t>
+            </a:r>
+          </a:p>
+        </p:txBody>
+      </p:sp>
+      <p:sp>
+        <p:nvSpPr>
+          <p:cNvPr id="13" name="Rounded Rectangle 12"/>
+          <p:cNvSpPr/>
+          <p:nvPr/>
+        </p:nvSpPr>
+        <p:spPr>
+          <a:xfrm>
+            <a:off x="5111640" y="2228163"/>
+            <a:ext cx="6510240" cy="4001874"/>
           </a:xfrm>
           <a:prstGeom prst="roundRect">
             <a:avLst/>
@@ -9454,329 +9797,30 @@
           </a:p>
         </p:txBody>
       </p:sp>
-      <p:sp>
-        <p:nvSpPr>
-          <p:cNvPr id="8" name="TextBox 7"/>
-          <p:cNvSpPr txBox="1"/>
-          <p:nvPr/>
-        </p:nvSpPr>
-        <p:spPr>
-          <a:xfrm>
-            <a:off x="1097280" y="2212848"/>
-            <a:ext cx="10058400" cy="548640"/>
+      <p:pic>
+        <p:nvPicPr>
+          <p:cNvPr id="14" name="Picture 13" descr="sc_boundary.png"/>
+          <p:cNvPicPr>
+            <a:picLocks noChangeAspect="1"/>
+          </p:cNvPicPr>
+          <p:nvPr/>
+        </p:nvPicPr>
+        <p:blipFill>
+          <a:blip r:embed="rId2"/>
+          <a:stretch>
+            <a:fillRect/>
+          </a:stretch>
+        </p:blipFill>
+        <p:spPr>
+          <a:xfrm>
+            <a:off x="5120640" y="2237163"/>
+            <a:ext cx="6492240" cy="3983875"/>
           </a:xfrm>
           <a:prstGeom prst="rect">
             <a:avLst/>
           </a:prstGeom>
-          <a:noFill/>
-        </p:spPr>
-        <p:txBody>
-          <a:bodyPr wrap="square" anchor="ctr" lIns="0" rIns="0" tIns="0" bIns="0">
-            <a:spAutoFit/>
-          </a:bodyPr>
-          <a:lstStyle/>
-          <a:p>
-            <a:pPr algn="l">
-              <a:spcBef>
-                <a:spcPts val="0"/>
-              </a:spcBef>
-              <a:spcAft>
-                <a:spcPts val="600"/>
-              </a:spcAft>
-            </a:pPr>
-            <a:r>
-              <a:rPr sz="1700" b="1">
-                <a:solidFill>
-                  <a:srgbClr val="7A5C1E"/>
-                </a:solidFill>
-                <a:latin typeface="Microsoft YaHei"/>
-              </a:rPr>
-              <a:t>📍 界面位置：</a:t>
-            </a:r>
-            <a:r>
-              <a:rPr sz="1700" b="0">
-                <a:solidFill>
-                  <a:srgbClr val="241D14"/>
-                </a:solidFill>
-                <a:latin typeface="Microsoft YaHei"/>
-              </a:rPr>
-              <a:t>左栏「边界约束」卡，四个框</a:t>
-            </a:r>
-          </a:p>
-        </p:txBody>
-      </p:sp>
-      <p:sp>
-        <p:nvSpPr>
-          <p:cNvPr id="9" name="TextBox 8"/>
-          <p:cNvSpPr txBox="1"/>
-          <p:nvPr/>
-        </p:nvSpPr>
-        <p:spPr>
-          <a:xfrm>
-            <a:off x="914400" y="3063240"/>
-            <a:ext cx="10332720" cy="457200"/>
-          </a:xfrm>
-          <a:prstGeom prst="rect">
-            <a:avLst/>
-          </a:prstGeom>
-          <a:noFill/>
-        </p:spPr>
-        <p:txBody>
-          <a:bodyPr wrap="square" anchor="t" lIns="0" rIns="0" tIns="0" bIns="0">
-            <a:spAutoFit/>
-          </a:bodyPr>
-          <a:lstStyle/>
-          <a:p>
-            <a:pPr algn="l">
-              <a:spcBef>
-                <a:spcPts val="0"/>
-              </a:spcBef>
-              <a:spcAft>
-                <a:spcPts val="600"/>
-              </a:spcAft>
-            </a:pPr>
-            <a:r>
-              <a:rPr sz="1800" b="1">
-                <a:solidFill>
-                  <a:srgbClr val="7A5C1E"/>
-                </a:solidFill>
-                <a:latin typeface="Microsoft YaHei"/>
-              </a:rPr>
-              <a:t>操作步骤</a:t>
-            </a:r>
-          </a:p>
-        </p:txBody>
-      </p:sp>
-      <p:sp>
-        <p:nvSpPr>
-          <p:cNvPr id="10" name="TextBox 9"/>
-          <p:cNvSpPr txBox="1"/>
-          <p:nvPr/>
-        </p:nvSpPr>
-        <p:spPr>
-          <a:xfrm>
-            <a:off x="1051560" y="3520440"/>
-            <a:ext cx="10149840" cy="2194560"/>
-          </a:xfrm>
-          <a:prstGeom prst="rect">
-            <a:avLst/>
-          </a:prstGeom>
-          <a:noFill/>
-        </p:spPr>
-        <p:txBody>
-          <a:bodyPr wrap="square" anchor="t" lIns="0" rIns="0" tIns="0" bIns="0">
-            <a:spAutoFit/>
-          </a:bodyPr>
-          <a:lstStyle/>
-          <a:p>
-            <a:pPr algn="l">
-              <a:spcBef>
-                <a:spcPts val="0"/>
-              </a:spcBef>
-              <a:spcAft>
-                <a:spcPts val="900"/>
-              </a:spcAft>
-            </a:pPr>
-            <a:r>
-              <a:rPr sz="1900" b="1">
-                <a:solidFill>
-                  <a:srgbClr val="A5813A"/>
-                </a:solidFill>
-                <a:latin typeface="Microsoft YaHei"/>
-              </a:rPr>
-              <a:t>• </a:t>
-            </a:r>
-            <a:r>
-              <a:rPr sz="1900" b="0">
-                <a:solidFill>
-                  <a:srgbClr val="241D14"/>
-                </a:solidFill>
-                <a:latin typeface="Microsoft YaHei"/>
-              </a:rPr>
-              <a:t>⛔ 禁区 · 绝不出现</a:t>
-            </a:r>
-          </a:p>
-          <a:p>
-            <a:pPr algn="l">
-              <a:spcBef>
-                <a:spcPts val="0"/>
-              </a:spcBef>
-              <a:spcAft>
-                <a:spcPts val="900"/>
-              </a:spcAft>
-            </a:pPr>
-            <a:r>
-              <a:rPr sz="1900" b="1">
-                <a:solidFill>
-                  <a:srgbClr val="A5813A"/>
-                </a:solidFill>
-                <a:latin typeface="Microsoft YaHei"/>
-              </a:rPr>
-              <a:t>• </a:t>
-            </a:r>
-            <a:r>
-              <a:rPr sz="1900" b="0">
-                <a:solidFill>
-                  <a:srgbClr val="241D14"/>
-                </a:solidFill>
-                <a:latin typeface="Microsoft YaHei"/>
-              </a:rPr>
-              <a:t>✅ 必守事实 · 只能这样说</a:t>
-            </a:r>
-          </a:p>
-          <a:p>
-            <a:pPr algn="l">
-              <a:spcBef>
-                <a:spcPts val="0"/>
-              </a:spcBef>
-              <a:spcAft>
-                <a:spcPts val="900"/>
-              </a:spcAft>
-            </a:pPr>
-            <a:r>
-              <a:rPr sz="1900" b="1">
-                <a:solidFill>
-                  <a:srgbClr val="A5813A"/>
-                </a:solidFill>
-                <a:latin typeface="Microsoft YaHei"/>
-              </a:rPr>
-              <a:t>• </a:t>
-            </a:r>
-            <a:r>
-              <a:rPr sz="1900" b="0">
-                <a:solidFill>
-                  <a:srgbClr val="241D14"/>
-                </a:solidFill>
-                <a:latin typeface="Microsoft YaHei"/>
-              </a:rPr>
-              <a:t>🎯 统一口径 · 术语一致</a:t>
-            </a:r>
-          </a:p>
-          <a:p>
-            <a:pPr algn="l">
-              <a:spcBef>
-                <a:spcPts val="0"/>
-              </a:spcBef>
-              <a:spcAft>
-                <a:spcPts val="900"/>
-              </a:spcAft>
-            </a:pPr>
-            <a:r>
-              <a:rPr sz="1900" b="1">
-                <a:solidFill>
-                  <a:srgbClr val="A5813A"/>
-                </a:solidFill>
-                <a:latin typeface="Microsoft YaHei"/>
-              </a:rPr>
-              <a:t>• </a:t>
-            </a:r>
-            <a:r>
-              <a:rPr sz="1900" b="0">
-                <a:solidFill>
-                  <a:srgbClr val="241D14"/>
-                </a:solidFill>
-                <a:latin typeface="Microsoft YaHei"/>
-              </a:rPr>
-              <a:t>📌 创作偏好 · 减少返工（流水线可「记偏好」追加）</a:t>
-            </a:r>
-          </a:p>
-        </p:txBody>
-      </p:sp>
-      <p:sp>
-        <p:nvSpPr>
-          <p:cNvPr id="11" name="Rounded Rectangle 10"/>
-          <p:cNvSpPr/>
-          <p:nvPr/>
-        </p:nvSpPr>
-        <p:spPr>
-          <a:xfrm>
-            <a:off x="822960" y="5806440"/>
-            <a:ext cx="10515600" cy="685800"/>
-          </a:xfrm>
-          <a:prstGeom prst="roundRect">
-            <a:avLst/>
-          </a:prstGeom>
-          <a:solidFill>
-            <a:srgbClr val="F6EEDA"/>
-          </a:solidFill>
-          <a:ln>
-            <a:noFill/>
-          </a:ln>
-          <a:effectLst/>
-        </p:spPr>
-        <p:style>
-          <a:lnRef idx="1">
-            <a:schemeClr val="accent1"/>
-          </a:lnRef>
-          <a:fillRef idx="3">
-            <a:schemeClr val="accent1"/>
-          </a:fillRef>
-          <a:effectRef idx="2">
-            <a:schemeClr val="accent1"/>
-          </a:effectRef>
-          <a:fontRef idx="minor">
-            <a:schemeClr val="lt1"/>
-          </a:fontRef>
-        </p:style>
-        <p:txBody>
-          <a:bodyPr rtlCol="0" anchor="ctr"/>
-          <a:lstStyle/>
-          <a:p>
-            <a:pPr algn="ctr"/>
-          </a:p>
-        </p:txBody>
-      </p:sp>
-      <p:sp>
-        <p:nvSpPr>
-          <p:cNvPr id="12" name="TextBox 11"/>
-          <p:cNvSpPr txBox="1"/>
-          <p:nvPr/>
-        </p:nvSpPr>
-        <p:spPr>
-          <a:xfrm>
-            <a:off x="1097280" y="5897880"/>
-            <a:ext cx="10058400" cy="502920"/>
-          </a:xfrm>
-          <a:prstGeom prst="rect">
-            <a:avLst/>
-          </a:prstGeom>
-          <a:noFill/>
-        </p:spPr>
-        <p:txBody>
-          <a:bodyPr wrap="square" anchor="ctr" lIns="0" rIns="0" tIns="0" bIns="0">
-            <a:spAutoFit/>
-          </a:bodyPr>
-          <a:lstStyle/>
-          <a:p>
-            <a:pPr algn="l">
-              <a:spcBef>
-                <a:spcPts val="0"/>
-              </a:spcBef>
-              <a:spcAft>
-                <a:spcPts val="600"/>
-              </a:spcAft>
-            </a:pPr>
-            <a:r>
-              <a:rPr sz="1500" b="1">
-                <a:solidFill>
-                  <a:srgbClr val="7A5C1E"/>
-                </a:solidFill>
-                <a:latin typeface="Microsoft YaHei"/>
-              </a:rPr>
-              <a:t>⚠ 避坑：</a:t>
-            </a:r>
-            <a:r>
-              <a:rPr sz="1500" b="0">
-                <a:solidFill>
-                  <a:srgbClr val="6B6459"/>
-                </a:solidFill>
-                <a:latin typeface="Microsoft YaHei"/>
-              </a:rPr>
-              <a:t>优先级最高，强制生效于每一次生成；把红线和口径写死，产出不翻车。</a:t>
-            </a:r>
-          </a:p>
-        </p:txBody>
-      </p:sp>
+        </p:spPr>
+      </p:pic>
     </p:spTree>
   </p:cSld>
   <p:clrMapOvr>
@@ -9855,8 +9899,8 @@
         </p:nvSpPr>
         <p:spPr>
           <a:xfrm>
-            <a:off x="822960" y="502920"/>
-            <a:ext cx="1280160" cy="1280160"/>
+            <a:off x="640080" y="457200"/>
+            <a:ext cx="1143000" cy="1143000"/>
           </a:xfrm>
           <a:prstGeom prst="roundRect">
             <a:avLst/>
@@ -9899,8 +9943,8 @@
         </p:nvSpPr>
         <p:spPr>
           <a:xfrm>
-            <a:off x="822960" y="502920"/>
-            <a:ext cx="1280160" cy="1280160"/>
+            <a:off x="640080" y="457200"/>
+            <a:ext cx="1143000" cy="1143000"/>
           </a:xfrm>
           <a:prstGeom prst="rect">
             <a:avLst/>
@@ -9922,7 +9966,7 @@
               </a:spcAft>
             </a:pPr>
             <a:r>
-              <a:rPr sz="1200" b="1">
+              <a:rPr sz="1100" b="1">
                 <a:solidFill>
                   <a:srgbClr val="E6CF8E"/>
                 </a:solidFill>
@@ -9941,7 +9985,7 @@
               </a:spcAft>
             </a:pPr>
             <a:r>
-              <a:rPr sz="4000" b="1">
+              <a:rPr sz="3400" b="1">
                 <a:solidFill>
                   <a:srgbClr val="FFFFFF"/>
                 </a:solidFill>
@@ -9960,8 +10004,8 @@
         </p:nvSpPr>
         <p:spPr>
           <a:xfrm>
-            <a:off x="2286000" y="548640"/>
-            <a:ext cx="9144000" cy="411480"/>
+            <a:off x="1920240" y="502920"/>
+            <a:ext cx="9144000" cy="365760"/>
           </a:xfrm>
           <a:prstGeom prst="rect">
             <a:avLst/>
@@ -9983,13 +10027,13 @@
               </a:spcAft>
             </a:pPr>
             <a:r>
-              <a:rPr sz="1400" b="1">
+              <a:rPr sz="1300" b="1">
                 <a:solidFill>
                   <a:srgbClr val="7A5C1E"/>
                 </a:solidFill>
                 <a:latin typeface="Microsoft YaHei"/>
               </a:rPr>
-              <a:t>STEP 5-6 · 可选增强</a:t>
+              <a:t>STEP 5 · 配图风格（可选）</a:t>
             </a:r>
           </a:p>
         </p:txBody>
@@ -10002,8 +10046,8 @@
         </p:nvSpPr>
         <p:spPr>
           <a:xfrm>
-            <a:off x="2286000" y="932688"/>
-            <a:ext cx="9326880" cy="822960"/>
+            <a:off x="1920240" y="868680"/>
+            <a:ext cx="9875520" cy="731520"/>
           </a:xfrm>
           <a:prstGeom prst="rect">
             <a:avLst/>
@@ -10025,13 +10069,13 @@
               </a:spcAft>
             </a:pPr>
             <a:r>
-              <a:rPr sz="3000" b="1">
+              <a:rPr sz="2600" b="1">
                 <a:solidFill>
                   <a:srgbClr val="241D14"/>
                 </a:solidFill>
                 <a:latin typeface="Microsoft YaHei"/>
               </a:rPr>
-              <a:t>配图风格库 &amp; 蒸馏技能（可选）</a:t>
+              <a:t>统一每篇配图的画风</a:t>
             </a:r>
           </a:p>
         </p:txBody>
@@ -10044,8 +10088,349 @@
         </p:nvSpPr>
         <p:spPr>
           <a:xfrm>
-            <a:off x="822960" y="2103120"/>
-            <a:ext cx="10515600" cy="777240"/>
+            <a:off x="640080" y="1920240"/>
+            <a:ext cx="4297680" cy="658368"/>
+          </a:xfrm>
+          <a:prstGeom prst="roundRect">
+            <a:avLst/>
+          </a:prstGeom>
+          <a:solidFill>
+            <a:srgbClr val="FFFFFF"/>
+          </a:solidFill>
+          <a:ln w="13970">
+            <a:solidFill>
+              <a:srgbClr val="EADFC6"/>
+            </a:solidFill>
+          </a:ln>
+          <a:effectLst/>
+        </p:spPr>
+        <p:style>
+          <a:lnRef idx="1">
+            <a:schemeClr val="accent1"/>
+          </a:lnRef>
+          <a:fillRef idx="3">
+            <a:schemeClr val="accent1"/>
+          </a:fillRef>
+          <a:effectRef idx="2">
+            <a:schemeClr val="accent1"/>
+          </a:effectRef>
+          <a:fontRef idx="minor">
+            <a:schemeClr val="lt1"/>
+          </a:fontRef>
+        </p:style>
+        <p:txBody>
+          <a:bodyPr rtlCol="0" anchor="ctr"/>
+          <a:lstStyle/>
+          <a:p>
+            <a:pPr algn="ctr"/>
+          </a:p>
+        </p:txBody>
+      </p:sp>
+      <p:sp>
+        <p:nvSpPr>
+          <p:cNvPr id="8" name="TextBox 7"/>
+          <p:cNvSpPr txBox="1"/>
+          <p:nvPr/>
+        </p:nvSpPr>
+        <p:spPr>
+          <a:xfrm>
+            <a:off x="841248" y="2011680"/>
+            <a:ext cx="3931920" cy="475488"/>
+          </a:xfrm>
+          <a:prstGeom prst="rect">
+            <a:avLst/>
+          </a:prstGeom>
+          <a:noFill/>
+        </p:spPr>
+        <p:txBody>
+          <a:bodyPr wrap="square" anchor="ctr" lIns="0" rIns="0" tIns="0" bIns="0">
+            <a:spAutoFit/>
+          </a:bodyPr>
+          <a:lstStyle/>
+          <a:p>
+            <a:pPr algn="l">
+              <a:spcBef>
+                <a:spcPts val="0"/>
+              </a:spcBef>
+              <a:spcAft>
+                <a:spcPts val="600"/>
+              </a:spcAft>
+            </a:pPr>
+            <a:r>
+              <a:rPr sz="1300" b="1">
+                <a:solidFill>
+                  <a:srgbClr val="7A5C1E"/>
+                </a:solidFill>
+                <a:latin typeface="Microsoft YaHei"/>
+              </a:rPr>
+              <a:t>📍 位置：</a:t>
+            </a:r>
+            <a:r>
+              <a:rPr sz="1250" b="0">
+                <a:solidFill>
+                  <a:srgbClr val="241D14"/>
+                </a:solidFill>
+                <a:latin typeface="Microsoft YaHei"/>
+              </a:rPr>
+              <a:t>基础人设卡下方「配图视觉风格 / 配图风格库」</a:t>
+            </a:r>
+          </a:p>
+        </p:txBody>
+      </p:sp>
+      <p:sp>
+        <p:nvSpPr>
+          <p:cNvPr id="9" name="TextBox 8"/>
+          <p:cNvSpPr txBox="1"/>
+          <p:nvPr/>
+        </p:nvSpPr>
+        <p:spPr>
+          <a:xfrm>
+            <a:off x="685800" y="2788920"/>
+            <a:ext cx="4297680" cy="365760"/>
+          </a:xfrm>
+          <a:prstGeom prst="rect">
+            <a:avLst/>
+          </a:prstGeom>
+          <a:noFill/>
+        </p:spPr>
+        <p:txBody>
+          <a:bodyPr wrap="square" anchor="t" lIns="0" rIns="0" tIns="0" bIns="0">
+            <a:spAutoFit/>
+          </a:bodyPr>
+          <a:lstStyle/>
+          <a:p>
+            <a:pPr algn="l">
+              <a:spcBef>
+                <a:spcPts val="0"/>
+              </a:spcBef>
+              <a:spcAft>
+                <a:spcPts val="600"/>
+              </a:spcAft>
+            </a:pPr>
+            <a:r>
+              <a:rPr sz="1600" b="1">
+                <a:solidFill>
+                  <a:srgbClr val="7A5C1E"/>
+                </a:solidFill>
+                <a:latin typeface="Microsoft YaHei"/>
+              </a:rPr>
+              <a:t>操作步骤</a:t>
+            </a:r>
+          </a:p>
+        </p:txBody>
+      </p:sp>
+      <p:sp>
+        <p:nvSpPr>
+          <p:cNvPr id="10" name="TextBox 9"/>
+          <p:cNvSpPr txBox="1"/>
+          <p:nvPr/>
+        </p:nvSpPr>
+        <p:spPr>
+          <a:xfrm>
+            <a:off x="777240" y="3200400"/>
+            <a:ext cx="4114800" cy="2377440"/>
+          </a:xfrm>
+          <a:prstGeom prst="rect">
+            <a:avLst/>
+          </a:prstGeom>
+          <a:noFill/>
+        </p:spPr>
+        <p:txBody>
+          <a:bodyPr wrap="square" anchor="t" lIns="0" rIns="0" tIns="0" bIns="0">
+            <a:spAutoFit/>
+          </a:bodyPr>
+          <a:lstStyle/>
+          <a:p>
+            <a:pPr algn="l">
+              <a:spcBef>
+                <a:spcPts val="0"/>
+              </a:spcBef>
+              <a:spcAft>
+                <a:spcPts val="800"/>
+              </a:spcAft>
+            </a:pPr>
+            <a:r>
+              <a:rPr sz="1600" b="1">
+                <a:solidFill>
+                  <a:srgbClr val="A5813A"/>
+                </a:solidFill>
+                <a:latin typeface="Microsoft YaHei"/>
+              </a:rPr>
+              <a:t>• </a:t>
+            </a:r>
+            <a:r>
+              <a:rPr sz="1550" b="0">
+                <a:solidFill>
+                  <a:srgbClr val="241D14"/>
+                </a:solidFill>
+                <a:latin typeface="Microsoft YaHei"/>
+              </a:rPr>
+              <a:t>填一句画风（手绘/ins极简/莫兰迪…）</a:t>
+            </a:r>
+          </a:p>
+          <a:p>
+            <a:pPr algn="l">
+              <a:spcBef>
+                <a:spcPts val="0"/>
+              </a:spcBef>
+              <a:spcAft>
+                <a:spcPts val="800"/>
+              </a:spcAft>
+            </a:pPr>
+            <a:r>
+              <a:rPr sz="1600" b="1">
+                <a:solidFill>
+                  <a:srgbClr val="A5813A"/>
+                </a:solidFill>
+                <a:latin typeface="Microsoft YaHei"/>
+              </a:rPr>
+              <a:t>• </a:t>
+            </a:r>
+            <a:r>
+              <a:rPr sz="1550" b="0">
+                <a:solidFill>
+                  <a:srgbClr val="241D14"/>
+                </a:solidFill>
+                <a:latin typeface="Microsoft YaHei"/>
+              </a:rPr>
+              <a:t>或 📎加参考图 → ✨提炼画风 自动转文字</a:t>
+            </a:r>
+          </a:p>
+          <a:p>
+            <a:pPr algn="l">
+              <a:spcBef>
+                <a:spcPts val="0"/>
+              </a:spcBef>
+              <a:spcAft>
+                <a:spcPts val="800"/>
+              </a:spcAft>
+            </a:pPr>
+            <a:r>
+              <a:rPr sz="1600" b="1">
+                <a:solidFill>
+                  <a:srgbClr val="A5813A"/>
+                </a:solidFill>
+                <a:latin typeface="Microsoft YaHei"/>
+              </a:rPr>
+              <a:t>• </a:t>
+            </a:r>
+            <a:r>
+              <a:rPr sz="1550" b="0">
+                <a:solidFill>
+                  <a:srgbClr val="241D14"/>
+                </a:solidFill>
+                <a:latin typeface="Microsoft YaHei"/>
+              </a:rPr>
+              <a:t>没贴对标时会拿第1张当垫图统一调性</a:t>
+            </a:r>
+          </a:p>
+        </p:txBody>
+      </p:sp>
+      <p:sp>
+        <p:nvSpPr>
+          <p:cNvPr id="11" name="Rounded Rectangle 10"/>
+          <p:cNvSpPr/>
+          <p:nvPr/>
+        </p:nvSpPr>
+        <p:spPr>
+          <a:xfrm>
+            <a:off x="640080" y="5806440"/>
+            <a:ext cx="4297680" cy="731520"/>
+          </a:xfrm>
+          <a:prstGeom prst="roundRect">
+            <a:avLst/>
+          </a:prstGeom>
+          <a:solidFill>
+            <a:srgbClr val="F6EEDA"/>
+          </a:solidFill>
+          <a:ln>
+            <a:noFill/>
+          </a:ln>
+          <a:effectLst/>
+        </p:spPr>
+        <p:style>
+          <a:lnRef idx="1">
+            <a:schemeClr val="accent1"/>
+          </a:lnRef>
+          <a:fillRef idx="3">
+            <a:schemeClr val="accent1"/>
+          </a:fillRef>
+          <a:effectRef idx="2">
+            <a:schemeClr val="accent1"/>
+          </a:effectRef>
+          <a:fontRef idx="minor">
+            <a:schemeClr val="lt1"/>
+          </a:fontRef>
+        </p:style>
+        <p:txBody>
+          <a:bodyPr rtlCol="0" anchor="ctr"/>
+          <a:lstStyle/>
+          <a:p>
+            <a:pPr algn="ctr"/>
+          </a:p>
+        </p:txBody>
+      </p:sp>
+      <p:sp>
+        <p:nvSpPr>
+          <p:cNvPr id="12" name="TextBox 11"/>
+          <p:cNvSpPr txBox="1"/>
+          <p:nvPr/>
+        </p:nvSpPr>
+        <p:spPr>
+          <a:xfrm>
+            <a:off x="841248" y="5897880"/>
+            <a:ext cx="3931920" cy="548640"/>
+          </a:xfrm>
+          <a:prstGeom prst="rect">
+            <a:avLst/>
+          </a:prstGeom>
+          <a:noFill/>
+        </p:spPr>
+        <p:txBody>
+          <a:bodyPr wrap="square" anchor="ctr" lIns="0" rIns="0" tIns="0" bIns="0">
+            <a:spAutoFit/>
+          </a:bodyPr>
+          <a:lstStyle/>
+          <a:p>
+            <a:pPr algn="l">
+              <a:spcBef>
+                <a:spcPts val="0"/>
+              </a:spcBef>
+              <a:spcAft>
+                <a:spcPts val="600"/>
+              </a:spcAft>
+            </a:pPr>
+            <a:r>
+              <a:rPr sz="1300" b="1">
+                <a:solidFill>
+                  <a:srgbClr val="7A5C1E"/>
+                </a:solidFill>
+                <a:latin typeface="Microsoft YaHei"/>
+              </a:rPr>
+              <a:t>⚠ </a:t>
+            </a:r>
+            <a:r>
+              <a:rPr sz="1250" b="0">
+                <a:solidFill>
+                  <a:srgbClr val="6B6459"/>
+                </a:solidFill>
+                <a:latin typeface="Microsoft YaHei"/>
+              </a:rPr>
+              <a:t>想让多篇配图风格统一，就填画风或传样图自动提炼。</a:t>
+            </a:r>
+          </a:p>
+        </p:txBody>
+      </p:sp>
+      <p:sp>
+        <p:nvSpPr>
+          <p:cNvPr id="13" name="Rounded Rectangle 12"/>
+          <p:cNvSpPr/>
+          <p:nvPr/>
+        </p:nvSpPr>
+        <p:spPr>
+          <a:xfrm>
+            <a:off x="5111640" y="3524503"/>
+            <a:ext cx="6510240" cy="1409194"/>
           </a:xfrm>
           <a:prstGeom prst="roundRect">
             <a:avLst/>
@@ -10082,301 +10467,30 @@
           </a:p>
         </p:txBody>
       </p:sp>
-      <p:sp>
-        <p:nvSpPr>
-          <p:cNvPr id="8" name="TextBox 7"/>
-          <p:cNvSpPr txBox="1"/>
-          <p:nvPr/>
-        </p:nvSpPr>
-        <p:spPr>
-          <a:xfrm>
-            <a:off x="1097280" y="2212848"/>
-            <a:ext cx="10058400" cy="548640"/>
+      <p:pic>
+        <p:nvPicPr>
+          <p:cNvPr id="14" name="Picture 13" descr="sc_imgstyle.png"/>
+          <p:cNvPicPr>
+            <a:picLocks noChangeAspect="1"/>
+          </p:cNvPicPr>
+          <p:nvPr/>
+        </p:nvPicPr>
+        <p:blipFill>
+          <a:blip r:embed="rId2"/>
+          <a:stretch>
+            <a:fillRect/>
+          </a:stretch>
+        </p:blipFill>
+        <p:spPr>
+          <a:xfrm>
+            <a:off x="5120640" y="3533503"/>
+            <a:ext cx="6492240" cy="1391194"/>
           </a:xfrm>
           <a:prstGeom prst="rect">
             <a:avLst/>
           </a:prstGeom>
-          <a:noFill/>
-        </p:spPr>
-        <p:txBody>
-          <a:bodyPr wrap="square" anchor="ctr" lIns="0" rIns="0" tIns="0" bIns="0">
-            <a:spAutoFit/>
-          </a:bodyPr>
-          <a:lstStyle/>
-          <a:p>
-            <a:pPr algn="l">
-              <a:spcBef>
-                <a:spcPts val="0"/>
-              </a:spcBef>
-              <a:spcAft>
-                <a:spcPts val="600"/>
-              </a:spcAft>
-            </a:pPr>
-            <a:r>
-              <a:rPr sz="1700" b="1">
-                <a:solidFill>
-                  <a:srgbClr val="7A5C1E"/>
-                </a:solidFill>
-                <a:latin typeface="Microsoft YaHei"/>
-              </a:rPr>
-              <a:t>📍 界面位置：</a:t>
-            </a:r>
-            <a:r>
-              <a:rPr sz="1700" b="0">
-                <a:solidFill>
-                  <a:srgbClr val="241D14"/>
-                </a:solidFill>
-                <a:latin typeface="Microsoft YaHei"/>
-              </a:rPr>
-              <a:t>基础人设卡下方 / 自定义 Skills 卡</a:t>
-            </a:r>
-          </a:p>
-        </p:txBody>
-      </p:sp>
-      <p:sp>
-        <p:nvSpPr>
-          <p:cNvPr id="9" name="TextBox 8"/>
-          <p:cNvSpPr txBox="1"/>
-          <p:nvPr/>
-        </p:nvSpPr>
-        <p:spPr>
-          <a:xfrm>
-            <a:off x="914400" y="3063240"/>
-            <a:ext cx="10332720" cy="457200"/>
-          </a:xfrm>
-          <a:prstGeom prst="rect">
-            <a:avLst/>
-          </a:prstGeom>
-          <a:noFill/>
-        </p:spPr>
-        <p:txBody>
-          <a:bodyPr wrap="square" anchor="t" lIns="0" rIns="0" tIns="0" bIns="0">
-            <a:spAutoFit/>
-          </a:bodyPr>
-          <a:lstStyle/>
-          <a:p>
-            <a:pPr algn="l">
-              <a:spcBef>
-                <a:spcPts val="0"/>
-              </a:spcBef>
-              <a:spcAft>
-                <a:spcPts val="600"/>
-              </a:spcAft>
-            </a:pPr>
-            <a:r>
-              <a:rPr sz="1800" b="1">
-                <a:solidFill>
-                  <a:srgbClr val="7A5C1E"/>
-                </a:solidFill>
-                <a:latin typeface="Microsoft YaHei"/>
-              </a:rPr>
-              <a:t>操作步骤</a:t>
-            </a:r>
-          </a:p>
-        </p:txBody>
-      </p:sp>
-      <p:sp>
-        <p:nvSpPr>
-          <p:cNvPr id="10" name="TextBox 9"/>
-          <p:cNvSpPr txBox="1"/>
-          <p:nvPr/>
-        </p:nvSpPr>
-        <p:spPr>
-          <a:xfrm>
-            <a:off x="1051560" y="3520440"/>
-            <a:ext cx="10149840" cy="2194560"/>
-          </a:xfrm>
-          <a:prstGeom prst="rect">
-            <a:avLst/>
-          </a:prstGeom>
-          <a:noFill/>
-        </p:spPr>
-        <p:txBody>
-          <a:bodyPr wrap="square" anchor="t" lIns="0" rIns="0" tIns="0" bIns="0">
-            <a:spAutoFit/>
-          </a:bodyPr>
-          <a:lstStyle/>
-          <a:p>
-            <a:pPr algn="l">
-              <a:spcBef>
-                <a:spcPts val="0"/>
-              </a:spcBef>
-              <a:spcAft>
-                <a:spcPts val="900"/>
-              </a:spcAft>
-            </a:pPr>
-            <a:r>
-              <a:rPr sz="1900" b="1">
-                <a:solidFill>
-                  <a:srgbClr val="A5813A"/>
-                </a:solidFill>
-                <a:latin typeface="Microsoft YaHei"/>
-              </a:rPr>
-              <a:t>• </a:t>
-            </a:r>
-            <a:r>
-              <a:rPr sz="1900" b="0">
-                <a:solidFill>
-                  <a:srgbClr val="241D14"/>
-                </a:solidFill>
-                <a:latin typeface="Microsoft YaHei"/>
-              </a:rPr>
-              <a:t>配图视觉风格：填一句画风（手绘/ins极简/莫兰迪…）</a:t>
-            </a:r>
-          </a:p>
-          <a:p>
-            <a:pPr algn="l">
-              <a:spcBef>
-                <a:spcPts val="0"/>
-              </a:spcBef>
-              <a:spcAft>
-                <a:spcPts val="900"/>
-              </a:spcAft>
-            </a:pPr>
-            <a:r>
-              <a:rPr sz="1900" b="1">
-                <a:solidFill>
-                  <a:srgbClr val="A5813A"/>
-                </a:solidFill>
-                <a:latin typeface="Microsoft YaHei"/>
-              </a:rPr>
-              <a:t>• </a:t>
-            </a:r>
-            <a:r>
-              <a:rPr sz="1900" b="0">
-                <a:solidFill>
-                  <a:srgbClr val="241D14"/>
-                </a:solidFill>
-                <a:latin typeface="Microsoft YaHei"/>
-              </a:rPr>
-              <a:t>配图风格库：📎加参考图 → ✨提炼画风 自动转文字</a:t>
-            </a:r>
-          </a:p>
-          <a:p>
-            <a:pPr algn="l">
-              <a:spcBef>
-                <a:spcPts val="0"/>
-              </a:spcBef>
-              <a:spcAft>
-                <a:spcPts val="900"/>
-              </a:spcAft>
-            </a:pPr>
-            <a:r>
-              <a:rPr sz="1900" b="1">
-                <a:solidFill>
-                  <a:srgbClr val="A5813A"/>
-                </a:solidFill>
-                <a:latin typeface="Microsoft YaHei"/>
-              </a:rPr>
-              <a:t>• </a:t>
-            </a:r>
-            <a:r>
-              <a:rPr sz="1900" b="0">
-                <a:solidFill>
-                  <a:srgbClr val="241D14"/>
-                </a:solidFill>
-                <a:latin typeface="Microsoft YaHei"/>
-              </a:rPr>
-              <a:t>蒸馏技能：把你的方法论/SOP 蒸馏成可复用技能</a:t>
-            </a:r>
-          </a:p>
-        </p:txBody>
-      </p:sp>
-      <p:sp>
-        <p:nvSpPr>
-          <p:cNvPr id="11" name="Rounded Rectangle 10"/>
-          <p:cNvSpPr/>
-          <p:nvPr/>
-        </p:nvSpPr>
-        <p:spPr>
-          <a:xfrm>
-            <a:off x="822960" y="5806440"/>
-            <a:ext cx="10515600" cy="685800"/>
-          </a:xfrm>
-          <a:prstGeom prst="roundRect">
-            <a:avLst/>
-          </a:prstGeom>
-          <a:solidFill>
-            <a:srgbClr val="F6EEDA"/>
-          </a:solidFill>
-          <a:ln>
-            <a:noFill/>
-          </a:ln>
-          <a:effectLst/>
-        </p:spPr>
-        <p:style>
-          <a:lnRef idx="1">
-            <a:schemeClr val="accent1"/>
-          </a:lnRef>
-          <a:fillRef idx="3">
-            <a:schemeClr val="accent1"/>
-          </a:fillRef>
-          <a:effectRef idx="2">
-            <a:schemeClr val="accent1"/>
-          </a:effectRef>
-          <a:fontRef idx="minor">
-            <a:schemeClr val="lt1"/>
-          </a:fontRef>
-        </p:style>
-        <p:txBody>
-          <a:bodyPr rtlCol="0" anchor="ctr"/>
-          <a:lstStyle/>
-          <a:p>
-            <a:pPr algn="ctr"/>
-          </a:p>
-        </p:txBody>
-      </p:sp>
-      <p:sp>
-        <p:nvSpPr>
-          <p:cNvPr id="12" name="TextBox 11"/>
-          <p:cNvSpPr txBox="1"/>
-          <p:nvPr/>
-        </p:nvSpPr>
-        <p:spPr>
-          <a:xfrm>
-            <a:off x="1097280" y="5897880"/>
-            <a:ext cx="10058400" cy="502920"/>
-          </a:xfrm>
-          <a:prstGeom prst="rect">
-            <a:avLst/>
-          </a:prstGeom>
-          <a:noFill/>
-        </p:spPr>
-        <p:txBody>
-          <a:bodyPr wrap="square" anchor="ctr" lIns="0" rIns="0" tIns="0" bIns="0">
-            <a:spAutoFit/>
-          </a:bodyPr>
-          <a:lstStyle/>
-          <a:p>
-            <a:pPr algn="l">
-              <a:spcBef>
-                <a:spcPts val="0"/>
-              </a:spcBef>
-              <a:spcAft>
-                <a:spcPts val="600"/>
-              </a:spcAft>
-            </a:pPr>
-            <a:r>
-              <a:rPr sz="1500" b="1">
-                <a:solidFill>
-                  <a:srgbClr val="7A5C1E"/>
-                </a:solidFill>
-                <a:latin typeface="Microsoft YaHei"/>
-              </a:rPr>
-              <a:t>⚠ 避坑：</a:t>
-            </a:r>
-            <a:r>
-              <a:rPr sz="1500" b="0">
-                <a:solidFill>
-                  <a:srgbClr val="6B6459"/>
-                </a:solidFill>
-                <a:latin typeface="Microsoft YaHei"/>
-              </a:rPr>
-              <a:t>想让每篇配图风格统一，就填画风或传样图自动提炼。</a:t>
-            </a:r>
-          </a:p>
-        </p:txBody>
-      </p:sp>
+        </p:spPr>
+      </p:pic>
     </p:spTree>
   </p:cSld>
   <p:clrMapOvr>
